--- a/templates/sample_template.pptx
+++ b/templates/sample_template.pptx
@@ -5,7 +5,7 @@
     <p:sldMasterId id="2147483685" r:id="rId4"/>
   </p:sldMasterIdLst>
   <p:notesMasterIdLst>
-    <p:notesMasterId r:id="rId25"/>
+    <p:notesMasterId r:id="rId20"/>
   </p:notesMasterIdLst>
   <p:sldIdLst>
     <p:sldId id="2147480629" r:id="rId5"/>
@@ -23,11 +23,6 @@
     <p:sldId id="2147480641" r:id="rId17"/>
     <p:sldId id="2147480642" r:id="rId18"/>
     <p:sldId id="2147480643" r:id="rId19"/>
-    <p:sldId id="2147480644" r:id="rId20"/>
-    <p:sldId id="2147480645" r:id="rId21"/>
-    <p:sldId id="2147480646" r:id="rId22"/>
-    <p:sldId id="2147480647" r:id="rId23"/>
-    <p:sldId id="2147480648" r:id="rId24"/>
   </p:sldIdLst>
   <p:sldSz cx="12192000" cy="6858000"/>
   <p:notesSz cx="9866313" cy="14295438"/>
@@ -225,7 +220,7 @@
           <a:p>
             <a:fld id="{FEDCE034-82A4-440B-B2A1-8F62DE5CE15F}" type="datetimeFigureOut">
               <a:rPr lang="ko-KR" altLang="en-US" smtClean="0"/>
-              <a:t>2026-04-15</a:t>
+              <a:t>2026-04-18</a:t>
             </a:fld>
             <a:endParaRPr lang="ko-KR" altLang="en-US"/>
           </a:p>
@@ -613,7 +608,7 @@
         <p:cNvPr id="1" name="">
           <a:extLst>
             <a:ext uri="{FF2B5EF4-FFF2-40B4-BE49-F238E27FC236}">
-              <a16:creationId xmlns:a16="http://schemas.microsoft.com/office/drawing/2014/main" id="{9229FE98-77B4-99C4-64C6-3691211D4093}"/>
+              <a16:creationId xmlns:a16="http://schemas.microsoft.com/office/drawing/2014/main" id="{D47E6495-8652-5559-E42B-6E4927A692A7}"/>
             </a:ext>
           </a:extLst>
         </p:cNvPr>
@@ -633,7 +628,7 @@
           <p:cNvPr id="2" name="슬라이드 이미지 개체 틀 1">
             <a:extLst>
               <a:ext uri="{FF2B5EF4-FFF2-40B4-BE49-F238E27FC236}">
-                <a16:creationId xmlns:a16="http://schemas.microsoft.com/office/drawing/2014/main" id="{5E5F038F-25D6-3EE6-2182-D73068E8C864}"/>
+                <a16:creationId xmlns:a16="http://schemas.microsoft.com/office/drawing/2014/main" id="{60FA25A9-6036-692B-4A47-B513891685B5}"/>
               </a:ext>
             </a:extLst>
           </p:cNvPr>
@@ -656,7 +651,7 @@
           <p:cNvPr id="3" name="슬라이드 노트 개체 틀 2">
             <a:extLst>
               <a:ext uri="{FF2B5EF4-FFF2-40B4-BE49-F238E27FC236}">
-                <a16:creationId xmlns:a16="http://schemas.microsoft.com/office/drawing/2014/main" id="{EFB17562-DF06-A685-AFF5-4E61D5ECA8C1}"/>
+                <a16:creationId xmlns:a16="http://schemas.microsoft.com/office/drawing/2014/main" id="{5E45884C-9EA5-EA44-3C4A-94B0C3DC16D2}"/>
               </a:ext>
             </a:extLst>
           </p:cNvPr>
@@ -681,7 +676,7 @@
           <p:cNvPr id="4" name="슬라이드 번호 개체 틀 3">
             <a:extLst>
               <a:ext uri="{FF2B5EF4-FFF2-40B4-BE49-F238E27FC236}">
-                <a16:creationId xmlns:a16="http://schemas.microsoft.com/office/drawing/2014/main" id="{3D15DEFA-2077-B899-05FE-266F80735C4A}"/>
+                <a16:creationId xmlns:a16="http://schemas.microsoft.com/office/drawing/2014/main" id="{7CFCAD21-3847-292C-828E-31F215181251}"/>
               </a:ext>
             </a:extLst>
           </p:cNvPr>
@@ -708,7 +703,7 @@
     </p:spTree>
     <p:extLst>
       <p:ext uri="{BB962C8B-B14F-4D97-AF65-F5344CB8AC3E}">
-        <p14:creationId xmlns:p14="http://schemas.microsoft.com/office/powerpoint/2010/main" val="2142744840"/>
+        <p14:creationId xmlns:p14="http://schemas.microsoft.com/office/powerpoint/2010/main" val="3635666006"/>
       </p:ext>
     </p:extLst>
   </p:cSld>
@@ -726,7 +721,7 @@
         <p:cNvPr id="1" name="">
           <a:extLst>
             <a:ext uri="{FF2B5EF4-FFF2-40B4-BE49-F238E27FC236}">
-              <a16:creationId xmlns:a16="http://schemas.microsoft.com/office/drawing/2014/main" id="{D3D9457A-1ECE-85EC-9665-C50ACDA6346E}"/>
+              <a16:creationId xmlns:a16="http://schemas.microsoft.com/office/drawing/2014/main" id="{A83825FC-6248-A034-2521-6CA962542D68}"/>
             </a:ext>
           </a:extLst>
         </p:cNvPr>
@@ -746,7 +741,7 @@
           <p:cNvPr id="2" name="슬라이드 이미지 개체 틀 1">
             <a:extLst>
               <a:ext uri="{FF2B5EF4-FFF2-40B4-BE49-F238E27FC236}">
-                <a16:creationId xmlns:a16="http://schemas.microsoft.com/office/drawing/2014/main" id="{F6CAB32D-BFA1-DA72-4CC1-0855CC51A4DC}"/>
+                <a16:creationId xmlns:a16="http://schemas.microsoft.com/office/drawing/2014/main" id="{B18C0B3A-2F03-ABAD-A79C-737118C87593}"/>
               </a:ext>
             </a:extLst>
           </p:cNvPr>
@@ -769,7 +764,7 @@
           <p:cNvPr id="3" name="슬라이드 노트 개체 틀 2">
             <a:extLst>
               <a:ext uri="{FF2B5EF4-FFF2-40B4-BE49-F238E27FC236}">
-                <a16:creationId xmlns:a16="http://schemas.microsoft.com/office/drawing/2014/main" id="{5E234A66-6A19-58C3-328A-EFBD58A56092}"/>
+                <a16:creationId xmlns:a16="http://schemas.microsoft.com/office/drawing/2014/main" id="{5BC996D1-074F-6A2A-356D-BAD03D36492A}"/>
               </a:ext>
             </a:extLst>
           </p:cNvPr>
@@ -794,7 +789,7 @@
           <p:cNvPr id="4" name="슬라이드 번호 개체 틀 3">
             <a:extLst>
               <a:ext uri="{FF2B5EF4-FFF2-40B4-BE49-F238E27FC236}">
-                <a16:creationId xmlns:a16="http://schemas.microsoft.com/office/drawing/2014/main" id="{0011E156-3991-6A98-65C1-1EE175B81D1E}"/>
+                <a16:creationId xmlns:a16="http://schemas.microsoft.com/office/drawing/2014/main" id="{7FD2D793-ADDD-722E-5B16-E49BB2F5F1FD}"/>
               </a:ext>
             </a:extLst>
           </p:cNvPr>
@@ -821,7 +816,7 @@
     </p:spTree>
     <p:extLst>
       <p:ext uri="{BB962C8B-B14F-4D97-AF65-F5344CB8AC3E}">
-        <p14:creationId xmlns:p14="http://schemas.microsoft.com/office/powerpoint/2010/main" val="2425968174"/>
+        <p14:creationId xmlns:p14="http://schemas.microsoft.com/office/powerpoint/2010/main" val="21330913"/>
       </p:ext>
     </p:extLst>
   </p:cSld>
@@ -839,7 +834,7 @@
         <p:cNvPr id="1" name="">
           <a:extLst>
             <a:ext uri="{FF2B5EF4-FFF2-40B4-BE49-F238E27FC236}">
-              <a16:creationId xmlns:a16="http://schemas.microsoft.com/office/drawing/2014/main" id="{625EF547-C27E-4DD2-C58A-A4CE830783B7}"/>
+              <a16:creationId xmlns:a16="http://schemas.microsoft.com/office/drawing/2014/main" id="{E0261981-7FA7-F02B-A168-4FA85D876CE7}"/>
             </a:ext>
           </a:extLst>
         </p:cNvPr>
@@ -859,7 +854,7 @@
           <p:cNvPr id="2" name="슬라이드 이미지 개체 틀 1">
             <a:extLst>
               <a:ext uri="{FF2B5EF4-FFF2-40B4-BE49-F238E27FC236}">
-                <a16:creationId xmlns:a16="http://schemas.microsoft.com/office/drawing/2014/main" id="{2315F0B5-D37A-2D86-6512-D0F7B2903DF5}"/>
+                <a16:creationId xmlns:a16="http://schemas.microsoft.com/office/drawing/2014/main" id="{DFEBCAAE-58B5-961B-36D9-1FA621EFBBE9}"/>
               </a:ext>
             </a:extLst>
           </p:cNvPr>
@@ -882,7 +877,7 @@
           <p:cNvPr id="3" name="슬라이드 노트 개체 틀 2">
             <a:extLst>
               <a:ext uri="{FF2B5EF4-FFF2-40B4-BE49-F238E27FC236}">
-                <a16:creationId xmlns:a16="http://schemas.microsoft.com/office/drawing/2014/main" id="{44E3B8C4-142E-0608-59EA-5BA05A1E6B17}"/>
+                <a16:creationId xmlns:a16="http://schemas.microsoft.com/office/drawing/2014/main" id="{E623D92E-E168-5966-5250-0847532DCEDA}"/>
               </a:ext>
             </a:extLst>
           </p:cNvPr>
@@ -907,7 +902,7 @@
           <p:cNvPr id="4" name="슬라이드 번호 개체 틀 3">
             <a:extLst>
               <a:ext uri="{FF2B5EF4-FFF2-40B4-BE49-F238E27FC236}">
-                <a16:creationId xmlns:a16="http://schemas.microsoft.com/office/drawing/2014/main" id="{DB6892B6-BD03-C7B7-7C80-EEB984F56D0A}"/>
+                <a16:creationId xmlns:a16="http://schemas.microsoft.com/office/drawing/2014/main" id="{F3A584F2-A559-7E22-8591-A5A91EE3CEC9}"/>
               </a:ext>
             </a:extLst>
           </p:cNvPr>
@@ -934,7 +929,7 @@
     </p:spTree>
     <p:extLst>
       <p:ext uri="{BB962C8B-B14F-4D97-AF65-F5344CB8AC3E}">
-        <p14:creationId xmlns:p14="http://schemas.microsoft.com/office/powerpoint/2010/main" val="3396750200"/>
+        <p14:creationId xmlns:p14="http://schemas.microsoft.com/office/powerpoint/2010/main" val="2355803706"/>
       </p:ext>
     </p:extLst>
   </p:cSld>
@@ -952,7 +947,7 @@
         <p:cNvPr id="1" name="">
           <a:extLst>
             <a:ext uri="{FF2B5EF4-FFF2-40B4-BE49-F238E27FC236}">
-              <a16:creationId xmlns:a16="http://schemas.microsoft.com/office/drawing/2014/main" id="{A2555B60-07FB-718C-3486-4D718F039BC2}"/>
+              <a16:creationId xmlns:a16="http://schemas.microsoft.com/office/drawing/2014/main" id="{D226AD1D-AC68-AC57-3AB2-482B4864BB39}"/>
             </a:ext>
           </a:extLst>
         </p:cNvPr>
@@ -972,7 +967,7 @@
           <p:cNvPr id="2" name="슬라이드 이미지 개체 틀 1">
             <a:extLst>
               <a:ext uri="{FF2B5EF4-FFF2-40B4-BE49-F238E27FC236}">
-                <a16:creationId xmlns:a16="http://schemas.microsoft.com/office/drawing/2014/main" id="{83BD3E1E-BAB6-4341-553C-07377A9B38C0}"/>
+                <a16:creationId xmlns:a16="http://schemas.microsoft.com/office/drawing/2014/main" id="{20C2924D-0297-F929-83CE-732F179E3AD7}"/>
               </a:ext>
             </a:extLst>
           </p:cNvPr>
@@ -995,7 +990,7 @@
           <p:cNvPr id="3" name="슬라이드 노트 개체 틀 2">
             <a:extLst>
               <a:ext uri="{FF2B5EF4-FFF2-40B4-BE49-F238E27FC236}">
-                <a16:creationId xmlns:a16="http://schemas.microsoft.com/office/drawing/2014/main" id="{5E169970-0F66-8DCF-3AC9-06051CE8708C}"/>
+                <a16:creationId xmlns:a16="http://schemas.microsoft.com/office/drawing/2014/main" id="{CA37BA52-2E75-CC1C-0E9F-1B7C97815AAD}"/>
               </a:ext>
             </a:extLst>
           </p:cNvPr>
@@ -1020,7 +1015,7 @@
           <p:cNvPr id="4" name="슬라이드 번호 개체 틀 3">
             <a:extLst>
               <a:ext uri="{FF2B5EF4-FFF2-40B4-BE49-F238E27FC236}">
-                <a16:creationId xmlns:a16="http://schemas.microsoft.com/office/drawing/2014/main" id="{17005D34-6B19-077F-BB8E-8FD0951302FD}"/>
+                <a16:creationId xmlns:a16="http://schemas.microsoft.com/office/drawing/2014/main" id="{FE34DE9A-8D57-AF8E-52CD-3A0C8DF69897}"/>
               </a:ext>
             </a:extLst>
           </p:cNvPr>
@@ -1047,7 +1042,7 @@
     </p:spTree>
     <p:extLst>
       <p:ext uri="{BB962C8B-B14F-4D97-AF65-F5344CB8AC3E}">
-        <p14:creationId xmlns:p14="http://schemas.microsoft.com/office/powerpoint/2010/main" val="3961156444"/>
+        <p14:creationId xmlns:p14="http://schemas.microsoft.com/office/powerpoint/2010/main" val="4273265651"/>
       </p:ext>
     </p:extLst>
   </p:cSld>
@@ -1065,7 +1060,7 @@
         <p:cNvPr id="1" name="">
           <a:extLst>
             <a:ext uri="{FF2B5EF4-FFF2-40B4-BE49-F238E27FC236}">
-              <a16:creationId xmlns:a16="http://schemas.microsoft.com/office/drawing/2014/main" id="{99D1BAA1-34FD-FB28-FEFC-E2DAA4774486}"/>
+              <a16:creationId xmlns:a16="http://schemas.microsoft.com/office/drawing/2014/main" id="{54646B65-A0D8-C97C-42F9-3E09A8B32E50}"/>
             </a:ext>
           </a:extLst>
         </p:cNvPr>
@@ -1085,7 +1080,7 @@
           <p:cNvPr id="2" name="슬라이드 이미지 개체 틀 1">
             <a:extLst>
               <a:ext uri="{FF2B5EF4-FFF2-40B4-BE49-F238E27FC236}">
-                <a16:creationId xmlns:a16="http://schemas.microsoft.com/office/drawing/2014/main" id="{1BE7E482-B0B2-37B6-6E81-A4B84D00A073}"/>
+                <a16:creationId xmlns:a16="http://schemas.microsoft.com/office/drawing/2014/main" id="{E8F6DC6B-ABAF-A9D9-A5C0-3E62B77D704C}"/>
               </a:ext>
             </a:extLst>
           </p:cNvPr>
@@ -1108,7 +1103,7 @@
           <p:cNvPr id="3" name="슬라이드 노트 개체 틀 2">
             <a:extLst>
               <a:ext uri="{FF2B5EF4-FFF2-40B4-BE49-F238E27FC236}">
-                <a16:creationId xmlns:a16="http://schemas.microsoft.com/office/drawing/2014/main" id="{FF52CC58-5A70-DF84-76B9-BE83516D3D80}"/>
+                <a16:creationId xmlns:a16="http://schemas.microsoft.com/office/drawing/2014/main" id="{4B5CD630-08F1-0BBF-6FFB-126E44A5CA20}"/>
               </a:ext>
             </a:extLst>
           </p:cNvPr>
@@ -1133,7 +1128,7 @@
           <p:cNvPr id="4" name="슬라이드 번호 개체 틀 3">
             <a:extLst>
               <a:ext uri="{FF2B5EF4-FFF2-40B4-BE49-F238E27FC236}">
-                <a16:creationId xmlns:a16="http://schemas.microsoft.com/office/drawing/2014/main" id="{1438050F-BA85-0C02-60F9-0F9E82C9C0F1}"/>
+                <a16:creationId xmlns:a16="http://schemas.microsoft.com/office/drawing/2014/main" id="{894C6228-B987-443D-DC8C-F3B73CF04C62}"/>
               </a:ext>
             </a:extLst>
           </p:cNvPr>
@@ -1160,7 +1155,7 @@
     </p:spTree>
     <p:extLst>
       <p:ext uri="{BB962C8B-B14F-4D97-AF65-F5344CB8AC3E}">
-        <p14:creationId xmlns:p14="http://schemas.microsoft.com/office/powerpoint/2010/main" val="1536173098"/>
+        <p14:creationId xmlns:p14="http://schemas.microsoft.com/office/powerpoint/2010/main" val="3497652014"/>
       </p:ext>
     </p:extLst>
   </p:cSld>
@@ -1178,7 +1173,7 @@
         <p:cNvPr id="1" name="">
           <a:extLst>
             <a:ext uri="{FF2B5EF4-FFF2-40B4-BE49-F238E27FC236}">
-              <a16:creationId xmlns:a16="http://schemas.microsoft.com/office/drawing/2014/main" id="{95133C00-63D2-A9A0-43AE-0C1CC9AC3EA7}"/>
+              <a16:creationId xmlns:a16="http://schemas.microsoft.com/office/drawing/2014/main" id="{72BCA34D-50F6-35AA-F4B9-49F321F1C2B2}"/>
             </a:ext>
           </a:extLst>
         </p:cNvPr>
@@ -1198,7 +1193,7 @@
           <p:cNvPr id="2" name="슬라이드 이미지 개체 틀 1">
             <a:extLst>
               <a:ext uri="{FF2B5EF4-FFF2-40B4-BE49-F238E27FC236}">
-                <a16:creationId xmlns:a16="http://schemas.microsoft.com/office/drawing/2014/main" id="{5EE2F534-40BF-E8F5-7B1A-6C5753CDB049}"/>
+                <a16:creationId xmlns:a16="http://schemas.microsoft.com/office/drawing/2014/main" id="{0E04EEF9-1BBD-E0AE-9709-A5B2363C66FF}"/>
               </a:ext>
             </a:extLst>
           </p:cNvPr>
@@ -1221,7 +1216,7 @@
           <p:cNvPr id="3" name="슬라이드 노트 개체 틀 2">
             <a:extLst>
               <a:ext uri="{FF2B5EF4-FFF2-40B4-BE49-F238E27FC236}">
-                <a16:creationId xmlns:a16="http://schemas.microsoft.com/office/drawing/2014/main" id="{2944B131-8C86-B43A-340D-BE337E5FA927}"/>
+                <a16:creationId xmlns:a16="http://schemas.microsoft.com/office/drawing/2014/main" id="{F53EB9A9-E0EE-A2C6-7E61-2571C1D9B343}"/>
               </a:ext>
             </a:extLst>
           </p:cNvPr>
@@ -1246,7 +1241,7 @@
           <p:cNvPr id="4" name="슬라이드 번호 개체 틀 3">
             <a:extLst>
               <a:ext uri="{FF2B5EF4-FFF2-40B4-BE49-F238E27FC236}">
-                <a16:creationId xmlns:a16="http://schemas.microsoft.com/office/drawing/2014/main" id="{F6D25DCD-3A74-8002-CEE5-66715214B4C3}"/>
+                <a16:creationId xmlns:a16="http://schemas.microsoft.com/office/drawing/2014/main" id="{A02BA5B5-776F-4060-BDE0-3844B21DBE4B}"/>
               </a:ext>
             </a:extLst>
           </p:cNvPr>
@@ -1273,7 +1268,7 @@
     </p:spTree>
     <p:extLst>
       <p:ext uri="{BB962C8B-B14F-4D97-AF65-F5344CB8AC3E}">
-        <p14:creationId xmlns:p14="http://schemas.microsoft.com/office/powerpoint/2010/main" val="1050765138"/>
+        <p14:creationId xmlns:p14="http://schemas.microsoft.com/office/powerpoint/2010/main" val="3997273414"/>
       </p:ext>
     </p:extLst>
   </p:cSld>
@@ -1283,7 +1278,7 @@
 </p:notes>
 </file>
 
-<file path=ppt/notesSlides/notesSlide16.xml><?xml version="1.0" encoding="utf-8"?>
+<file path=ppt/notesSlides/notesSlide2.xml><?xml version="1.0" encoding="utf-8"?>
 <p:notes xmlns:a="http://schemas.openxmlformats.org/drawingml/2006/main" xmlns:r="http://schemas.openxmlformats.org/officeDocument/2006/relationships" xmlns:p="http://schemas.openxmlformats.org/presentationml/2006/main">
   <p:cSld>
     <p:spTree>
@@ -1291,7 +1286,7 @@
         <p:cNvPr id="1" name="">
           <a:extLst>
             <a:ext uri="{FF2B5EF4-FFF2-40B4-BE49-F238E27FC236}">
-              <a16:creationId xmlns:a16="http://schemas.microsoft.com/office/drawing/2014/main" id="{B1755BCE-886F-3BC2-EB2E-7DF6A466A1BC}"/>
+              <a16:creationId xmlns:a16="http://schemas.microsoft.com/office/drawing/2014/main" id="{BFACE1A2-3C6E-A00B-FF31-05DB0286A72D}"/>
             </a:ext>
           </a:extLst>
         </p:cNvPr>
@@ -1311,7 +1306,7 @@
           <p:cNvPr id="2" name="슬라이드 이미지 개체 틀 1">
             <a:extLst>
               <a:ext uri="{FF2B5EF4-FFF2-40B4-BE49-F238E27FC236}">
-                <a16:creationId xmlns:a16="http://schemas.microsoft.com/office/drawing/2014/main" id="{EB1B40D4-C520-FDE5-567F-7906EEA941A7}"/>
+                <a16:creationId xmlns:a16="http://schemas.microsoft.com/office/drawing/2014/main" id="{51E13CCA-32E8-C4D1-622F-1EFC5BE6DA6E}"/>
               </a:ext>
             </a:extLst>
           </p:cNvPr>
@@ -1334,7 +1329,7 @@
           <p:cNvPr id="3" name="슬라이드 노트 개체 틀 2">
             <a:extLst>
               <a:ext uri="{FF2B5EF4-FFF2-40B4-BE49-F238E27FC236}">
-                <a16:creationId xmlns:a16="http://schemas.microsoft.com/office/drawing/2014/main" id="{70C74B87-3FA2-9646-E0E5-422CDE9FB139}"/>
+                <a16:creationId xmlns:a16="http://schemas.microsoft.com/office/drawing/2014/main" id="{F4D30E95-7E10-6732-854E-650F546FAFA5}"/>
               </a:ext>
             </a:extLst>
           </p:cNvPr>
@@ -1359,459 +1354,7 @@
           <p:cNvPr id="4" name="슬라이드 번호 개체 틀 3">
             <a:extLst>
               <a:ext uri="{FF2B5EF4-FFF2-40B4-BE49-F238E27FC236}">
-                <a16:creationId xmlns:a16="http://schemas.microsoft.com/office/drawing/2014/main" id="{A6B0CEF1-F437-BA5E-672E-FB0863BE9F17}"/>
-              </a:ext>
-            </a:extLst>
-          </p:cNvPr>
-          <p:cNvSpPr>
-            <a:spLocks noGrp="1"/>
-          </p:cNvSpPr>
-          <p:nvPr>
-            <p:ph type="sldNum" sz="quarter" idx="5"/>
-          </p:nvPr>
-        </p:nvSpPr>
-        <p:spPr/>
-        <p:txBody>
-          <a:bodyPr/>
-          <a:lstStyle/>
-          <a:p>
-            <a:fld id="{729DAA95-2AEA-4568-9FD7-5FDEF721D897}" type="slidenum">
-              <a:rPr lang="ko-KR" altLang="en-US" smtClean="0"/>
-              <a:t>16</a:t>
-            </a:fld>
-            <a:endParaRPr lang="ko-KR" altLang="en-US"/>
-          </a:p>
-        </p:txBody>
-      </p:sp>
-    </p:spTree>
-    <p:extLst>
-      <p:ext uri="{BB962C8B-B14F-4D97-AF65-F5344CB8AC3E}">
-        <p14:creationId xmlns:p14="http://schemas.microsoft.com/office/powerpoint/2010/main" val="2308336045"/>
-      </p:ext>
-    </p:extLst>
-  </p:cSld>
-  <p:clrMapOvr>
-    <a:masterClrMapping/>
-  </p:clrMapOvr>
-</p:notes>
-</file>
-
-<file path=ppt/notesSlides/notesSlide17.xml><?xml version="1.0" encoding="utf-8"?>
-<p:notes xmlns:a="http://schemas.openxmlformats.org/drawingml/2006/main" xmlns:r="http://schemas.openxmlformats.org/officeDocument/2006/relationships" xmlns:p="http://schemas.openxmlformats.org/presentationml/2006/main">
-  <p:cSld>
-    <p:spTree>
-      <p:nvGrpSpPr>
-        <p:cNvPr id="1" name="">
-          <a:extLst>
-            <a:ext uri="{FF2B5EF4-FFF2-40B4-BE49-F238E27FC236}">
-              <a16:creationId xmlns:a16="http://schemas.microsoft.com/office/drawing/2014/main" id="{A4386F5A-26D2-44F2-06E0-C9B29ACE96EA}"/>
-            </a:ext>
-          </a:extLst>
-        </p:cNvPr>
-        <p:cNvGrpSpPr/>
-        <p:nvPr/>
-      </p:nvGrpSpPr>
-      <p:grpSpPr>
-        <a:xfrm>
-          <a:off x="0" y="0"/>
-          <a:ext cx="0" cy="0"/>
-          <a:chOff x="0" y="0"/>
-          <a:chExt cx="0" cy="0"/>
-        </a:xfrm>
-      </p:grpSpPr>
-      <p:sp>
-        <p:nvSpPr>
-          <p:cNvPr id="2" name="슬라이드 이미지 개체 틀 1">
-            <a:extLst>
-              <a:ext uri="{FF2B5EF4-FFF2-40B4-BE49-F238E27FC236}">
-                <a16:creationId xmlns:a16="http://schemas.microsoft.com/office/drawing/2014/main" id="{5B5974F7-29E5-0E45-EFC0-0910A5AEFFB3}"/>
-              </a:ext>
-            </a:extLst>
-          </p:cNvPr>
-          <p:cNvSpPr>
-            <a:spLocks noGrp="1" noRot="1" noChangeAspect="1"/>
-          </p:cNvSpPr>
-          <p:nvPr>
-            <p:ph type="sldImg"/>
-          </p:nvPr>
-        </p:nvSpPr>
-        <p:spPr>
-          <a:xfrm>
-            <a:off x="646113" y="1787525"/>
-            <a:ext cx="8575675" cy="4824413"/>
-          </a:xfrm>
-        </p:spPr>
-      </p:sp>
-      <p:sp>
-        <p:nvSpPr>
-          <p:cNvPr id="3" name="슬라이드 노트 개체 틀 2">
-            <a:extLst>
-              <a:ext uri="{FF2B5EF4-FFF2-40B4-BE49-F238E27FC236}">
-                <a16:creationId xmlns:a16="http://schemas.microsoft.com/office/drawing/2014/main" id="{0C7D7024-BA06-875A-E3BB-B1D7A6DE0B88}"/>
-              </a:ext>
-            </a:extLst>
-          </p:cNvPr>
-          <p:cNvSpPr>
-            <a:spLocks noGrp="1"/>
-          </p:cNvSpPr>
-          <p:nvPr>
-            <p:ph type="body" idx="1"/>
-          </p:nvPr>
-        </p:nvSpPr>
-        <p:spPr/>
-        <p:txBody>
-          <a:bodyPr/>
-          <a:lstStyle/>
-          <a:p>
-            <a:endParaRPr lang="ko-KR" altLang="en-US"/>
-          </a:p>
-        </p:txBody>
-      </p:sp>
-      <p:sp>
-        <p:nvSpPr>
-          <p:cNvPr id="4" name="슬라이드 번호 개체 틀 3">
-            <a:extLst>
-              <a:ext uri="{FF2B5EF4-FFF2-40B4-BE49-F238E27FC236}">
-                <a16:creationId xmlns:a16="http://schemas.microsoft.com/office/drawing/2014/main" id="{6ED88E50-6933-FA54-24F0-EFA0F603EFAE}"/>
-              </a:ext>
-            </a:extLst>
-          </p:cNvPr>
-          <p:cNvSpPr>
-            <a:spLocks noGrp="1"/>
-          </p:cNvSpPr>
-          <p:nvPr>
-            <p:ph type="sldNum" sz="quarter" idx="5"/>
-          </p:nvPr>
-        </p:nvSpPr>
-        <p:spPr/>
-        <p:txBody>
-          <a:bodyPr/>
-          <a:lstStyle/>
-          <a:p>
-            <a:fld id="{729DAA95-2AEA-4568-9FD7-5FDEF721D897}" type="slidenum">
-              <a:rPr lang="ko-KR" altLang="en-US" smtClean="0"/>
-              <a:t>17</a:t>
-            </a:fld>
-            <a:endParaRPr lang="ko-KR" altLang="en-US"/>
-          </a:p>
-        </p:txBody>
-      </p:sp>
-    </p:spTree>
-    <p:extLst>
-      <p:ext uri="{BB962C8B-B14F-4D97-AF65-F5344CB8AC3E}">
-        <p14:creationId xmlns:p14="http://schemas.microsoft.com/office/powerpoint/2010/main" val="2812857144"/>
-      </p:ext>
-    </p:extLst>
-  </p:cSld>
-  <p:clrMapOvr>
-    <a:masterClrMapping/>
-  </p:clrMapOvr>
-</p:notes>
-</file>
-
-<file path=ppt/notesSlides/notesSlide18.xml><?xml version="1.0" encoding="utf-8"?>
-<p:notes xmlns:a="http://schemas.openxmlformats.org/drawingml/2006/main" xmlns:r="http://schemas.openxmlformats.org/officeDocument/2006/relationships" xmlns:p="http://schemas.openxmlformats.org/presentationml/2006/main">
-  <p:cSld>
-    <p:spTree>
-      <p:nvGrpSpPr>
-        <p:cNvPr id="1" name="">
-          <a:extLst>
-            <a:ext uri="{FF2B5EF4-FFF2-40B4-BE49-F238E27FC236}">
-              <a16:creationId xmlns:a16="http://schemas.microsoft.com/office/drawing/2014/main" id="{85F29833-4BF8-6751-1DC2-09EE35590B05}"/>
-            </a:ext>
-          </a:extLst>
-        </p:cNvPr>
-        <p:cNvGrpSpPr/>
-        <p:nvPr/>
-      </p:nvGrpSpPr>
-      <p:grpSpPr>
-        <a:xfrm>
-          <a:off x="0" y="0"/>
-          <a:ext cx="0" cy="0"/>
-          <a:chOff x="0" y="0"/>
-          <a:chExt cx="0" cy="0"/>
-        </a:xfrm>
-      </p:grpSpPr>
-      <p:sp>
-        <p:nvSpPr>
-          <p:cNvPr id="2" name="슬라이드 이미지 개체 틀 1">
-            <a:extLst>
-              <a:ext uri="{FF2B5EF4-FFF2-40B4-BE49-F238E27FC236}">
-                <a16:creationId xmlns:a16="http://schemas.microsoft.com/office/drawing/2014/main" id="{EB25F6AB-0050-9267-A6EE-2A8D7755F4C8}"/>
-              </a:ext>
-            </a:extLst>
-          </p:cNvPr>
-          <p:cNvSpPr>
-            <a:spLocks noGrp="1" noRot="1" noChangeAspect="1"/>
-          </p:cNvSpPr>
-          <p:nvPr>
-            <p:ph type="sldImg"/>
-          </p:nvPr>
-        </p:nvSpPr>
-        <p:spPr>
-          <a:xfrm>
-            <a:off x="646113" y="1787525"/>
-            <a:ext cx="8575675" cy="4824413"/>
-          </a:xfrm>
-        </p:spPr>
-      </p:sp>
-      <p:sp>
-        <p:nvSpPr>
-          <p:cNvPr id="3" name="슬라이드 노트 개체 틀 2">
-            <a:extLst>
-              <a:ext uri="{FF2B5EF4-FFF2-40B4-BE49-F238E27FC236}">
-                <a16:creationId xmlns:a16="http://schemas.microsoft.com/office/drawing/2014/main" id="{6EFD3B0C-7F9F-132C-6A0F-F9148A2682A0}"/>
-              </a:ext>
-            </a:extLst>
-          </p:cNvPr>
-          <p:cNvSpPr>
-            <a:spLocks noGrp="1"/>
-          </p:cNvSpPr>
-          <p:nvPr>
-            <p:ph type="body" idx="1"/>
-          </p:nvPr>
-        </p:nvSpPr>
-        <p:spPr/>
-        <p:txBody>
-          <a:bodyPr/>
-          <a:lstStyle/>
-          <a:p>
-            <a:endParaRPr lang="ko-KR" altLang="en-US"/>
-          </a:p>
-        </p:txBody>
-      </p:sp>
-      <p:sp>
-        <p:nvSpPr>
-          <p:cNvPr id="4" name="슬라이드 번호 개체 틀 3">
-            <a:extLst>
-              <a:ext uri="{FF2B5EF4-FFF2-40B4-BE49-F238E27FC236}">
-                <a16:creationId xmlns:a16="http://schemas.microsoft.com/office/drawing/2014/main" id="{29285937-BB09-62A0-A008-697D57ADE90C}"/>
-              </a:ext>
-            </a:extLst>
-          </p:cNvPr>
-          <p:cNvSpPr>
-            <a:spLocks noGrp="1"/>
-          </p:cNvSpPr>
-          <p:nvPr>
-            <p:ph type="sldNum" sz="quarter" idx="5"/>
-          </p:nvPr>
-        </p:nvSpPr>
-        <p:spPr/>
-        <p:txBody>
-          <a:bodyPr/>
-          <a:lstStyle/>
-          <a:p>
-            <a:fld id="{729DAA95-2AEA-4568-9FD7-5FDEF721D897}" type="slidenum">
-              <a:rPr lang="ko-KR" altLang="en-US" smtClean="0"/>
-              <a:t>18</a:t>
-            </a:fld>
-            <a:endParaRPr lang="ko-KR" altLang="en-US"/>
-          </a:p>
-        </p:txBody>
-      </p:sp>
-    </p:spTree>
-    <p:extLst>
-      <p:ext uri="{BB962C8B-B14F-4D97-AF65-F5344CB8AC3E}">
-        <p14:creationId xmlns:p14="http://schemas.microsoft.com/office/powerpoint/2010/main" val="2655920460"/>
-      </p:ext>
-    </p:extLst>
-  </p:cSld>
-  <p:clrMapOvr>
-    <a:masterClrMapping/>
-  </p:clrMapOvr>
-</p:notes>
-</file>
-
-<file path=ppt/notesSlides/notesSlide19.xml><?xml version="1.0" encoding="utf-8"?>
-<p:notes xmlns:a="http://schemas.openxmlformats.org/drawingml/2006/main" xmlns:r="http://schemas.openxmlformats.org/officeDocument/2006/relationships" xmlns:p="http://schemas.openxmlformats.org/presentationml/2006/main">
-  <p:cSld>
-    <p:spTree>
-      <p:nvGrpSpPr>
-        <p:cNvPr id="1" name="">
-          <a:extLst>
-            <a:ext uri="{FF2B5EF4-FFF2-40B4-BE49-F238E27FC236}">
-              <a16:creationId xmlns:a16="http://schemas.microsoft.com/office/drawing/2014/main" id="{9408205F-138C-5E0E-E587-597714E6C9CE}"/>
-            </a:ext>
-          </a:extLst>
-        </p:cNvPr>
-        <p:cNvGrpSpPr/>
-        <p:nvPr/>
-      </p:nvGrpSpPr>
-      <p:grpSpPr>
-        <a:xfrm>
-          <a:off x="0" y="0"/>
-          <a:ext cx="0" cy="0"/>
-          <a:chOff x="0" y="0"/>
-          <a:chExt cx="0" cy="0"/>
-        </a:xfrm>
-      </p:grpSpPr>
-      <p:sp>
-        <p:nvSpPr>
-          <p:cNvPr id="2" name="슬라이드 이미지 개체 틀 1">
-            <a:extLst>
-              <a:ext uri="{FF2B5EF4-FFF2-40B4-BE49-F238E27FC236}">
-                <a16:creationId xmlns:a16="http://schemas.microsoft.com/office/drawing/2014/main" id="{17B07A89-470E-AC3C-9517-33F1A6BA41AB}"/>
-              </a:ext>
-            </a:extLst>
-          </p:cNvPr>
-          <p:cNvSpPr>
-            <a:spLocks noGrp="1" noRot="1" noChangeAspect="1"/>
-          </p:cNvSpPr>
-          <p:nvPr>
-            <p:ph type="sldImg"/>
-          </p:nvPr>
-        </p:nvSpPr>
-        <p:spPr>
-          <a:xfrm>
-            <a:off x="646113" y="1787525"/>
-            <a:ext cx="8575675" cy="4824413"/>
-          </a:xfrm>
-        </p:spPr>
-      </p:sp>
-      <p:sp>
-        <p:nvSpPr>
-          <p:cNvPr id="3" name="슬라이드 노트 개체 틀 2">
-            <a:extLst>
-              <a:ext uri="{FF2B5EF4-FFF2-40B4-BE49-F238E27FC236}">
-                <a16:creationId xmlns:a16="http://schemas.microsoft.com/office/drawing/2014/main" id="{FEA86710-C822-EB00-03F3-20CF9B458B94}"/>
-              </a:ext>
-            </a:extLst>
-          </p:cNvPr>
-          <p:cNvSpPr>
-            <a:spLocks noGrp="1"/>
-          </p:cNvSpPr>
-          <p:nvPr>
-            <p:ph type="body" idx="1"/>
-          </p:nvPr>
-        </p:nvSpPr>
-        <p:spPr/>
-        <p:txBody>
-          <a:bodyPr/>
-          <a:lstStyle/>
-          <a:p>
-            <a:endParaRPr lang="ko-KR" altLang="en-US"/>
-          </a:p>
-        </p:txBody>
-      </p:sp>
-      <p:sp>
-        <p:nvSpPr>
-          <p:cNvPr id="4" name="슬라이드 번호 개체 틀 3">
-            <a:extLst>
-              <a:ext uri="{FF2B5EF4-FFF2-40B4-BE49-F238E27FC236}">
-                <a16:creationId xmlns:a16="http://schemas.microsoft.com/office/drawing/2014/main" id="{95B37993-81E1-1B22-FDA4-50D1E0E37B74}"/>
-              </a:ext>
-            </a:extLst>
-          </p:cNvPr>
-          <p:cNvSpPr>
-            <a:spLocks noGrp="1"/>
-          </p:cNvSpPr>
-          <p:nvPr>
-            <p:ph type="sldNum" sz="quarter" idx="5"/>
-          </p:nvPr>
-        </p:nvSpPr>
-        <p:spPr/>
-        <p:txBody>
-          <a:bodyPr/>
-          <a:lstStyle/>
-          <a:p>
-            <a:fld id="{729DAA95-2AEA-4568-9FD7-5FDEF721D897}" type="slidenum">
-              <a:rPr lang="ko-KR" altLang="en-US" smtClean="0"/>
-              <a:t>19</a:t>
-            </a:fld>
-            <a:endParaRPr lang="ko-KR" altLang="en-US"/>
-          </a:p>
-        </p:txBody>
-      </p:sp>
-    </p:spTree>
-    <p:extLst>
-      <p:ext uri="{BB962C8B-B14F-4D97-AF65-F5344CB8AC3E}">
-        <p14:creationId xmlns:p14="http://schemas.microsoft.com/office/powerpoint/2010/main" val="2634426282"/>
-      </p:ext>
-    </p:extLst>
-  </p:cSld>
-  <p:clrMapOvr>
-    <a:masterClrMapping/>
-  </p:clrMapOvr>
-</p:notes>
-</file>
-
-<file path=ppt/notesSlides/notesSlide2.xml><?xml version="1.0" encoding="utf-8"?>
-<p:notes xmlns:a="http://schemas.openxmlformats.org/drawingml/2006/main" xmlns:r="http://schemas.openxmlformats.org/officeDocument/2006/relationships" xmlns:p="http://schemas.openxmlformats.org/presentationml/2006/main">
-  <p:cSld>
-    <p:spTree>
-      <p:nvGrpSpPr>
-        <p:cNvPr id="1" name="">
-          <a:extLst>
-            <a:ext uri="{FF2B5EF4-FFF2-40B4-BE49-F238E27FC236}">
-              <a16:creationId xmlns:a16="http://schemas.microsoft.com/office/drawing/2014/main" id="{54BC7621-D953-2D28-5AC0-C59374FDFB7C}"/>
-            </a:ext>
-          </a:extLst>
-        </p:cNvPr>
-        <p:cNvGrpSpPr/>
-        <p:nvPr/>
-      </p:nvGrpSpPr>
-      <p:grpSpPr>
-        <a:xfrm>
-          <a:off x="0" y="0"/>
-          <a:ext cx="0" cy="0"/>
-          <a:chOff x="0" y="0"/>
-          <a:chExt cx="0" cy="0"/>
-        </a:xfrm>
-      </p:grpSpPr>
-      <p:sp>
-        <p:nvSpPr>
-          <p:cNvPr id="2" name="슬라이드 이미지 개체 틀 1">
-            <a:extLst>
-              <a:ext uri="{FF2B5EF4-FFF2-40B4-BE49-F238E27FC236}">
-                <a16:creationId xmlns:a16="http://schemas.microsoft.com/office/drawing/2014/main" id="{5FA11B10-3340-EA9B-9D70-DB45E1CC9717}"/>
-              </a:ext>
-            </a:extLst>
-          </p:cNvPr>
-          <p:cNvSpPr>
-            <a:spLocks noGrp="1" noRot="1" noChangeAspect="1"/>
-          </p:cNvSpPr>
-          <p:nvPr>
-            <p:ph type="sldImg"/>
-          </p:nvPr>
-        </p:nvSpPr>
-        <p:spPr>
-          <a:xfrm>
-            <a:off x="646113" y="1787525"/>
-            <a:ext cx="8575675" cy="4824413"/>
-          </a:xfrm>
-        </p:spPr>
-      </p:sp>
-      <p:sp>
-        <p:nvSpPr>
-          <p:cNvPr id="3" name="슬라이드 노트 개체 틀 2">
-            <a:extLst>
-              <a:ext uri="{FF2B5EF4-FFF2-40B4-BE49-F238E27FC236}">
-                <a16:creationId xmlns:a16="http://schemas.microsoft.com/office/drawing/2014/main" id="{DB1A812B-EBEB-FDE5-828D-9C1B56F2F12E}"/>
-              </a:ext>
-            </a:extLst>
-          </p:cNvPr>
-          <p:cNvSpPr>
-            <a:spLocks noGrp="1"/>
-          </p:cNvSpPr>
-          <p:nvPr>
-            <p:ph type="body" idx="1"/>
-          </p:nvPr>
-        </p:nvSpPr>
-        <p:spPr/>
-        <p:txBody>
-          <a:bodyPr/>
-          <a:lstStyle/>
-          <a:p>
-            <a:endParaRPr lang="ko-KR" altLang="en-US"/>
-          </a:p>
-        </p:txBody>
-      </p:sp>
-      <p:sp>
-        <p:nvSpPr>
-          <p:cNvPr id="4" name="슬라이드 번호 개체 틀 3">
-            <a:extLst>
-              <a:ext uri="{FF2B5EF4-FFF2-40B4-BE49-F238E27FC236}">
-                <a16:creationId xmlns:a16="http://schemas.microsoft.com/office/drawing/2014/main" id="{F275B798-C240-BA37-924B-2ED965D1EDAE}"/>
+                <a16:creationId xmlns:a16="http://schemas.microsoft.com/office/drawing/2014/main" id="{F65AB1C5-1238-0E14-3798-D165F088DB59}"/>
               </a:ext>
             </a:extLst>
           </p:cNvPr>
@@ -1838,7 +1381,7 @@
     </p:spTree>
     <p:extLst>
       <p:ext uri="{BB962C8B-B14F-4D97-AF65-F5344CB8AC3E}">
-        <p14:creationId xmlns:p14="http://schemas.microsoft.com/office/powerpoint/2010/main" val="1218146026"/>
+        <p14:creationId xmlns:p14="http://schemas.microsoft.com/office/powerpoint/2010/main" val="2303006313"/>
       </p:ext>
     </p:extLst>
   </p:cSld>
@@ -1848,7 +1391,7 @@
 </p:notes>
 </file>
 
-<file path=ppt/notesSlides/notesSlide20.xml><?xml version="1.0" encoding="utf-8"?>
+<file path=ppt/notesSlides/notesSlide3.xml><?xml version="1.0" encoding="utf-8"?>
 <p:notes xmlns:a="http://schemas.openxmlformats.org/drawingml/2006/main" xmlns:r="http://schemas.openxmlformats.org/officeDocument/2006/relationships" xmlns:p="http://schemas.openxmlformats.org/presentationml/2006/main">
   <p:cSld>
     <p:spTree>
@@ -1856,7 +1399,7 @@
         <p:cNvPr id="1" name="">
           <a:extLst>
             <a:ext uri="{FF2B5EF4-FFF2-40B4-BE49-F238E27FC236}">
-              <a16:creationId xmlns:a16="http://schemas.microsoft.com/office/drawing/2014/main" id="{B2F67749-800F-D5C8-1BF8-75D0CE3FD511}"/>
+              <a16:creationId xmlns:a16="http://schemas.microsoft.com/office/drawing/2014/main" id="{E8EEF235-5816-BA9C-5484-0AD3CED497DF}"/>
             </a:ext>
           </a:extLst>
         </p:cNvPr>
@@ -1876,7 +1419,7 @@
           <p:cNvPr id="2" name="슬라이드 이미지 개체 틀 1">
             <a:extLst>
               <a:ext uri="{FF2B5EF4-FFF2-40B4-BE49-F238E27FC236}">
-                <a16:creationId xmlns:a16="http://schemas.microsoft.com/office/drawing/2014/main" id="{FE723D3A-5077-A091-284B-7DA8CBBBCBE6}"/>
+                <a16:creationId xmlns:a16="http://schemas.microsoft.com/office/drawing/2014/main" id="{1CAC0522-8D1B-019C-0663-955480F92FB7}"/>
               </a:ext>
             </a:extLst>
           </p:cNvPr>
@@ -1899,7 +1442,7 @@
           <p:cNvPr id="3" name="슬라이드 노트 개체 틀 2">
             <a:extLst>
               <a:ext uri="{FF2B5EF4-FFF2-40B4-BE49-F238E27FC236}">
-                <a16:creationId xmlns:a16="http://schemas.microsoft.com/office/drawing/2014/main" id="{C2E01A58-E768-C404-7DA5-00E29357881A}"/>
+                <a16:creationId xmlns:a16="http://schemas.microsoft.com/office/drawing/2014/main" id="{9FF8C456-E7DD-5DC6-3CED-B91D34DCF82F}"/>
               </a:ext>
             </a:extLst>
           </p:cNvPr>
@@ -1924,120 +1467,7 @@
           <p:cNvPr id="4" name="슬라이드 번호 개체 틀 3">
             <a:extLst>
               <a:ext uri="{FF2B5EF4-FFF2-40B4-BE49-F238E27FC236}">
-                <a16:creationId xmlns:a16="http://schemas.microsoft.com/office/drawing/2014/main" id="{B63E70A3-2DC0-0A23-594D-5216C7FB101A}"/>
-              </a:ext>
-            </a:extLst>
-          </p:cNvPr>
-          <p:cNvSpPr>
-            <a:spLocks noGrp="1"/>
-          </p:cNvSpPr>
-          <p:nvPr>
-            <p:ph type="sldNum" sz="quarter" idx="5"/>
-          </p:nvPr>
-        </p:nvSpPr>
-        <p:spPr/>
-        <p:txBody>
-          <a:bodyPr/>
-          <a:lstStyle/>
-          <a:p>
-            <a:fld id="{729DAA95-2AEA-4568-9FD7-5FDEF721D897}" type="slidenum">
-              <a:rPr lang="ko-KR" altLang="en-US" smtClean="0"/>
-              <a:t>20</a:t>
-            </a:fld>
-            <a:endParaRPr lang="ko-KR" altLang="en-US"/>
-          </a:p>
-        </p:txBody>
-      </p:sp>
-    </p:spTree>
-    <p:extLst>
-      <p:ext uri="{BB962C8B-B14F-4D97-AF65-F5344CB8AC3E}">
-        <p14:creationId xmlns:p14="http://schemas.microsoft.com/office/powerpoint/2010/main" val="84815734"/>
-      </p:ext>
-    </p:extLst>
-  </p:cSld>
-  <p:clrMapOvr>
-    <a:masterClrMapping/>
-  </p:clrMapOvr>
-</p:notes>
-</file>
-
-<file path=ppt/notesSlides/notesSlide3.xml><?xml version="1.0" encoding="utf-8"?>
-<p:notes xmlns:a="http://schemas.openxmlformats.org/drawingml/2006/main" xmlns:r="http://schemas.openxmlformats.org/officeDocument/2006/relationships" xmlns:p="http://schemas.openxmlformats.org/presentationml/2006/main">
-  <p:cSld>
-    <p:spTree>
-      <p:nvGrpSpPr>
-        <p:cNvPr id="1" name="">
-          <a:extLst>
-            <a:ext uri="{FF2B5EF4-FFF2-40B4-BE49-F238E27FC236}">
-              <a16:creationId xmlns:a16="http://schemas.microsoft.com/office/drawing/2014/main" id="{58A56843-91E3-F7AE-44BB-29B304DD1221}"/>
-            </a:ext>
-          </a:extLst>
-        </p:cNvPr>
-        <p:cNvGrpSpPr/>
-        <p:nvPr/>
-      </p:nvGrpSpPr>
-      <p:grpSpPr>
-        <a:xfrm>
-          <a:off x="0" y="0"/>
-          <a:ext cx="0" cy="0"/>
-          <a:chOff x="0" y="0"/>
-          <a:chExt cx="0" cy="0"/>
-        </a:xfrm>
-      </p:grpSpPr>
-      <p:sp>
-        <p:nvSpPr>
-          <p:cNvPr id="2" name="슬라이드 이미지 개체 틀 1">
-            <a:extLst>
-              <a:ext uri="{FF2B5EF4-FFF2-40B4-BE49-F238E27FC236}">
-                <a16:creationId xmlns:a16="http://schemas.microsoft.com/office/drawing/2014/main" id="{C85AA085-7CB5-C13F-924A-7258CD2F516B}"/>
-              </a:ext>
-            </a:extLst>
-          </p:cNvPr>
-          <p:cNvSpPr>
-            <a:spLocks noGrp="1" noRot="1" noChangeAspect="1"/>
-          </p:cNvSpPr>
-          <p:nvPr>
-            <p:ph type="sldImg"/>
-          </p:nvPr>
-        </p:nvSpPr>
-        <p:spPr>
-          <a:xfrm>
-            <a:off x="646113" y="1787525"/>
-            <a:ext cx="8575675" cy="4824413"/>
-          </a:xfrm>
-        </p:spPr>
-      </p:sp>
-      <p:sp>
-        <p:nvSpPr>
-          <p:cNvPr id="3" name="슬라이드 노트 개체 틀 2">
-            <a:extLst>
-              <a:ext uri="{FF2B5EF4-FFF2-40B4-BE49-F238E27FC236}">
-                <a16:creationId xmlns:a16="http://schemas.microsoft.com/office/drawing/2014/main" id="{E7457D54-E916-C16F-D190-47B126D46E3B}"/>
-              </a:ext>
-            </a:extLst>
-          </p:cNvPr>
-          <p:cNvSpPr>
-            <a:spLocks noGrp="1"/>
-          </p:cNvSpPr>
-          <p:nvPr>
-            <p:ph type="body" idx="1"/>
-          </p:nvPr>
-        </p:nvSpPr>
-        <p:spPr/>
-        <p:txBody>
-          <a:bodyPr/>
-          <a:lstStyle/>
-          <a:p>
-            <a:endParaRPr lang="ko-KR" altLang="en-US"/>
-          </a:p>
-        </p:txBody>
-      </p:sp>
-      <p:sp>
-        <p:nvSpPr>
-          <p:cNvPr id="4" name="슬라이드 번호 개체 틀 3">
-            <a:extLst>
-              <a:ext uri="{FF2B5EF4-FFF2-40B4-BE49-F238E27FC236}">
-                <a16:creationId xmlns:a16="http://schemas.microsoft.com/office/drawing/2014/main" id="{D91911A6-3B6C-E6CD-05A2-E9B9C686DC7F}"/>
+                <a16:creationId xmlns:a16="http://schemas.microsoft.com/office/drawing/2014/main" id="{32012D87-853C-5FA9-C786-75F5B8604212}"/>
               </a:ext>
             </a:extLst>
           </p:cNvPr>
@@ -2064,7 +1494,7 @@
     </p:spTree>
     <p:extLst>
       <p:ext uri="{BB962C8B-B14F-4D97-AF65-F5344CB8AC3E}">
-        <p14:creationId xmlns:p14="http://schemas.microsoft.com/office/powerpoint/2010/main" val="598582440"/>
+        <p14:creationId xmlns:p14="http://schemas.microsoft.com/office/powerpoint/2010/main" val="2605408194"/>
       </p:ext>
     </p:extLst>
   </p:cSld>
@@ -2082,7 +1512,7 @@
         <p:cNvPr id="1" name="">
           <a:extLst>
             <a:ext uri="{FF2B5EF4-FFF2-40B4-BE49-F238E27FC236}">
-              <a16:creationId xmlns:a16="http://schemas.microsoft.com/office/drawing/2014/main" id="{4145D191-AE88-6D09-2C3A-CC88313DAEEE}"/>
+              <a16:creationId xmlns:a16="http://schemas.microsoft.com/office/drawing/2014/main" id="{B2BCA8E6-98D1-9F80-6AFB-E3FBD032F2FF}"/>
             </a:ext>
           </a:extLst>
         </p:cNvPr>
@@ -2102,7 +1532,7 @@
           <p:cNvPr id="2" name="슬라이드 이미지 개체 틀 1">
             <a:extLst>
               <a:ext uri="{FF2B5EF4-FFF2-40B4-BE49-F238E27FC236}">
-                <a16:creationId xmlns:a16="http://schemas.microsoft.com/office/drawing/2014/main" id="{F997A655-5515-B0AB-FA05-9090506DBE93}"/>
+                <a16:creationId xmlns:a16="http://schemas.microsoft.com/office/drawing/2014/main" id="{96DE2895-E5D5-C6B4-D319-2CF2430675FC}"/>
               </a:ext>
             </a:extLst>
           </p:cNvPr>
@@ -2125,7 +1555,7 @@
           <p:cNvPr id="3" name="슬라이드 노트 개체 틀 2">
             <a:extLst>
               <a:ext uri="{FF2B5EF4-FFF2-40B4-BE49-F238E27FC236}">
-                <a16:creationId xmlns:a16="http://schemas.microsoft.com/office/drawing/2014/main" id="{E3F0014E-3E75-642C-6D35-D65C254E52D9}"/>
+                <a16:creationId xmlns:a16="http://schemas.microsoft.com/office/drawing/2014/main" id="{55E723EA-D26F-A3B0-80FC-EE95A12ACADA}"/>
               </a:ext>
             </a:extLst>
           </p:cNvPr>
@@ -2150,7 +1580,7 @@
           <p:cNvPr id="4" name="슬라이드 번호 개체 틀 3">
             <a:extLst>
               <a:ext uri="{FF2B5EF4-FFF2-40B4-BE49-F238E27FC236}">
-                <a16:creationId xmlns:a16="http://schemas.microsoft.com/office/drawing/2014/main" id="{CDF4B756-052A-309E-B1BC-E30A272FE8E6}"/>
+                <a16:creationId xmlns:a16="http://schemas.microsoft.com/office/drawing/2014/main" id="{1200450C-9271-FE83-4C5E-B49B9CDAF2E9}"/>
               </a:ext>
             </a:extLst>
           </p:cNvPr>
@@ -2177,7 +1607,7 @@
     </p:spTree>
     <p:extLst>
       <p:ext uri="{BB962C8B-B14F-4D97-AF65-F5344CB8AC3E}">
-        <p14:creationId xmlns:p14="http://schemas.microsoft.com/office/powerpoint/2010/main" val="2862838093"/>
+        <p14:creationId xmlns:p14="http://schemas.microsoft.com/office/powerpoint/2010/main" val="2442893716"/>
       </p:ext>
     </p:extLst>
   </p:cSld>
@@ -2195,7 +1625,7 @@
         <p:cNvPr id="1" name="">
           <a:extLst>
             <a:ext uri="{FF2B5EF4-FFF2-40B4-BE49-F238E27FC236}">
-              <a16:creationId xmlns:a16="http://schemas.microsoft.com/office/drawing/2014/main" id="{350EE7F7-C0C8-E6B6-6891-C978071F333D}"/>
+              <a16:creationId xmlns:a16="http://schemas.microsoft.com/office/drawing/2014/main" id="{22BD69F3-94A3-0C60-7885-E7F798AA9D40}"/>
             </a:ext>
           </a:extLst>
         </p:cNvPr>
@@ -2215,7 +1645,7 @@
           <p:cNvPr id="2" name="슬라이드 이미지 개체 틀 1">
             <a:extLst>
               <a:ext uri="{FF2B5EF4-FFF2-40B4-BE49-F238E27FC236}">
-                <a16:creationId xmlns:a16="http://schemas.microsoft.com/office/drawing/2014/main" id="{6D6CBCBC-BB9D-0461-F8DF-68FB064DFE64}"/>
+                <a16:creationId xmlns:a16="http://schemas.microsoft.com/office/drawing/2014/main" id="{580EC42E-4EB6-0995-5EA9-1080B9D00CD0}"/>
               </a:ext>
             </a:extLst>
           </p:cNvPr>
@@ -2238,7 +1668,7 @@
           <p:cNvPr id="3" name="슬라이드 노트 개체 틀 2">
             <a:extLst>
               <a:ext uri="{FF2B5EF4-FFF2-40B4-BE49-F238E27FC236}">
-                <a16:creationId xmlns:a16="http://schemas.microsoft.com/office/drawing/2014/main" id="{D8248455-D088-8DDD-C722-129776DF69F8}"/>
+                <a16:creationId xmlns:a16="http://schemas.microsoft.com/office/drawing/2014/main" id="{9F423A77-CBCF-E600-2CBC-CEFD9364A1BD}"/>
               </a:ext>
             </a:extLst>
           </p:cNvPr>
@@ -2263,7 +1693,7 @@
           <p:cNvPr id="4" name="슬라이드 번호 개체 틀 3">
             <a:extLst>
               <a:ext uri="{FF2B5EF4-FFF2-40B4-BE49-F238E27FC236}">
-                <a16:creationId xmlns:a16="http://schemas.microsoft.com/office/drawing/2014/main" id="{761CF7CD-EF0D-EBF3-78BD-AF57AA9D5F19}"/>
+                <a16:creationId xmlns:a16="http://schemas.microsoft.com/office/drawing/2014/main" id="{0A9F3D37-BEF7-39C4-4B3F-51A48C1390C9}"/>
               </a:ext>
             </a:extLst>
           </p:cNvPr>
@@ -2290,7 +1720,7 @@
     </p:spTree>
     <p:extLst>
       <p:ext uri="{BB962C8B-B14F-4D97-AF65-F5344CB8AC3E}">
-        <p14:creationId xmlns:p14="http://schemas.microsoft.com/office/powerpoint/2010/main" val="2840655324"/>
+        <p14:creationId xmlns:p14="http://schemas.microsoft.com/office/powerpoint/2010/main" val="1567421555"/>
       </p:ext>
     </p:extLst>
   </p:cSld>
@@ -2308,7 +1738,7 @@
         <p:cNvPr id="1" name="">
           <a:extLst>
             <a:ext uri="{FF2B5EF4-FFF2-40B4-BE49-F238E27FC236}">
-              <a16:creationId xmlns:a16="http://schemas.microsoft.com/office/drawing/2014/main" id="{2837B19F-4BAD-1042-67A0-1546DC99C17B}"/>
+              <a16:creationId xmlns:a16="http://schemas.microsoft.com/office/drawing/2014/main" id="{5A1945EE-9C54-C495-01FC-A3E5F229222D}"/>
             </a:ext>
           </a:extLst>
         </p:cNvPr>
@@ -2328,7 +1758,7 @@
           <p:cNvPr id="2" name="슬라이드 이미지 개체 틀 1">
             <a:extLst>
               <a:ext uri="{FF2B5EF4-FFF2-40B4-BE49-F238E27FC236}">
-                <a16:creationId xmlns:a16="http://schemas.microsoft.com/office/drawing/2014/main" id="{75AB5610-77FA-21AC-7E77-13528B546248}"/>
+                <a16:creationId xmlns:a16="http://schemas.microsoft.com/office/drawing/2014/main" id="{B353F3D8-3D3D-7B5A-EA73-BFA270D89FB9}"/>
               </a:ext>
             </a:extLst>
           </p:cNvPr>
@@ -2351,7 +1781,7 @@
           <p:cNvPr id="3" name="슬라이드 노트 개체 틀 2">
             <a:extLst>
               <a:ext uri="{FF2B5EF4-FFF2-40B4-BE49-F238E27FC236}">
-                <a16:creationId xmlns:a16="http://schemas.microsoft.com/office/drawing/2014/main" id="{905A95C8-91F9-47FF-F9D0-F1CB3E2F9E4B}"/>
+                <a16:creationId xmlns:a16="http://schemas.microsoft.com/office/drawing/2014/main" id="{38906EB9-5F79-9683-7EFA-1F35F29772DC}"/>
               </a:ext>
             </a:extLst>
           </p:cNvPr>
@@ -2376,7 +1806,7 @@
           <p:cNvPr id="4" name="슬라이드 번호 개체 틀 3">
             <a:extLst>
               <a:ext uri="{FF2B5EF4-FFF2-40B4-BE49-F238E27FC236}">
-                <a16:creationId xmlns:a16="http://schemas.microsoft.com/office/drawing/2014/main" id="{AA124818-2B32-8E3A-B062-D5D50A58BA71}"/>
+                <a16:creationId xmlns:a16="http://schemas.microsoft.com/office/drawing/2014/main" id="{E3544290-0209-964C-86B6-E7AD9930C904}"/>
               </a:ext>
             </a:extLst>
           </p:cNvPr>
@@ -2403,7 +1833,7 @@
     </p:spTree>
     <p:extLst>
       <p:ext uri="{BB962C8B-B14F-4D97-AF65-F5344CB8AC3E}">
-        <p14:creationId xmlns:p14="http://schemas.microsoft.com/office/powerpoint/2010/main" val="1517932819"/>
+        <p14:creationId xmlns:p14="http://schemas.microsoft.com/office/powerpoint/2010/main" val="2916537449"/>
       </p:ext>
     </p:extLst>
   </p:cSld>
@@ -2421,7 +1851,7 @@
         <p:cNvPr id="1" name="">
           <a:extLst>
             <a:ext uri="{FF2B5EF4-FFF2-40B4-BE49-F238E27FC236}">
-              <a16:creationId xmlns:a16="http://schemas.microsoft.com/office/drawing/2014/main" id="{8EAF6592-2D7A-EC1D-8579-D3707A07B20A}"/>
+              <a16:creationId xmlns:a16="http://schemas.microsoft.com/office/drawing/2014/main" id="{C355E1E5-DB9F-BE52-DCB1-DA8179F45CC3}"/>
             </a:ext>
           </a:extLst>
         </p:cNvPr>
@@ -2441,7 +1871,7 @@
           <p:cNvPr id="2" name="슬라이드 이미지 개체 틀 1">
             <a:extLst>
               <a:ext uri="{FF2B5EF4-FFF2-40B4-BE49-F238E27FC236}">
-                <a16:creationId xmlns:a16="http://schemas.microsoft.com/office/drawing/2014/main" id="{36BF1CCA-7E3F-9757-81F6-4CDAC09A5FF5}"/>
+                <a16:creationId xmlns:a16="http://schemas.microsoft.com/office/drawing/2014/main" id="{4F841519-7812-11C8-DBB6-807F100C9D57}"/>
               </a:ext>
             </a:extLst>
           </p:cNvPr>
@@ -2464,7 +1894,7 @@
           <p:cNvPr id="3" name="슬라이드 노트 개체 틀 2">
             <a:extLst>
               <a:ext uri="{FF2B5EF4-FFF2-40B4-BE49-F238E27FC236}">
-                <a16:creationId xmlns:a16="http://schemas.microsoft.com/office/drawing/2014/main" id="{8C00F03E-991C-6FD8-C6B1-2B9D55AECBDC}"/>
+                <a16:creationId xmlns:a16="http://schemas.microsoft.com/office/drawing/2014/main" id="{BB9B5A62-0D56-28AA-FFBA-8C3D31AE5BE7}"/>
               </a:ext>
             </a:extLst>
           </p:cNvPr>
@@ -2489,7 +1919,7 @@
           <p:cNvPr id="4" name="슬라이드 번호 개체 틀 3">
             <a:extLst>
               <a:ext uri="{FF2B5EF4-FFF2-40B4-BE49-F238E27FC236}">
-                <a16:creationId xmlns:a16="http://schemas.microsoft.com/office/drawing/2014/main" id="{2103277F-AE1D-E8DF-8674-05694E66FE69}"/>
+                <a16:creationId xmlns:a16="http://schemas.microsoft.com/office/drawing/2014/main" id="{76CD7855-6752-27C3-8730-B4A032DD62C5}"/>
               </a:ext>
             </a:extLst>
           </p:cNvPr>
@@ -2516,7 +1946,7 @@
     </p:spTree>
     <p:extLst>
       <p:ext uri="{BB962C8B-B14F-4D97-AF65-F5344CB8AC3E}">
-        <p14:creationId xmlns:p14="http://schemas.microsoft.com/office/powerpoint/2010/main" val="2513732787"/>
+        <p14:creationId xmlns:p14="http://schemas.microsoft.com/office/powerpoint/2010/main" val="3884974512"/>
       </p:ext>
     </p:extLst>
   </p:cSld>
@@ -2534,7 +1964,7 @@
         <p:cNvPr id="1" name="">
           <a:extLst>
             <a:ext uri="{FF2B5EF4-FFF2-40B4-BE49-F238E27FC236}">
-              <a16:creationId xmlns:a16="http://schemas.microsoft.com/office/drawing/2014/main" id="{98875A47-9CE6-71DF-ACF4-DE0897AA6D62}"/>
+              <a16:creationId xmlns:a16="http://schemas.microsoft.com/office/drawing/2014/main" id="{A5378160-29F1-C770-9BD5-A7F211848452}"/>
             </a:ext>
           </a:extLst>
         </p:cNvPr>
@@ -2554,7 +1984,7 @@
           <p:cNvPr id="2" name="슬라이드 이미지 개체 틀 1">
             <a:extLst>
               <a:ext uri="{FF2B5EF4-FFF2-40B4-BE49-F238E27FC236}">
-                <a16:creationId xmlns:a16="http://schemas.microsoft.com/office/drawing/2014/main" id="{C3AD6A0B-C693-FB78-FC7C-209DD297AE16}"/>
+                <a16:creationId xmlns:a16="http://schemas.microsoft.com/office/drawing/2014/main" id="{BEBE185E-649F-61D9-099F-2E753895084B}"/>
               </a:ext>
             </a:extLst>
           </p:cNvPr>
@@ -2577,7 +2007,7 @@
           <p:cNvPr id="3" name="슬라이드 노트 개체 틀 2">
             <a:extLst>
               <a:ext uri="{FF2B5EF4-FFF2-40B4-BE49-F238E27FC236}">
-                <a16:creationId xmlns:a16="http://schemas.microsoft.com/office/drawing/2014/main" id="{DEB820C4-0249-DD1D-242E-4C143D6BCF2C}"/>
+                <a16:creationId xmlns:a16="http://schemas.microsoft.com/office/drawing/2014/main" id="{56A6BACB-02EF-5F55-C718-6B5921A7CD4F}"/>
               </a:ext>
             </a:extLst>
           </p:cNvPr>
@@ -2602,7 +2032,7 @@
           <p:cNvPr id="4" name="슬라이드 번호 개체 틀 3">
             <a:extLst>
               <a:ext uri="{FF2B5EF4-FFF2-40B4-BE49-F238E27FC236}">
-                <a16:creationId xmlns:a16="http://schemas.microsoft.com/office/drawing/2014/main" id="{3B965C7B-9898-4EF8-AABF-90443D4772D5}"/>
+                <a16:creationId xmlns:a16="http://schemas.microsoft.com/office/drawing/2014/main" id="{CAB51DA0-DE17-EC7F-D504-7F0A2E8C9C9A}"/>
               </a:ext>
             </a:extLst>
           </p:cNvPr>
@@ -2629,7 +2059,7 @@
     </p:spTree>
     <p:extLst>
       <p:ext uri="{BB962C8B-B14F-4D97-AF65-F5344CB8AC3E}">
-        <p14:creationId xmlns:p14="http://schemas.microsoft.com/office/powerpoint/2010/main" val="2759738635"/>
+        <p14:creationId xmlns:p14="http://schemas.microsoft.com/office/powerpoint/2010/main" val="1717783541"/>
       </p:ext>
     </p:extLst>
   </p:cSld>
@@ -2647,7 +2077,7 @@
         <p:cNvPr id="1" name="">
           <a:extLst>
             <a:ext uri="{FF2B5EF4-FFF2-40B4-BE49-F238E27FC236}">
-              <a16:creationId xmlns:a16="http://schemas.microsoft.com/office/drawing/2014/main" id="{0CC3D9F5-C9AB-1DAB-F6DC-FB034589DE18}"/>
+              <a16:creationId xmlns:a16="http://schemas.microsoft.com/office/drawing/2014/main" id="{6DBD8524-B0EA-C408-CF0D-ACF835DD0F67}"/>
             </a:ext>
           </a:extLst>
         </p:cNvPr>
@@ -2667,7 +2097,7 @@
           <p:cNvPr id="2" name="슬라이드 이미지 개체 틀 1">
             <a:extLst>
               <a:ext uri="{FF2B5EF4-FFF2-40B4-BE49-F238E27FC236}">
-                <a16:creationId xmlns:a16="http://schemas.microsoft.com/office/drawing/2014/main" id="{FF1D6662-3569-12D4-B838-48AC3D427A56}"/>
+                <a16:creationId xmlns:a16="http://schemas.microsoft.com/office/drawing/2014/main" id="{1BC65933-3542-923A-AE8C-80CCE667A318}"/>
               </a:ext>
             </a:extLst>
           </p:cNvPr>
@@ -2690,7 +2120,7 @@
           <p:cNvPr id="3" name="슬라이드 노트 개체 틀 2">
             <a:extLst>
               <a:ext uri="{FF2B5EF4-FFF2-40B4-BE49-F238E27FC236}">
-                <a16:creationId xmlns:a16="http://schemas.microsoft.com/office/drawing/2014/main" id="{9878AE08-F403-5C3A-2B72-403A3E2C759B}"/>
+                <a16:creationId xmlns:a16="http://schemas.microsoft.com/office/drawing/2014/main" id="{9F5E2F50-69DC-1C1E-34C4-E1308FCA6FA6}"/>
               </a:ext>
             </a:extLst>
           </p:cNvPr>
@@ -2715,7 +2145,7 @@
           <p:cNvPr id="4" name="슬라이드 번호 개체 틀 3">
             <a:extLst>
               <a:ext uri="{FF2B5EF4-FFF2-40B4-BE49-F238E27FC236}">
-                <a16:creationId xmlns:a16="http://schemas.microsoft.com/office/drawing/2014/main" id="{7193D087-E736-FA8A-5E1D-62E60A8C08E0}"/>
+                <a16:creationId xmlns:a16="http://schemas.microsoft.com/office/drawing/2014/main" id="{B373A908-AA6E-E67F-C31A-C9EA2DE4647B}"/>
               </a:ext>
             </a:extLst>
           </p:cNvPr>
@@ -2742,7 +2172,7 @@
     </p:spTree>
     <p:extLst>
       <p:ext uri="{BB962C8B-B14F-4D97-AF65-F5344CB8AC3E}">
-        <p14:creationId xmlns:p14="http://schemas.microsoft.com/office/powerpoint/2010/main" val="527324696"/>
+        <p14:creationId xmlns:p14="http://schemas.microsoft.com/office/powerpoint/2010/main" val="1254982921"/>
       </p:ext>
     </p:extLst>
   </p:cSld>
@@ -2883,7 +2313,7 @@
           <a:p>
             <a:fld id="{7BE19FCC-5267-4D44-B01A-1BF283548DD7}" type="datetimeFigureOut">
               <a:rPr lang="ko-KR" altLang="en-US" smtClean="0"/>
-              <a:t>2026-04-15</a:t>
+              <a:t>2026-04-18</a:t>
             </a:fld>
             <a:endParaRPr lang="ko-KR" altLang="en-US"/>
           </a:p>
@@ -3053,7 +2483,7 @@
           <a:p>
             <a:fld id="{7BE19FCC-5267-4D44-B01A-1BF283548DD7}" type="datetimeFigureOut">
               <a:rPr lang="ko-KR" altLang="en-US" smtClean="0"/>
-              <a:t>2026-04-15</a:t>
+              <a:t>2026-04-18</a:t>
             </a:fld>
             <a:endParaRPr lang="ko-KR" altLang="en-US"/>
           </a:p>
@@ -3233,7 +2663,7 @@
           <a:p>
             <a:fld id="{7BE19FCC-5267-4D44-B01A-1BF283548DD7}" type="datetimeFigureOut">
               <a:rPr lang="ko-KR" altLang="en-US" smtClean="0"/>
-              <a:t>2026-04-15</a:t>
+              <a:t>2026-04-18</a:t>
             </a:fld>
             <a:endParaRPr lang="ko-KR" altLang="en-US"/>
           </a:p>
@@ -3433,7 +2863,7 @@
           <a:p>
             <a:fld id="{7BE19FCC-5267-4D44-B01A-1BF283548DD7}" type="datetimeFigureOut">
               <a:rPr lang="ko-KR" altLang="en-US" smtClean="0"/>
-              <a:t>2026-04-15</a:t>
+              <a:t>2026-04-18</a:t>
             </a:fld>
             <a:endParaRPr lang="ko-KR" altLang="en-US"/>
           </a:p>
@@ -3679,7 +3109,7 @@
           <a:p>
             <a:fld id="{7BE19FCC-5267-4D44-B01A-1BF283548DD7}" type="datetimeFigureOut">
               <a:rPr lang="ko-KR" altLang="en-US" smtClean="0"/>
-              <a:t>2026-04-15</a:t>
+              <a:t>2026-04-18</a:t>
             </a:fld>
             <a:endParaRPr lang="ko-KR" altLang="en-US"/>
           </a:p>
@@ -3911,7 +3341,7 @@
           <a:p>
             <a:fld id="{7BE19FCC-5267-4D44-B01A-1BF283548DD7}" type="datetimeFigureOut">
               <a:rPr lang="ko-KR" altLang="en-US" smtClean="0"/>
-              <a:t>2026-04-15</a:t>
+              <a:t>2026-04-18</a:t>
             </a:fld>
             <a:endParaRPr lang="ko-KR" altLang="en-US"/>
           </a:p>
@@ -4278,7 +3708,7 @@
           <a:p>
             <a:fld id="{7BE19FCC-5267-4D44-B01A-1BF283548DD7}" type="datetimeFigureOut">
               <a:rPr lang="ko-KR" altLang="en-US" smtClean="0"/>
-              <a:t>2026-04-15</a:t>
+              <a:t>2026-04-18</a:t>
             </a:fld>
             <a:endParaRPr lang="ko-KR" altLang="en-US"/>
           </a:p>
@@ -4396,7 +3826,7 @@
           <a:p>
             <a:fld id="{7BE19FCC-5267-4D44-B01A-1BF283548DD7}" type="datetimeFigureOut">
               <a:rPr lang="ko-KR" altLang="en-US" smtClean="0"/>
-              <a:t>2026-04-15</a:t>
+              <a:t>2026-04-18</a:t>
             </a:fld>
             <a:endParaRPr lang="ko-KR" altLang="en-US"/>
           </a:p>
@@ -4491,7 +3921,7 @@
           <a:p>
             <a:fld id="{7BE19FCC-5267-4D44-B01A-1BF283548DD7}" type="datetimeFigureOut">
               <a:rPr lang="ko-KR" altLang="en-US" smtClean="0"/>
-              <a:t>2026-04-15</a:t>
+              <a:t>2026-04-18</a:t>
             </a:fld>
             <a:endParaRPr lang="ko-KR" altLang="en-US"/>
           </a:p>
@@ -4768,7 +4198,7 @@
           <a:p>
             <a:fld id="{7BE19FCC-5267-4D44-B01A-1BF283548DD7}" type="datetimeFigureOut">
               <a:rPr lang="ko-KR" altLang="en-US" smtClean="0"/>
-              <a:t>2026-04-15</a:t>
+              <a:t>2026-04-18</a:t>
             </a:fld>
             <a:endParaRPr lang="ko-KR" altLang="en-US"/>
           </a:p>
@@ -5025,7 +4455,7 @@
           <a:p>
             <a:fld id="{7BE19FCC-5267-4D44-B01A-1BF283548DD7}" type="datetimeFigureOut">
               <a:rPr lang="ko-KR" altLang="en-US" smtClean="0"/>
-              <a:t>2026-04-15</a:t>
+              <a:t>2026-04-18</a:t>
             </a:fld>
             <a:endParaRPr lang="ko-KR" altLang="en-US"/>
           </a:p>
@@ -5238,7 +4668,7 @@
           <a:p>
             <a:fld id="{7BE19FCC-5267-4D44-B01A-1BF283548DD7}" type="datetimeFigureOut">
               <a:rPr lang="ko-KR" altLang="en-US" smtClean="0"/>
-              <a:t>2026-04-15</a:t>
+              <a:t>2026-04-18</a:t>
             </a:fld>
             <a:endParaRPr lang="ko-KR" altLang="en-US"/>
           </a:p>
@@ -5665,7 +5095,7 @@
           <p:nvPr>
             <p:extLst>
               <p:ext uri="{D42A27DB-BD31-4B8C-83A1-F6EECF244321}">
-                <p14:modId xmlns:p14="http://schemas.microsoft.com/office/powerpoint/2010/main" val="3491452332"/>
+                <p14:modId xmlns:p14="http://schemas.microsoft.com/office/powerpoint/2010/main" val="2699589285"/>
               </p:ext>
             </p:extLst>
           </p:nvPr>
@@ -6035,9 +5465,10 @@
                     <a:p>
                       <a:pPr algn="ctr"/>
                       <a:r>
-                        <a:rPr sz="1800"/>
-                        <a:t>전선거치 조치, 감전 및 화재위험</a:t>
+                        <a:rPr lang="en-US" sz="3500" dirty="0"/>
+                        <a:t>1</a:t>
                       </a:r>
+                      <a:endParaRPr sz="3500" dirty="0"/>
                     </a:p>
                   </a:txBody>
                   <a:tcPr marL="92882" marR="92882" marT="46441" marB="46441" anchor="ctr">
@@ -6105,9 +5536,10 @@
                     <a:p>
                       <a:pPr algn="ctr"/>
                       <a:r>
-                        <a:rPr sz="2000"/>
-                        <a:t>电线架空管理，防触电及火灾</a:t>
+                        <a:rPr lang="en-US" sz="3500" dirty="0"/>
+                        <a:t>2</a:t>
                       </a:r>
+                      <a:endParaRPr sz="3500" dirty="0"/>
                     </a:p>
                   </a:txBody>
                   <a:tcPr marL="92882" marR="92882" marT="46441" marB="46441" anchor="ctr">
@@ -6175,9 +5607,10 @@
                     <a:p>
                       <a:pPr algn="ctr"/>
                       <a:r>
-                        <a:rPr sz="1200"/>
-                        <a:t>Treo dây điện, nguy cơ điện giật và hỏa hoạn</a:t>
+                        <a:rPr lang="en-US" sz="3500" dirty="0"/>
+                        <a:t>3</a:t>
                       </a:r>
+                      <a:endParaRPr sz="3500" dirty="0"/>
                     </a:p>
                   </a:txBody>
                   <a:tcPr marL="92882" marR="92882" marT="46441" marB="46441" anchor="ctr">
@@ -6245,9 +5678,10 @@
                     <a:p>
                       <a:pPr algn="ctr"/>
                       <a:r>
-                        <a:rPr sz="1000"/>
-                        <a:t>ဝါယာကြိုးများချိတ်ဆွဲရန်၊ ဓာတ်လိုက်မှုနှင့် မီးဘေးအန္တရာယ်</a:t>
+                        <a:rPr lang="en-US" sz="3500" dirty="0"/>
+                        <a:t>4</a:t>
                       </a:r>
+                      <a:endParaRPr sz="3500" dirty="0"/>
                     </a:p>
                   </a:txBody>
                   <a:tcPr marL="88479" marR="88479" marT="44240" marB="44240" anchor="ctr">
@@ -6506,7 +5940,7 @@
         <p:cNvPr id="1" name="">
           <a:extLst>
             <a:ext uri="{FF2B5EF4-FFF2-40B4-BE49-F238E27FC236}">
-              <a16:creationId xmlns:a16="http://schemas.microsoft.com/office/drawing/2014/main" id="{09C373DA-9460-1CF2-CC49-B293FFC488E5}"/>
+              <a16:creationId xmlns:a16="http://schemas.microsoft.com/office/drawing/2014/main" id="{A0AB86B3-3739-566A-0999-E39577005EA1}"/>
             </a:ext>
           </a:extLst>
         </p:cNvPr>
@@ -6526,7 +5960,7 @@
           <p:cNvPr id="3" name="표 2">
             <a:extLst>
               <a:ext uri="{FF2B5EF4-FFF2-40B4-BE49-F238E27FC236}">
-                <a16:creationId xmlns:a16="http://schemas.microsoft.com/office/drawing/2014/main" id="{94E30BC5-8C68-FA10-907D-D70C2AA57650}"/>
+                <a16:creationId xmlns:a16="http://schemas.microsoft.com/office/drawing/2014/main" id="{23B3AB6D-BAC3-D640-6705-07387DA44B09}"/>
               </a:ext>
             </a:extLst>
           </p:cNvPr>
@@ -6900,9 +6334,10 @@
                     <a:p>
                       <a:pPr algn="ctr"/>
                       <a:r>
-                        <a:rPr sz="1800"/>
-                        <a:t>전선거치 조치, 감전 및 화재위험</a:t>
+                        <a:rPr lang="en-US" sz="3500" dirty="0"/>
+                        <a:t>1</a:t>
                       </a:r>
+                      <a:endParaRPr sz="3500" dirty="0"/>
                     </a:p>
                   </a:txBody>
                   <a:tcPr marL="92882" marR="92882" marT="46441" marB="46441" anchor="ctr">
@@ -6970,9 +6405,10 @@
                     <a:p>
                       <a:pPr algn="ctr"/>
                       <a:r>
-                        <a:rPr sz="2000"/>
-                        <a:t>电线架空管理，防触电及火灾</a:t>
+                        <a:rPr lang="en-US" sz="3500" dirty="0"/>
+                        <a:t>2</a:t>
                       </a:r>
+                      <a:endParaRPr sz="3500" dirty="0"/>
                     </a:p>
                   </a:txBody>
                   <a:tcPr marL="92882" marR="92882" marT="46441" marB="46441" anchor="ctr">
@@ -7040,9 +6476,10 @@
                     <a:p>
                       <a:pPr algn="ctr"/>
                       <a:r>
-                        <a:rPr sz="1200"/>
-                        <a:t>Treo dây điện, nguy cơ điện giật và hỏa hoạn</a:t>
+                        <a:rPr lang="en-US" sz="3500" dirty="0"/>
+                        <a:t>3</a:t>
                       </a:r>
+                      <a:endParaRPr sz="3500" dirty="0"/>
                     </a:p>
                   </a:txBody>
                   <a:tcPr marL="92882" marR="92882" marT="46441" marB="46441" anchor="ctr">
@@ -7110,9 +6547,10 @@
                     <a:p>
                       <a:pPr algn="ctr"/>
                       <a:r>
-                        <a:rPr sz="1000"/>
-                        <a:t>ဝါယာကြိုးများချိတ်ဆွဲရန်၊ ဓာတ်လိုက်မှုနှင့် မီးဘေးအန္တရာယ်</a:t>
+                        <a:rPr lang="en-US" sz="3500" dirty="0"/>
+                        <a:t>4</a:t>
                       </a:r>
+                      <a:endParaRPr sz="3500" dirty="0"/>
                     </a:p>
                   </a:txBody>
                   <a:tcPr marL="88479" marR="88479" marT="44240" marB="44240" anchor="ctr">
@@ -7170,7 +6608,7 @@
           <p:cNvPr id="36" name="그림 35">
             <a:extLst>
               <a:ext uri="{FF2B5EF4-FFF2-40B4-BE49-F238E27FC236}">
-                <a16:creationId xmlns:a16="http://schemas.microsoft.com/office/drawing/2014/main" id="{DA8FBC51-F35F-3919-6339-0FFC029F34E8}"/>
+                <a16:creationId xmlns:a16="http://schemas.microsoft.com/office/drawing/2014/main" id="{2346A22F-90E3-7EAD-BC43-FDD7D0FF9A81}"/>
               </a:ext>
             </a:extLst>
           </p:cNvPr>
@@ -7206,7 +6644,7 @@
           <p:cNvPr id="40" name="그림 39">
             <a:extLst>
               <a:ext uri="{FF2B5EF4-FFF2-40B4-BE49-F238E27FC236}">
-                <a16:creationId xmlns:a16="http://schemas.microsoft.com/office/drawing/2014/main" id="{FF11EB75-50A1-6DF0-96F2-B9AE019445E8}"/>
+                <a16:creationId xmlns:a16="http://schemas.microsoft.com/office/drawing/2014/main" id="{AFD154C7-8BEC-3F72-2CC5-F83EA3EF41EC}"/>
               </a:ext>
             </a:extLst>
           </p:cNvPr>
@@ -7242,7 +6680,7 @@
           <p:cNvPr id="12" name="그림 11">
             <a:extLst>
               <a:ext uri="{FF2B5EF4-FFF2-40B4-BE49-F238E27FC236}">
-                <a16:creationId xmlns:a16="http://schemas.microsoft.com/office/drawing/2014/main" id="{C3B28B24-D6DE-14B9-7DEF-61285F2DDF7C}"/>
+                <a16:creationId xmlns:a16="http://schemas.microsoft.com/office/drawing/2014/main" id="{330BA78B-3A88-6284-D55D-BD0F4A3A735A}"/>
               </a:ext>
             </a:extLst>
           </p:cNvPr>
@@ -7272,7 +6710,7 @@
           <p:cNvPr id="14" name="그림 13">
             <a:extLst>
               <a:ext uri="{FF2B5EF4-FFF2-40B4-BE49-F238E27FC236}">
-                <a16:creationId xmlns:a16="http://schemas.microsoft.com/office/drawing/2014/main" id="{F0DCDB03-DBE5-E634-B4E4-25DAEAD9858C}"/>
+                <a16:creationId xmlns:a16="http://schemas.microsoft.com/office/drawing/2014/main" id="{A169A1A4-C667-470B-A464-7E619B98BABD}"/>
               </a:ext>
             </a:extLst>
           </p:cNvPr>
@@ -7302,7 +6740,7 @@
           <p:cNvPr id="2" name="PHOTO_BOX">
             <a:extLst>
               <a:ext uri="{FF2B5EF4-FFF2-40B4-BE49-F238E27FC236}">
-                <a16:creationId xmlns:a16="http://schemas.microsoft.com/office/drawing/2014/main" id="{5BF67D73-7356-64A9-9075-417DAF5AFDA9}"/>
+                <a16:creationId xmlns:a16="http://schemas.microsoft.com/office/drawing/2014/main" id="{75E2E943-5112-169C-4E32-728FB7B7CEE9}"/>
               </a:ext>
             </a:extLst>
           </p:cNvPr>
@@ -7353,7 +6791,7 @@
     </p:spTree>
     <p:extLst>
       <p:ext uri="{BB962C8B-B14F-4D97-AF65-F5344CB8AC3E}">
-        <p14:creationId xmlns:p14="http://schemas.microsoft.com/office/powerpoint/2010/main" val="2117232971"/>
+        <p14:creationId xmlns:p14="http://schemas.microsoft.com/office/powerpoint/2010/main" val="2315681139"/>
       </p:ext>
     </p:extLst>
   </p:cSld>
@@ -7371,7 +6809,7 @@
         <p:cNvPr id="1" name="">
           <a:extLst>
             <a:ext uri="{FF2B5EF4-FFF2-40B4-BE49-F238E27FC236}">
-              <a16:creationId xmlns:a16="http://schemas.microsoft.com/office/drawing/2014/main" id="{011D145D-C5A4-E0F0-4473-141A2305F7E4}"/>
+              <a16:creationId xmlns:a16="http://schemas.microsoft.com/office/drawing/2014/main" id="{DFC77F66-78FC-5EAA-0F47-AAB5D8BECF20}"/>
             </a:ext>
           </a:extLst>
         </p:cNvPr>
@@ -7391,7 +6829,7 @@
           <p:cNvPr id="3" name="표 2">
             <a:extLst>
               <a:ext uri="{FF2B5EF4-FFF2-40B4-BE49-F238E27FC236}">
-                <a16:creationId xmlns:a16="http://schemas.microsoft.com/office/drawing/2014/main" id="{18D94CF7-68D5-B784-8DA5-298E52C0D2BD}"/>
+                <a16:creationId xmlns:a16="http://schemas.microsoft.com/office/drawing/2014/main" id="{344AA8AC-4490-3A33-1FE4-B555BA0ECD69}"/>
               </a:ext>
             </a:extLst>
           </p:cNvPr>
@@ -7765,9 +7203,10 @@
                     <a:p>
                       <a:pPr algn="ctr"/>
                       <a:r>
-                        <a:rPr sz="1800"/>
-                        <a:t>전선거치 조치, 감전 및 화재위험</a:t>
+                        <a:rPr lang="en-US" sz="3500" dirty="0"/>
+                        <a:t>1</a:t>
                       </a:r>
+                      <a:endParaRPr sz="3500" dirty="0"/>
                     </a:p>
                   </a:txBody>
                   <a:tcPr marL="92882" marR="92882" marT="46441" marB="46441" anchor="ctr">
@@ -7835,9 +7274,10 @@
                     <a:p>
                       <a:pPr algn="ctr"/>
                       <a:r>
-                        <a:rPr sz="2000"/>
-                        <a:t>电线架空管理，防触电及火灾</a:t>
+                        <a:rPr lang="en-US" sz="3500" dirty="0"/>
+                        <a:t>2</a:t>
                       </a:r>
+                      <a:endParaRPr sz="3500" dirty="0"/>
                     </a:p>
                   </a:txBody>
                   <a:tcPr marL="92882" marR="92882" marT="46441" marB="46441" anchor="ctr">
@@ -7905,9 +7345,10 @@
                     <a:p>
                       <a:pPr algn="ctr"/>
                       <a:r>
-                        <a:rPr sz="1200"/>
-                        <a:t>Treo dây điện, nguy cơ điện giật và hỏa hoạn</a:t>
+                        <a:rPr lang="en-US" sz="3500" dirty="0"/>
+                        <a:t>3</a:t>
                       </a:r>
+                      <a:endParaRPr sz="3500" dirty="0"/>
                     </a:p>
                   </a:txBody>
                   <a:tcPr marL="92882" marR="92882" marT="46441" marB="46441" anchor="ctr">
@@ -7975,9 +7416,10 @@
                     <a:p>
                       <a:pPr algn="ctr"/>
                       <a:r>
-                        <a:rPr sz="1000"/>
-                        <a:t>ဝါယာကြိုးများချိတ်ဆွဲရန်၊ ဓာတ်လိုက်မှုနှင့် မီးဘေးအန္တရာယ်</a:t>
+                        <a:rPr lang="en-US" sz="3500" dirty="0"/>
+                        <a:t>4</a:t>
                       </a:r>
+                      <a:endParaRPr sz="3500" dirty="0"/>
                     </a:p>
                   </a:txBody>
                   <a:tcPr marL="88479" marR="88479" marT="44240" marB="44240" anchor="ctr">
@@ -8035,7 +7477,7 @@
           <p:cNvPr id="36" name="그림 35">
             <a:extLst>
               <a:ext uri="{FF2B5EF4-FFF2-40B4-BE49-F238E27FC236}">
-                <a16:creationId xmlns:a16="http://schemas.microsoft.com/office/drawing/2014/main" id="{3C3AB410-FD56-2C3E-FB01-13A80A0E54F4}"/>
+                <a16:creationId xmlns:a16="http://schemas.microsoft.com/office/drawing/2014/main" id="{C2D820E9-F927-2AF9-2C75-99754B082810}"/>
               </a:ext>
             </a:extLst>
           </p:cNvPr>
@@ -8071,7 +7513,7 @@
           <p:cNvPr id="40" name="그림 39">
             <a:extLst>
               <a:ext uri="{FF2B5EF4-FFF2-40B4-BE49-F238E27FC236}">
-                <a16:creationId xmlns:a16="http://schemas.microsoft.com/office/drawing/2014/main" id="{300E26C0-BE3B-A09D-F055-E63659121DB9}"/>
+                <a16:creationId xmlns:a16="http://schemas.microsoft.com/office/drawing/2014/main" id="{162292A1-B2D3-2EE9-6380-7D9B139DD7A9}"/>
               </a:ext>
             </a:extLst>
           </p:cNvPr>
@@ -8107,7 +7549,7 @@
           <p:cNvPr id="12" name="그림 11">
             <a:extLst>
               <a:ext uri="{FF2B5EF4-FFF2-40B4-BE49-F238E27FC236}">
-                <a16:creationId xmlns:a16="http://schemas.microsoft.com/office/drawing/2014/main" id="{348468A4-F15E-1517-E51A-E6848BB48D55}"/>
+                <a16:creationId xmlns:a16="http://schemas.microsoft.com/office/drawing/2014/main" id="{8058B927-7CDC-0F8E-C9C6-0F9A1B7B521F}"/>
               </a:ext>
             </a:extLst>
           </p:cNvPr>
@@ -8137,7 +7579,7 @@
           <p:cNvPr id="14" name="그림 13">
             <a:extLst>
               <a:ext uri="{FF2B5EF4-FFF2-40B4-BE49-F238E27FC236}">
-                <a16:creationId xmlns:a16="http://schemas.microsoft.com/office/drawing/2014/main" id="{1EAC9A08-A6D0-E934-5377-341B8C86C318}"/>
+                <a16:creationId xmlns:a16="http://schemas.microsoft.com/office/drawing/2014/main" id="{6C01F510-D348-EA96-0269-58C1CA9780B6}"/>
               </a:ext>
             </a:extLst>
           </p:cNvPr>
@@ -8167,7 +7609,7 @@
           <p:cNvPr id="2" name="PHOTO_BOX">
             <a:extLst>
               <a:ext uri="{FF2B5EF4-FFF2-40B4-BE49-F238E27FC236}">
-                <a16:creationId xmlns:a16="http://schemas.microsoft.com/office/drawing/2014/main" id="{BC068553-B4B5-A404-3920-44B9F0D736BE}"/>
+                <a16:creationId xmlns:a16="http://schemas.microsoft.com/office/drawing/2014/main" id="{4F4C085B-12FD-5341-2596-C4E2D40C6E34}"/>
               </a:ext>
             </a:extLst>
           </p:cNvPr>
@@ -8218,7 +7660,7 @@
     </p:spTree>
     <p:extLst>
       <p:ext uri="{BB962C8B-B14F-4D97-AF65-F5344CB8AC3E}">
-        <p14:creationId xmlns:p14="http://schemas.microsoft.com/office/powerpoint/2010/main" val="3256019904"/>
+        <p14:creationId xmlns:p14="http://schemas.microsoft.com/office/powerpoint/2010/main" val="4161658087"/>
       </p:ext>
     </p:extLst>
   </p:cSld>
@@ -8236,7 +7678,7 @@
         <p:cNvPr id="1" name="">
           <a:extLst>
             <a:ext uri="{FF2B5EF4-FFF2-40B4-BE49-F238E27FC236}">
-              <a16:creationId xmlns:a16="http://schemas.microsoft.com/office/drawing/2014/main" id="{8F19B0C7-8F41-CCBB-68CB-E1A23A396839}"/>
+              <a16:creationId xmlns:a16="http://schemas.microsoft.com/office/drawing/2014/main" id="{451448C2-146D-4898-32EF-A13E6781B161}"/>
             </a:ext>
           </a:extLst>
         </p:cNvPr>
@@ -8256,7 +7698,7 @@
           <p:cNvPr id="3" name="표 2">
             <a:extLst>
               <a:ext uri="{FF2B5EF4-FFF2-40B4-BE49-F238E27FC236}">
-                <a16:creationId xmlns:a16="http://schemas.microsoft.com/office/drawing/2014/main" id="{1D799957-E617-23B4-C9B3-410BEBE5A949}"/>
+                <a16:creationId xmlns:a16="http://schemas.microsoft.com/office/drawing/2014/main" id="{639CCDE9-C885-1CB1-3ECD-94590A57CEF3}"/>
               </a:ext>
             </a:extLst>
           </p:cNvPr>
@@ -8630,9 +8072,10 @@
                     <a:p>
                       <a:pPr algn="ctr"/>
                       <a:r>
-                        <a:rPr sz="1800"/>
-                        <a:t>전선거치 조치, 감전 및 화재위험</a:t>
+                        <a:rPr lang="en-US" sz="3500" dirty="0"/>
+                        <a:t>1</a:t>
                       </a:r>
+                      <a:endParaRPr sz="3500" dirty="0"/>
                     </a:p>
                   </a:txBody>
                   <a:tcPr marL="92882" marR="92882" marT="46441" marB="46441" anchor="ctr">
@@ -8700,9 +8143,10 @@
                     <a:p>
                       <a:pPr algn="ctr"/>
                       <a:r>
-                        <a:rPr sz="2000"/>
-                        <a:t>电线架空管理，防触电及火灾</a:t>
+                        <a:rPr lang="en-US" sz="3500" dirty="0"/>
+                        <a:t>2</a:t>
                       </a:r>
+                      <a:endParaRPr sz="3500" dirty="0"/>
                     </a:p>
                   </a:txBody>
                   <a:tcPr marL="92882" marR="92882" marT="46441" marB="46441" anchor="ctr">
@@ -8770,9 +8214,10 @@
                     <a:p>
                       <a:pPr algn="ctr"/>
                       <a:r>
-                        <a:rPr sz="1200"/>
-                        <a:t>Treo dây điện, nguy cơ điện giật và hỏa hoạn</a:t>
+                        <a:rPr lang="en-US" sz="3500" dirty="0"/>
+                        <a:t>3</a:t>
                       </a:r>
+                      <a:endParaRPr sz="3500" dirty="0"/>
                     </a:p>
                   </a:txBody>
                   <a:tcPr marL="92882" marR="92882" marT="46441" marB="46441" anchor="ctr">
@@ -8840,9 +8285,10 @@
                     <a:p>
                       <a:pPr algn="ctr"/>
                       <a:r>
-                        <a:rPr sz="1000"/>
-                        <a:t>ဝါယာကြိုးများချိတ်ဆွဲရန်၊ ဓာတ်လိုက်မှုနှင့် မီးဘေးအန္တရာယ်</a:t>
+                        <a:rPr lang="en-US" sz="3500" dirty="0"/>
+                        <a:t>4</a:t>
                       </a:r>
+                      <a:endParaRPr sz="3500" dirty="0"/>
                     </a:p>
                   </a:txBody>
                   <a:tcPr marL="88479" marR="88479" marT="44240" marB="44240" anchor="ctr">
@@ -8900,7 +8346,7 @@
           <p:cNvPr id="36" name="그림 35">
             <a:extLst>
               <a:ext uri="{FF2B5EF4-FFF2-40B4-BE49-F238E27FC236}">
-                <a16:creationId xmlns:a16="http://schemas.microsoft.com/office/drawing/2014/main" id="{0D77B598-6FB9-D3BF-77C1-7F58741C39FE}"/>
+                <a16:creationId xmlns:a16="http://schemas.microsoft.com/office/drawing/2014/main" id="{1FF4B13C-2736-3E31-46EA-F1B6673C9E6C}"/>
               </a:ext>
             </a:extLst>
           </p:cNvPr>
@@ -8936,7 +8382,7 @@
           <p:cNvPr id="40" name="그림 39">
             <a:extLst>
               <a:ext uri="{FF2B5EF4-FFF2-40B4-BE49-F238E27FC236}">
-                <a16:creationId xmlns:a16="http://schemas.microsoft.com/office/drawing/2014/main" id="{1508B2B8-5909-5772-A3EF-1BA2F32ECC3C}"/>
+                <a16:creationId xmlns:a16="http://schemas.microsoft.com/office/drawing/2014/main" id="{F7E9E905-0750-8976-3F6D-AF463DD43CE3}"/>
               </a:ext>
             </a:extLst>
           </p:cNvPr>
@@ -8972,7 +8418,7 @@
           <p:cNvPr id="12" name="그림 11">
             <a:extLst>
               <a:ext uri="{FF2B5EF4-FFF2-40B4-BE49-F238E27FC236}">
-                <a16:creationId xmlns:a16="http://schemas.microsoft.com/office/drawing/2014/main" id="{A12E893A-2C3B-8A4B-F046-C662465F095E}"/>
+                <a16:creationId xmlns:a16="http://schemas.microsoft.com/office/drawing/2014/main" id="{7FDCB840-935A-06F9-D2E8-CE7207DD1B6E}"/>
               </a:ext>
             </a:extLst>
           </p:cNvPr>
@@ -9002,7 +8448,7 @@
           <p:cNvPr id="14" name="그림 13">
             <a:extLst>
               <a:ext uri="{FF2B5EF4-FFF2-40B4-BE49-F238E27FC236}">
-                <a16:creationId xmlns:a16="http://schemas.microsoft.com/office/drawing/2014/main" id="{7865FFA9-BB94-7F06-9EBE-4E34AEB99DC5}"/>
+                <a16:creationId xmlns:a16="http://schemas.microsoft.com/office/drawing/2014/main" id="{33DE895D-4FB7-D922-CA0F-FFFF500CB67A}"/>
               </a:ext>
             </a:extLst>
           </p:cNvPr>
@@ -9032,7 +8478,7 @@
           <p:cNvPr id="2" name="PHOTO_BOX">
             <a:extLst>
               <a:ext uri="{FF2B5EF4-FFF2-40B4-BE49-F238E27FC236}">
-                <a16:creationId xmlns:a16="http://schemas.microsoft.com/office/drawing/2014/main" id="{B67B8FFF-5FB4-4B02-AD20-CD84B4B6CF8D}"/>
+                <a16:creationId xmlns:a16="http://schemas.microsoft.com/office/drawing/2014/main" id="{D20D1CB1-03E9-0220-F281-ED4EE3B2D371}"/>
               </a:ext>
             </a:extLst>
           </p:cNvPr>
@@ -9083,7 +8529,7 @@
     </p:spTree>
     <p:extLst>
       <p:ext uri="{BB962C8B-B14F-4D97-AF65-F5344CB8AC3E}">
-        <p14:creationId xmlns:p14="http://schemas.microsoft.com/office/powerpoint/2010/main" val="1500047921"/>
+        <p14:creationId xmlns:p14="http://schemas.microsoft.com/office/powerpoint/2010/main" val="4140523148"/>
       </p:ext>
     </p:extLst>
   </p:cSld>
@@ -9101,7 +8547,7 @@
         <p:cNvPr id="1" name="">
           <a:extLst>
             <a:ext uri="{FF2B5EF4-FFF2-40B4-BE49-F238E27FC236}">
-              <a16:creationId xmlns:a16="http://schemas.microsoft.com/office/drawing/2014/main" id="{89C98C34-3B47-2030-943D-6C47F8C3CAB7}"/>
+              <a16:creationId xmlns:a16="http://schemas.microsoft.com/office/drawing/2014/main" id="{27F00C6B-7B4D-576B-F20F-54F5ECE9017D}"/>
             </a:ext>
           </a:extLst>
         </p:cNvPr>
@@ -9121,7 +8567,7 @@
           <p:cNvPr id="3" name="표 2">
             <a:extLst>
               <a:ext uri="{FF2B5EF4-FFF2-40B4-BE49-F238E27FC236}">
-                <a16:creationId xmlns:a16="http://schemas.microsoft.com/office/drawing/2014/main" id="{DB40A032-999E-DA55-8847-FF6D5E3A3910}"/>
+                <a16:creationId xmlns:a16="http://schemas.microsoft.com/office/drawing/2014/main" id="{C854E90D-F044-CCF7-025C-D32D53148202}"/>
               </a:ext>
             </a:extLst>
           </p:cNvPr>
@@ -9495,9 +8941,10 @@
                     <a:p>
                       <a:pPr algn="ctr"/>
                       <a:r>
-                        <a:rPr sz="1800"/>
-                        <a:t>전선거치 조치, 감전 및 화재위험</a:t>
+                        <a:rPr lang="en-US" sz="3500" dirty="0"/>
+                        <a:t>1</a:t>
                       </a:r>
+                      <a:endParaRPr sz="3500" dirty="0"/>
                     </a:p>
                   </a:txBody>
                   <a:tcPr marL="92882" marR="92882" marT="46441" marB="46441" anchor="ctr">
@@ -9565,9 +9012,10 @@
                     <a:p>
                       <a:pPr algn="ctr"/>
                       <a:r>
-                        <a:rPr sz="2000"/>
-                        <a:t>电线架空管理，防触电及火灾</a:t>
+                        <a:rPr lang="en-US" sz="3500" dirty="0"/>
+                        <a:t>2</a:t>
                       </a:r>
+                      <a:endParaRPr sz="3500" dirty="0"/>
                     </a:p>
                   </a:txBody>
                   <a:tcPr marL="92882" marR="92882" marT="46441" marB="46441" anchor="ctr">
@@ -9635,9 +9083,10 @@
                     <a:p>
                       <a:pPr algn="ctr"/>
                       <a:r>
-                        <a:rPr sz="1200"/>
-                        <a:t>Treo dây điện, nguy cơ điện giật và hỏa hoạn</a:t>
+                        <a:rPr lang="en-US" sz="3500" dirty="0"/>
+                        <a:t>3</a:t>
                       </a:r>
+                      <a:endParaRPr sz="3500" dirty="0"/>
                     </a:p>
                   </a:txBody>
                   <a:tcPr marL="92882" marR="92882" marT="46441" marB="46441" anchor="ctr">
@@ -9705,9 +9154,10 @@
                     <a:p>
                       <a:pPr algn="ctr"/>
                       <a:r>
-                        <a:rPr sz="1000"/>
-                        <a:t>ဝါယာကြိုးများချိတ်ဆွဲရန်၊ ဓာတ်လိုက်မှုနှင့် မီးဘေးအန္တရာယ်</a:t>
+                        <a:rPr lang="en-US" sz="3500" dirty="0"/>
+                        <a:t>4</a:t>
                       </a:r>
+                      <a:endParaRPr sz="3500" dirty="0"/>
                     </a:p>
                   </a:txBody>
                   <a:tcPr marL="88479" marR="88479" marT="44240" marB="44240" anchor="ctr">
@@ -9765,7 +9215,7 @@
           <p:cNvPr id="36" name="그림 35">
             <a:extLst>
               <a:ext uri="{FF2B5EF4-FFF2-40B4-BE49-F238E27FC236}">
-                <a16:creationId xmlns:a16="http://schemas.microsoft.com/office/drawing/2014/main" id="{11761AB9-12D4-F4C3-A3D7-9DE25AB22B20}"/>
+                <a16:creationId xmlns:a16="http://schemas.microsoft.com/office/drawing/2014/main" id="{F0227C13-D164-4543-1C0D-E796CAB5F770}"/>
               </a:ext>
             </a:extLst>
           </p:cNvPr>
@@ -9801,7 +9251,7 @@
           <p:cNvPr id="40" name="그림 39">
             <a:extLst>
               <a:ext uri="{FF2B5EF4-FFF2-40B4-BE49-F238E27FC236}">
-                <a16:creationId xmlns:a16="http://schemas.microsoft.com/office/drawing/2014/main" id="{C268FF71-9561-7F15-85EA-7EBEEB8FEE88}"/>
+                <a16:creationId xmlns:a16="http://schemas.microsoft.com/office/drawing/2014/main" id="{282EBC25-333C-08F9-9456-A6A582D52A14}"/>
               </a:ext>
             </a:extLst>
           </p:cNvPr>
@@ -9837,7 +9287,7 @@
           <p:cNvPr id="12" name="그림 11">
             <a:extLst>
               <a:ext uri="{FF2B5EF4-FFF2-40B4-BE49-F238E27FC236}">
-                <a16:creationId xmlns:a16="http://schemas.microsoft.com/office/drawing/2014/main" id="{E529D82C-8A0B-26E7-44A1-A72B793F1C44}"/>
+                <a16:creationId xmlns:a16="http://schemas.microsoft.com/office/drawing/2014/main" id="{287C6B03-DFF7-8FA5-C082-6C0E3391815B}"/>
               </a:ext>
             </a:extLst>
           </p:cNvPr>
@@ -9867,7 +9317,7 @@
           <p:cNvPr id="14" name="그림 13">
             <a:extLst>
               <a:ext uri="{FF2B5EF4-FFF2-40B4-BE49-F238E27FC236}">
-                <a16:creationId xmlns:a16="http://schemas.microsoft.com/office/drawing/2014/main" id="{480805A6-E9D2-CDF9-C428-9507B2F157CF}"/>
+                <a16:creationId xmlns:a16="http://schemas.microsoft.com/office/drawing/2014/main" id="{E488737C-1E9B-A5AA-AE43-9F4F70F2D3DF}"/>
               </a:ext>
             </a:extLst>
           </p:cNvPr>
@@ -9897,7 +9347,7 @@
           <p:cNvPr id="2" name="PHOTO_BOX">
             <a:extLst>
               <a:ext uri="{FF2B5EF4-FFF2-40B4-BE49-F238E27FC236}">
-                <a16:creationId xmlns:a16="http://schemas.microsoft.com/office/drawing/2014/main" id="{D15280F9-98A0-1D1E-5AA3-C4CF90D107D9}"/>
+                <a16:creationId xmlns:a16="http://schemas.microsoft.com/office/drawing/2014/main" id="{232C5794-CFFC-CD53-39A5-801C779B9E39}"/>
               </a:ext>
             </a:extLst>
           </p:cNvPr>
@@ -9948,7 +9398,7 @@
     </p:spTree>
     <p:extLst>
       <p:ext uri="{BB962C8B-B14F-4D97-AF65-F5344CB8AC3E}">
-        <p14:creationId xmlns:p14="http://schemas.microsoft.com/office/powerpoint/2010/main" val="911264762"/>
+        <p14:creationId xmlns:p14="http://schemas.microsoft.com/office/powerpoint/2010/main" val="1486039113"/>
       </p:ext>
     </p:extLst>
   </p:cSld>
@@ -9966,7 +9416,7 @@
         <p:cNvPr id="1" name="">
           <a:extLst>
             <a:ext uri="{FF2B5EF4-FFF2-40B4-BE49-F238E27FC236}">
-              <a16:creationId xmlns:a16="http://schemas.microsoft.com/office/drawing/2014/main" id="{833B5409-7CBB-B518-2697-E9A15AF1CBC0}"/>
+              <a16:creationId xmlns:a16="http://schemas.microsoft.com/office/drawing/2014/main" id="{7486610C-68DC-22E8-51F6-B8C1CB7819D2}"/>
             </a:ext>
           </a:extLst>
         </p:cNvPr>
@@ -9986,7 +9436,7 @@
           <p:cNvPr id="3" name="표 2">
             <a:extLst>
               <a:ext uri="{FF2B5EF4-FFF2-40B4-BE49-F238E27FC236}">
-                <a16:creationId xmlns:a16="http://schemas.microsoft.com/office/drawing/2014/main" id="{2D6CEBD2-8F6B-21D4-D493-A3DD50CDC287}"/>
+                <a16:creationId xmlns:a16="http://schemas.microsoft.com/office/drawing/2014/main" id="{2E269E2D-3528-61A9-40CE-E35D54720AC8}"/>
               </a:ext>
             </a:extLst>
           </p:cNvPr>
@@ -10360,9 +9810,10 @@
                     <a:p>
                       <a:pPr algn="ctr"/>
                       <a:r>
-                        <a:rPr sz="1800"/>
-                        <a:t>전선거치 조치, 감전 및 화재위험</a:t>
+                        <a:rPr lang="en-US" sz="3500" dirty="0"/>
+                        <a:t>1</a:t>
                       </a:r>
+                      <a:endParaRPr sz="3500" dirty="0"/>
                     </a:p>
                   </a:txBody>
                   <a:tcPr marL="92882" marR="92882" marT="46441" marB="46441" anchor="ctr">
@@ -10430,9 +9881,10 @@
                     <a:p>
                       <a:pPr algn="ctr"/>
                       <a:r>
-                        <a:rPr sz="2000"/>
-                        <a:t>电线架空管理，防触电及火灾</a:t>
+                        <a:rPr lang="en-US" sz="3500" dirty="0"/>
+                        <a:t>2</a:t>
                       </a:r>
+                      <a:endParaRPr sz="3500" dirty="0"/>
                     </a:p>
                   </a:txBody>
                   <a:tcPr marL="92882" marR="92882" marT="46441" marB="46441" anchor="ctr">
@@ -10500,9 +9952,10 @@
                     <a:p>
                       <a:pPr algn="ctr"/>
                       <a:r>
-                        <a:rPr sz="1200"/>
-                        <a:t>Treo dây điện, nguy cơ điện giật và hỏa hoạn</a:t>
+                        <a:rPr lang="en-US" sz="3500" dirty="0"/>
+                        <a:t>3</a:t>
                       </a:r>
+                      <a:endParaRPr sz="3500" dirty="0"/>
                     </a:p>
                   </a:txBody>
                   <a:tcPr marL="92882" marR="92882" marT="46441" marB="46441" anchor="ctr">
@@ -10570,9 +10023,10 @@
                     <a:p>
                       <a:pPr algn="ctr"/>
                       <a:r>
-                        <a:rPr sz="1000"/>
-                        <a:t>ဝါယာကြိုးများချိတ်ဆွဲရန်၊ ဓာတ်လိုက်မှုနှင့် မီးဘေးအန္တရာယ်</a:t>
+                        <a:rPr lang="en-US" sz="3500" dirty="0"/>
+                        <a:t>4</a:t>
                       </a:r>
+                      <a:endParaRPr sz="3500" dirty="0"/>
                     </a:p>
                   </a:txBody>
                   <a:tcPr marL="88479" marR="88479" marT="44240" marB="44240" anchor="ctr">
@@ -10630,7 +10084,7 @@
           <p:cNvPr id="36" name="그림 35">
             <a:extLst>
               <a:ext uri="{FF2B5EF4-FFF2-40B4-BE49-F238E27FC236}">
-                <a16:creationId xmlns:a16="http://schemas.microsoft.com/office/drawing/2014/main" id="{22419C15-3BB4-4F9D-470F-58FC412979AA}"/>
+                <a16:creationId xmlns:a16="http://schemas.microsoft.com/office/drawing/2014/main" id="{8D523C28-2195-E269-C2C6-FF538F527DF1}"/>
               </a:ext>
             </a:extLst>
           </p:cNvPr>
@@ -10666,7 +10120,7 @@
           <p:cNvPr id="40" name="그림 39">
             <a:extLst>
               <a:ext uri="{FF2B5EF4-FFF2-40B4-BE49-F238E27FC236}">
-                <a16:creationId xmlns:a16="http://schemas.microsoft.com/office/drawing/2014/main" id="{9CFD25D6-7318-0B77-4335-6DB46369D376}"/>
+                <a16:creationId xmlns:a16="http://schemas.microsoft.com/office/drawing/2014/main" id="{45528970-FFC4-5D73-2CD8-02248A4490DB}"/>
               </a:ext>
             </a:extLst>
           </p:cNvPr>
@@ -10702,7 +10156,7 @@
           <p:cNvPr id="12" name="그림 11">
             <a:extLst>
               <a:ext uri="{FF2B5EF4-FFF2-40B4-BE49-F238E27FC236}">
-                <a16:creationId xmlns:a16="http://schemas.microsoft.com/office/drawing/2014/main" id="{98723D09-B742-BC06-FDAA-34C6133B6623}"/>
+                <a16:creationId xmlns:a16="http://schemas.microsoft.com/office/drawing/2014/main" id="{92676D19-A391-CA4F-B150-CFD72A3A37F2}"/>
               </a:ext>
             </a:extLst>
           </p:cNvPr>
@@ -10732,7 +10186,7 @@
           <p:cNvPr id="14" name="그림 13">
             <a:extLst>
               <a:ext uri="{FF2B5EF4-FFF2-40B4-BE49-F238E27FC236}">
-                <a16:creationId xmlns:a16="http://schemas.microsoft.com/office/drawing/2014/main" id="{AB160574-898E-854D-C0F1-CCAE6DB2950A}"/>
+                <a16:creationId xmlns:a16="http://schemas.microsoft.com/office/drawing/2014/main" id="{E98D1425-4925-78A4-B8A3-F2F43DB467C4}"/>
               </a:ext>
             </a:extLst>
           </p:cNvPr>
@@ -10762,7 +10216,7 @@
           <p:cNvPr id="2" name="PHOTO_BOX">
             <a:extLst>
               <a:ext uri="{FF2B5EF4-FFF2-40B4-BE49-F238E27FC236}">
-                <a16:creationId xmlns:a16="http://schemas.microsoft.com/office/drawing/2014/main" id="{14CB56C5-0A4D-3896-053B-C2A05468FB56}"/>
+                <a16:creationId xmlns:a16="http://schemas.microsoft.com/office/drawing/2014/main" id="{AC5A740E-460C-A25C-AD0B-7C5BC91257C1}"/>
               </a:ext>
             </a:extLst>
           </p:cNvPr>
@@ -10813,7 +10267,7 @@
     </p:spTree>
     <p:extLst>
       <p:ext uri="{BB962C8B-B14F-4D97-AF65-F5344CB8AC3E}">
-        <p14:creationId xmlns:p14="http://schemas.microsoft.com/office/powerpoint/2010/main" val="75204007"/>
+        <p14:creationId xmlns:p14="http://schemas.microsoft.com/office/powerpoint/2010/main" val="1191941568"/>
       </p:ext>
     </p:extLst>
   </p:cSld>
@@ -10831,7 +10285,7 @@
         <p:cNvPr id="1" name="">
           <a:extLst>
             <a:ext uri="{FF2B5EF4-FFF2-40B4-BE49-F238E27FC236}">
-              <a16:creationId xmlns:a16="http://schemas.microsoft.com/office/drawing/2014/main" id="{B89F75B5-DBE4-3148-C023-C8DDCA7D3625}"/>
+              <a16:creationId xmlns:a16="http://schemas.microsoft.com/office/drawing/2014/main" id="{1CEB5D75-683D-802C-11FE-E0EB8E80B4B5}"/>
             </a:ext>
           </a:extLst>
         </p:cNvPr>
@@ -10851,7 +10305,7 @@
           <p:cNvPr id="3" name="표 2">
             <a:extLst>
               <a:ext uri="{FF2B5EF4-FFF2-40B4-BE49-F238E27FC236}">
-                <a16:creationId xmlns:a16="http://schemas.microsoft.com/office/drawing/2014/main" id="{BF471411-73AD-A839-24F7-E058477D6354}"/>
+                <a16:creationId xmlns:a16="http://schemas.microsoft.com/office/drawing/2014/main" id="{446B6E18-547F-1240-B7FC-03DE77CD284F}"/>
               </a:ext>
             </a:extLst>
           </p:cNvPr>
@@ -11225,9 +10679,10 @@
                     <a:p>
                       <a:pPr algn="ctr"/>
                       <a:r>
-                        <a:rPr sz="1800"/>
-                        <a:t>전선거치 조치, 감전 및 화재위험</a:t>
+                        <a:rPr lang="en-US" sz="3500" dirty="0"/>
+                        <a:t>1</a:t>
                       </a:r>
+                      <a:endParaRPr sz="3500" dirty="0"/>
                     </a:p>
                   </a:txBody>
                   <a:tcPr marL="92882" marR="92882" marT="46441" marB="46441" anchor="ctr">
@@ -11295,9 +10750,10 @@
                     <a:p>
                       <a:pPr algn="ctr"/>
                       <a:r>
-                        <a:rPr sz="2000"/>
-                        <a:t>电线架空管理，防触电及火灾</a:t>
+                        <a:rPr lang="en-US" sz="3500" dirty="0"/>
+                        <a:t>2</a:t>
                       </a:r>
+                      <a:endParaRPr sz="3500" dirty="0"/>
                     </a:p>
                   </a:txBody>
                   <a:tcPr marL="92882" marR="92882" marT="46441" marB="46441" anchor="ctr">
@@ -11365,9 +10821,10 @@
                     <a:p>
                       <a:pPr algn="ctr"/>
                       <a:r>
-                        <a:rPr sz="1200"/>
-                        <a:t>Treo dây điện, nguy cơ điện giật và hỏa hoạn</a:t>
+                        <a:rPr lang="en-US" sz="3500" dirty="0"/>
+                        <a:t>3</a:t>
                       </a:r>
+                      <a:endParaRPr sz="3500" dirty="0"/>
                     </a:p>
                   </a:txBody>
                   <a:tcPr marL="92882" marR="92882" marT="46441" marB="46441" anchor="ctr">
@@ -11435,9 +10892,10 @@
                     <a:p>
                       <a:pPr algn="ctr"/>
                       <a:r>
-                        <a:rPr sz="1000"/>
-                        <a:t>ဝါယာကြိုးများချိတ်ဆွဲရန်၊ ဓာတ်လိုက်မှုနှင့် မီးဘေးအန္တရာယ်</a:t>
+                        <a:rPr lang="en-US" sz="3500" dirty="0"/>
+                        <a:t>4</a:t>
                       </a:r>
+                      <a:endParaRPr sz="3500" dirty="0"/>
                     </a:p>
                   </a:txBody>
                   <a:tcPr marL="88479" marR="88479" marT="44240" marB="44240" anchor="ctr">
@@ -11495,7 +10953,7 @@
           <p:cNvPr id="36" name="그림 35">
             <a:extLst>
               <a:ext uri="{FF2B5EF4-FFF2-40B4-BE49-F238E27FC236}">
-                <a16:creationId xmlns:a16="http://schemas.microsoft.com/office/drawing/2014/main" id="{B11DB101-6245-98F0-0A1C-9D11E2C21E5B}"/>
+                <a16:creationId xmlns:a16="http://schemas.microsoft.com/office/drawing/2014/main" id="{99A345C5-3532-77BB-A11E-71DC4F370932}"/>
               </a:ext>
             </a:extLst>
           </p:cNvPr>
@@ -11531,7 +10989,7 @@
           <p:cNvPr id="40" name="그림 39">
             <a:extLst>
               <a:ext uri="{FF2B5EF4-FFF2-40B4-BE49-F238E27FC236}">
-                <a16:creationId xmlns:a16="http://schemas.microsoft.com/office/drawing/2014/main" id="{CD07EFC9-ECEE-6C4F-E6D9-DE6D0CC36125}"/>
+                <a16:creationId xmlns:a16="http://schemas.microsoft.com/office/drawing/2014/main" id="{AB7C0C46-9A5B-BA1F-689B-5B6F4BD818E4}"/>
               </a:ext>
             </a:extLst>
           </p:cNvPr>
@@ -11567,7 +11025,7 @@
           <p:cNvPr id="12" name="그림 11">
             <a:extLst>
               <a:ext uri="{FF2B5EF4-FFF2-40B4-BE49-F238E27FC236}">
-                <a16:creationId xmlns:a16="http://schemas.microsoft.com/office/drawing/2014/main" id="{87748BDF-1451-E212-9940-95A6BFF04438}"/>
+                <a16:creationId xmlns:a16="http://schemas.microsoft.com/office/drawing/2014/main" id="{831C67F3-FA9F-1AF1-AB5F-10294C65E591}"/>
               </a:ext>
             </a:extLst>
           </p:cNvPr>
@@ -11597,7 +11055,7 @@
           <p:cNvPr id="14" name="그림 13">
             <a:extLst>
               <a:ext uri="{FF2B5EF4-FFF2-40B4-BE49-F238E27FC236}">
-                <a16:creationId xmlns:a16="http://schemas.microsoft.com/office/drawing/2014/main" id="{B780EADD-43E5-404E-2DBA-22955BF183FF}"/>
+                <a16:creationId xmlns:a16="http://schemas.microsoft.com/office/drawing/2014/main" id="{AE774564-8123-7DE7-A02D-86941CB64ACD}"/>
               </a:ext>
             </a:extLst>
           </p:cNvPr>
@@ -11627,7 +11085,7 @@
           <p:cNvPr id="2" name="PHOTO_BOX">
             <a:extLst>
               <a:ext uri="{FF2B5EF4-FFF2-40B4-BE49-F238E27FC236}">
-                <a16:creationId xmlns:a16="http://schemas.microsoft.com/office/drawing/2014/main" id="{A922D8C4-93A5-8299-D194-1ED2F698EBCD}"/>
+                <a16:creationId xmlns:a16="http://schemas.microsoft.com/office/drawing/2014/main" id="{0A78BB6E-B1F7-F2FF-F649-F53C30FF5C42}"/>
               </a:ext>
             </a:extLst>
           </p:cNvPr>
@@ -11678,7 +11136,7 @@
     </p:spTree>
     <p:extLst>
       <p:ext uri="{BB962C8B-B14F-4D97-AF65-F5344CB8AC3E}">
-        <p14:creationId xmlns:p14="http://schemas.microsoft.com/office/powerpoint/2010/main" val="1120900333"/>
+        <p14:creationId xmlns:p14="http://schemas.microsoft.com/office/powerpoint/2010/main" val="2663529383"/>
       </p:ext>
     </p:extLst>
   </p:cSld>
@@ -11688,7 +11146,7 @@
 </p:sld>
 </file>
 
-<file path=ppt/slides/slide16.xml><?xml version="1.0" encoding="utf-8"?>
+<file path=ppt/slides/slide2.xml><?xml version="1.0" encoding="utf-8"?>
 <p:sld xmlns:a="http://schemas.openxmlformats.org/drawingml/2006/main" xmlns:r="http://schemas.openxmlformats.org/officeDocument/2006/relationships" xmlns:p="http://schemas.openxmlformats.org/presentationml/2006/main">
   <p:cSld>
     <p:spTree>
@@ -11696,7 +11154,7 @@
         <p:cNvPr id="1" name="">
           <a:extLst>
             <a:ext uri="{FF2B5EF4-FFF2-40B4-BE49-F238E27FC236}">
-              <a16:creationId xmlns:a16="http://schemas.microsoft.com/office/drawing/2014/main" id="{6FE4F8C8-3A0C-0911-1C3D-1C9E06B5AF7E}"/>
+              <a16:creationId xmlns:a16="http://schemas.microsoft.com/office/drawing/2014/main" id="{93A83B09-1D47-39C9-8835-78DCFB27B4D8}"/>
             </a:ext>
           </a:extLst>
         </p:cNvPr>
@@ -11716,7 +11174,7 @@
           <p:cNvPr id="3" name="표 2">
             <a:extLst>
               <a:ext uri="{FF2B5EF4-FFF2-40B4-BE49-F238E27FC236}">
-                <a16:creationId xmlns:a16="http://schemas.microsoft.com/office/drawing/2014/main" id="{4DD83276-9925-1EF5-70C6-3F20878A803E}"/>
+                <a16:creationId xmlns:a16="http://schemas.microsoft.com/office/drawing/2014/main" id="{76BF9D35-9AFD-B9BC-CFEF-14FBD5C5A912}"/>
               </a:ext>
             </a:extLst>
           </p:cNvPr>
@@ -12090,9 +11548,10 @@
                     <a:p>
                       <a:pPr algn="ctr"/>
                       <a:r>
-                        <a:rPr sz="1800"/>
-                        <a:t>전선거치 조치, 감전 및 화재위험</a:t>
+                        <a:rPr lang="en-US" sz="3500" dirty="0"/>
+                        <a:t>1</a:t>
                       </a:r>
+                      <a:endParaRPr sz="3500" dirty="0"/>
                     </a:p>
                   </a:txBody>
                   <a:tcPr marL="92882" marR="92882" marT="46441" marB="46441" anchor="ctr">
@@ -12160,9 +11619,10 @@
                     <a:p>
                       <a:pPr algn="ctr"/>
                       <a:r>
-                        <a:rPr sz="2000"/>
-                        <a:t>电线架空管理，防触电及火灾</a:t>
+                        <a:rPr lang="en-US" sz="3500" dirty="0"/>
+                        <a:t>2</a:t>
                       </a:r>
+                      <a:endParaRPr sz="3500" dirty="0"/>
                     </a:p>
                   </a:txBody>
                   <a:tcPr marL="92882" marR="92882" marT="46441" marB="46441" anchor="ctr">
@@ -12230,9 +11690,10 @@
                     <a:p>
                       <a:pPr algn="ctr"/>
                       <a:r>
-                        <a:rPr sz="1200"/>
-                        <a:t>Treo dây điện, nguy cơ điện giật và hỏa hoạn</a:t>
+                        <a:rPr lang="en-US" sz="3500" dirty="0"/>
+                        <a:t>3</a:t>
                       </a:r>
+                      <a:endParaRPr sz="3500" dirty="0"/>
                     </a:p>
                   </a:txBody>
                   <a:tcPr marL="92882" marR="92882" marT="46441" marB="46441" anchor="ctr">
@@ -12300,9 +11761,10 @@
                     <a:p>
                       <a:pPr algn="ctr"/>
                       <a:r>
-                        <a:rPr sz="1000"/>
-                        <a:t>ဝါယာကြိုးများချိတ်ဆွဲရန်၊ ဓာတ်လိုက်မှုနှင့် မီးဘေးအန္တရာယ်</a:t>
+                        <a:rPr lang="en-US" sz="3500" dirty="0"/>
+                        <a:t>4</a:t>
                       </a:r>
+                      <a:endParaRPr sz="3500" dirty="0"/>
                     </a:p>
                   </a:txBody>
                   <a:tcPr marL="88479" marR="88479" marT="44240" marB="44240" anchor="ctr">
@@ -12360,7 +11822,7 @@
           <p:cNvPr id="36" name="그림 35">
             <a:extLst>
               <a:ext uri="{FF2B5EF4-FFF2-40B4-BE49-F238E27FC236}">
-                <a16:creationId xmlns:a16="http://schemas.microsoft.com/office/drawing/2014/main" id="{50857DAB-F6A0-0258-C743-495AB6083EC9}"/>
+                <a16:creationId xmlns:a16="http://schemas.microsoft.com/office/drawing/2014/main" id="{9053E393-6C40-F052-3630-AD394150AD1D}"/>
               </a:ext>
             </a:extLst>
           </p:cNvPr>
@@ -12396,7 +11858,7 @@
           <p:cNvPr id="40" name="그림 39">
             <a:extLst>
               <a:ext uri="{FF2B5EF4-FFF2-40B4-BE49-F238E27FC236}">
-                <a16:creationId xmlns:a16="http://schemas.microsoft.com/office/drawing/2014/main" id="{1339E061-4B0C-D868-8CB4-72E281D1F8B5}"/>
+                <a16:creationId xmlns:a16="http://schemas.microsoft.com/office/drawing/2014/main" id="{37AF39DC-82C2-D869-5778-0D065C37A6BA}"/>
               </a:ext>
             </a:extLst>
           </p:cNvPr>
@@ -12432,7 +11894,7 @@
           <p:cNvPr id="12" name="그림 11">
             <a:extLst>
               <a:ext uri="{FF2B5EF4-FFF2-40B4-BE49-F238E27FC236}">
-                <a16:creationId xmlns:a16="http://schemas.microsoft.com/office/drawing/2014/main" id="{D686B0B5-FBE8-2136-B207-C11347493A2E}"/>
+                <a16:creationId xmlns:a16="http://schemas.microsoft.com/office/drawing/2014/main" id="{88228713-C4EB-2B6E-40C8-1AEF66B724DA}"/>
               </a:ext>
             </a:extLst>
           </p:cNvPr>
@@ -12462,7 +11924,7 @@
           <p:cNvPr id="14" name="그림 13">
             <a:extLst>
               <a:ext uri="{FF2B5EF4-FFF2-40B4-BE49-F238E27FC236}">
-                <a16:creationId xmlns:a16="http://schemas.microsoft.com/office/drawing/2014/main" id="{FB259244-4516-29BA-34E2-669D15D64FA5}"/>
+                <a16:creationId xmlns:a16="http://schemas.microsoft.com/office/drawing/2014/main" id="{96BC8ABD-F4D3-5FDC-2F2B-49C188E9EF2D}"/>
               </a:ext>
             </a:extLst>
           </p:cNvPr>
@@ -12492,7 +11954,7 @@
           <p:cNvPr id="2" name="PHOTO_BOX">
             <a:extLst>
               <a:ext uri="{FF2B5EF4-FFF2-40B4-BE49-F238E27FC236}">
-                <a16:creationId xmlns:a16="http://schemas.microsoft.com/office/drawing/2014/main" id="{343CCA00-6E45-EA6F-B210-9C6B05E59E1F}"/>
+                <a16:creationId xmlns:a16="http://schemas.microsoft.com/office/drawing/2014/main" id="{034A4FBF-BF8E-A8C1-6F03-514D0B3BD7FB}"/>
               </a:ext>
             </a:extLst>
           </p:cNvPr>
@@ -12543,7 +12005,7 @@
     </p:spTree>
     <p:extLst>
       <p:ext uri="{BB962C8B-B14F-4D97-AF65-F5344CB8AC3E}">
-        <p14:creationId xmlns:p14="http://schemas.microsoft.com/office/powerpoint/2010/main" val="1045088966"/>
+        <p14:creationId xmlns:p14="http://schemas.microsoft.com/office/powerpoint/2010/main" val="2547306249"/>
       </p:ext>
     </p:extLst>
   </p:cSld>
@@ -12553,7 +12015,7 @@
 </p:sld>
 </file>
 
-<file path=ppt/slides/slide17.xml><?xml version="1.0" encoding="utf-8"?>
+<file path=ppt/slides/slide3.xml><?xml version="1.0" encoding="utf-8"?>
 <p:sld xmlns:a="http://schemas.openxmlformats.org/drawingml/2006/main" xmlns:r="http://schemas.openxmlformats.org/officeDocument/2006/relationships" xmlns:p="http://schemas.openxmlformats.org/presentationml/2006/main">
   <p:cSld>
     <p:spTree>
@@ -12561,7 +12023,7 @@
         <p:cNvPr id="1" name="">
           <a:extLst>
             <a:ext uri="{FF2B5EF4-FFF2-40B4-BE49-F238E27FC236}">
-              <a16:creationId xmlns:a16="http://schemas.microsoft.com/office/drawing/2014/main" id="{3DD606AF-40C8-4D31-B910-150CACA66178}"/>
+              <a16:creationId xmlns:a16="http://schemas.microsoft.com/office/drawing/2014/main" id="{E0FC3936-DBC4-23F4-D307-FE01F43A5086}"/>
             </a:ext>
           </a:extLst>
         </p:cNvPr>
@@ -12581,7 +12043,7 @@
           <p:cNvPr id="3" name="표 2">
             <a:extLst>
               <a:ext uri="{FF2B5EF4-FFF2-40B4-BE49-F238E27FC236}">
-                <a16:creationId xmlns:a16="http://schemas.microsoft.com/office/drawing/2014/main" id="{2BD45D7F-5CBF-3111-9379-3F8762985BB2}"/>
+                <a16:creationId xmlns:a16="http://schemas.microsoft.com/office/drawing/2014/main" id="{839956A3-779D-86D9-03E8-9FBABB4E4A50}"/>
               </a:ext>
             </a:extLst>
           </p:cNvPr>
@@ -12955,9 +12417,10 @@
                     <a:p>
                       <a:pPr algn="ctr"/>
                       <a:r>
-                        <a:rPr sz="1800"/>
-                        <a:t>전선거치 조치, 감전 및 화재위험</a:t>
+                        <a:rPr lang="en-US" sz="3500" dirty="0"/>
+                        <a:t>1</a:t>
                       </a:r>
+                      <a:endParaRPr sz="3500" dirty="0"/>
                     </a:p>
                   </a:txBody>
                   <a:tcPr marL="92882" marR="92882" marT="46441" marB="46441" anchor="ctr">
@@ -13025,9 +12488,10 @@
                     <a:p>
                       <a:pPr algn="ctr"/>
                       <a:r>
-                        <a:rPr sz="2000"/>
-                        <a:t>电线架空管理，防触电及火灾</a:t>
+                        <a:rPr lang="en-US" sz="3500" dirty="0"/>
+                        <a:t>2</a:t>
                       </a:r>
+                      <a:endParaRPr sz="3500" dirty="0"/>
                     </a:p>
                   </a:txBody>
                   <a:tcPr marL="92882" marR="92882" marT="46441" marB="46441" anchor="ctr">
@@ -13095,9 +12559,10 @@
                     <a:p>
                       <a:pPr algn="ctr"/>
                       <a:r>
-                        <a:rPr sz="1200"/>
-                        <a:t>Treo dây điện, nguy cơ điện giật và hỏa hoạn</a:t>
+                        <a:rPr lang="en-US" sz="3500" dirty="0"/>
+                        <a:t>3</a:t>
                       </a:r>
+                      <a:endParaRPr sz="3500" dirty="0"/>
                     </a:p>
                   </a:txBody>
                   <a:tcPr marL="92882" marR="92882" marT="46441" marB="46441" anchor="ctr">
@@ -13165,9 +12630,10 @@
                     <a:p>
                       <a:pPr algn="ctr"/>
                       <a:r>
-                        <a:rPr sz="1000"/>
-                        <a:t>ဝါယာကြိုးများချိတ်ဆွဲရန်၊ ဓာတ်လိုက်မှုနှင့် မီးဘေးအန္တရာယ်</a:t>
+                        <a:rPr lang="en-US" sz="3500" dirty="0"/>
+                        <a:t>4</a:t>
                       </a:r>
+                      <a:endParaRPr sz="3500" dirty="0"/>
                     </a:p>
                   </a:txBody>
                   <a:tcPr marL="88479" marR="88479" marT="44240" marB="44240" anchor="ctr">
@@ -13225,7 +12691,7 @@
           <p:cNvPr id="36" name="그림 35">
             <a:extLst>
               <a:ext uri="{FF2B5EF4-FFF2-40B4-BE49-F238E27FC236}">
-                <a16:creationId xmlns:a16="http://schemas.microsoft.com/office/drawing/2014/main" id="{91941667-E141-996C-A83C-A6EC05ECD6D8}"/>
+                <a16:creationId xmlns:a16="http://schemas.microsoft.com/office/drawing/2014/main" id="{4840E272-6296-1C81-CEE9-0D68F282CDFE}"/>
               </a:ext>
             </a:extLst>
           </p:cNvPr>
@@ -13261,7 +12727,7 @@
           <p:cNvPr id="40" name="그림 39">
             <a:extLst>
               <a:ext uri="{FF2B5EF4-FFF2-40B4-BE49-F238E27FC236}">
-                <a16:creationId xmlns:a16="http://schemas.microsoft.com/office/drawing/2014/main" id="{F11B0F12-BEFA-C791-E38D-CCD2F535DFF0}"/>
+                <a16:creationId xmlns:a16="http://schemas.microsoft.com/office/drawing/2014/main" id="{500A214E-20E3-161B-0316-B3869D9C880C}"/>
               </a:ext>
             </a:extLst>
           </p:cNvPr>
@@ -13297,7 +12763,7 @@
           <p:cNvPr id="12" name="그림 11">
             <a:extLst>
               <a:ext uri="{FF2B5EF4-FFF2-40B4-BE49-F238E27FC236}">
-                <a16:creationId xmlns:a16="http://schemas.microsoft.com/office/drawing/2014/main" id="{AA518375-5515-F1D0-AEF8-3CB9DC8A056E}"/>
+                <a16:creationId xmlns:a16="http://schemas.microsoft.com/office/drawing/2014/main" id="{6F2DEA67-5B34-AEEF-207D-DEC46CD1790C}"/>
               </a:ext>
             </a:extLst>
           </p:cNvPr>
@@ -13327,7 +12793,7 @@
           <p:cNvPr id="14" name="그림 13">
             <a:extLst>
               <a:ext uri="{FF2B5EF4-FFF2-40B4-BE49-F238E27FC236}">
-                <a16:creationId xmlns:a16="http://schemas.microsoft.com/office/drawing/2014/main" id="{B4B83DD8-756E-37D9-6A29-335DAC4D5D2E}"/>
+                <a16:creationId xmlns:a16="http://schemas.microsoft.com/office/drawing/2014/main" id="{53AD8D13-E0A7-A6C5-7CE7-56FA70517487}"/>
               </a:ext>
             </a:extLst>
           </p:cNvPr>
@@ -13357,7 +12823,7 @@
           <p:cNvPr id="2" name="PHOTO_BOX">
             <a:extLst>
               <a:ext uri="{FF2B5EF4-FFF2-40B4-BE49-F238E27FC236}">
-                <a16:creationId xmlns:a16="http://schemas.microsoft.com/office/drawing/2014/main" id="{E1664197-9B85-183E-77D1-B449D12D2C31}"/>
+                <a16:creationId xmlns:a16="http://schemas.microsoft.com/office/drawing/2014/main" id="{F6D28673-5EFE-7A65-8A02-42870EC48211}"/>
               </a:ext>
             </a:extLst>
           </p:cNvPr>
@@ -13408,7 +12874,7 @@
     </p:spTree>
     <p:extLst>
       <p:ext uri="{BB962C8B-B14F-4D97-AF65-F5344CB8AC3E}">
-        <p14:creationId xmlns:p14="http://schemas.microsoft.com/office/powerpoint/2010/main" val="2983086027"/>
+        <p14:creationId xmlns:p14="http://schemas.microsoft.com/office/powerpoint/2010/main" val="2529326668"/>
       </p:ext>
     </p:extLst>
   </p:cSld>
@@ -13418,7 +12884,7 @@
 </p:sld>
 </file>
 
-<file path=ppt/slides/slide18.xml><?xml version="1.0" encoding="utf-8"?>
+<file path=ppt/slides/slide4.xml><?xml version="1.0" encoding="utf-8"?>
 <p:sld xmlns:a="http://schemas.openxmlformats.org/drawingml/2006/main" xmlns:r="http://schemas.openxmlformats.org/officeDocument/2006/relationships" xmlns:p="http://schemas.openxmlformats.org/presentationml/2006/main">
   <p:cSld>
     <p:spTree>
@@ -13426,7 +12892,7 @@
         <p:cNvPr id="1" name="">
           <a:extLst>
             <a:ext uri="{FF2B5EF4-FFF2-40B4-BE49-F238E27FC236}">
-              <a16:creationId xmlns:a16="http://schemas.microsoft.com/office/drawing/2014/main" id="{3738946B-67AC-739C-773B-6AF68E177260}"/>
+              <a16:creationId xmlns:a16="http://schemas.microsoft.com/office/drawing/2014/main" id="{9D95F6E2-84A8-F6D8-C6F3-EDD88BC3CAB5}"/>
             </a:ext>
           </a:extLst>
         </p:cNvPr>
@@ -13446,7 +12912,7 @@
           <p:cNvPr id="3" name="표 2">
             <a:extLst>
               <a:ext uri="{FF2B5EF4-FFF2-40B4-BE49-F238E27FC236}">
-                <a16:creationId xmlns:a16="http://schemas.microsoft.com/office/drawing/2014/main" id="{B2877369-A0C3-7209-53DE-DCFE9C88221A}"/>
+                <a16:creationId xmlns:a16="http://schemas.microsoft.com/office/drawing/2014/main" id="{759AB031-04CF-B000-6D3C-F587EB53D2BB}"/>
               </a:ext>
             </a:extLst>
           </p:cNvPr>
@@ -13820,9 +13286,10 @@
                     <a:p>
                       <a:pPr algn="ctr"/>
                       <a:r>
-                        <a:rPr sz="1800"/>
-                        <a:t>전선거치 조치, 감전 및 화재위험</a:t>
+                        <a:rPr lang="en-US" sz="3500" dirty="0"/>
+                        <a:t>1</a:t>
                       </a:r>
+                      <a:endParaRPr sz="3500" dirty="0"/>
                     </a:p>
                   </a:txBody>
                   <a:tcPr marL="92882" marR="92882" marT="46441" marB="46441" anchor="ctr">
@@ -13890,9 +13357,10 @@
                     <a:p>
                       <a:pPr algn="ctr"/>
                       <a:r>
-                        <a:rPr sz="2000"/>
-                        <a:t>电线架空管理，防触电及火灾</a:t>
+                        <a:rPr lang="en-US" sz="3500" dirty="0"/>
+                        <a:t>2</a:t>
                       </a:r>
+                      <a:endParaRPr sz="3500" dirty="0"/>
                     </a:p>
                   </a:txBody>
                   <a:tcPr marL="92882" marR="92882" marT="46441" marB="46441" anchor="ctr">
@@ -13960,9 +13428,10 @@
                     <a:p>
                       <a:pPr algn="ctr"/>
                       <a:r>
-                        <a:rPr sz="1200"/>
-                        <a:t>Treo dây điện, nguy cơ điện giật và hỏa hoạn</a:t>
+                        <a:rPr lang="en-US" sz="3500" dirty="0"/>
+                        <a:t>3</a:t>
                       </a:r>
+                      <a:endParaRPr sz="3500" dirty="0"/>
                     </a:p>
                   </a:txBody>
                   <a:tcPr marL="92882" marR="92882" marT="46441" marB="46441" anchor="ctr">
@@ -14030,9 +13499,10 @@
                     <a:p>
                       <a:pPr algn="ctr"/>
                       <a:r>
-                        <a:rPr sz="1000"/>
-                        <a:t>ဝါယာကြိုးများချိတ်ဆွဲရန်၊ ဓာတ်လိုက်မှုနှင့် မီးဘေးအန္တရာယ်</a:t>
+                        <a:rPr lang="en-US" sz="3500" dirty="0"/>
+                        <a:t>4</a:t>
                       </a:r>
+                      <a:endParaRPr sz="3500" dirty="0"/>
                     </a:p>
                   </a:txBody>
                   <a:tcPr marL="88479" marR="88479" marT="44240" marB="44240" anchor="ctr">
@@ -14090,7 +13560,7 @@
           <p:cNvPr id="36" name="그림 35">
             <a:extLst>
               <a:ext uri="{FF2B5EF4-FFF2-40B4-BE49-F238E27FC236}">
-                <a16:creationId xmlns:a16="http://schemas.microsoft.com/office/drawing/2014/main" id="{2651E732-5C0C-F949-2E5D-82FE0B4EFF08}"/>
+                <a16:creationId xmlns:a16="http://schemas.microsoft.com/office/drawing/2014/main" id="{219CE4D6-F336-278B-56D3-32E56C93D4F9}"/>
               </a:ext>
             </a:extLst>
           </p:cNvPr>
@@ -14126,7 +13596,7 @@
           <p:cNvPr id="40" name="그림 39">
             <a:extLst>
               <a:ext uri="{FF2B5EF4-FFF2-40B4-BE49-F238E27FC236}">
-                <a16:creationId xmlns:a16="http://schemas.microsoft.com/office/drawing/2014/main" id="{8D45E827-8903-44DA-B128-8D84E513A66B}"/>
+                <a16:creationId xmlns:a16="http://schemas.microsoft.com/office/drawing/2014/main" id="{F96B6143-3D6D-48A0-229F-97CD028A12A3}"/>
               </a:ext>
             </a:extLst>
           </p:cNvPr>
@@ -14162,7 +13632,7 @@
           <p:cNvPr id="12" name="그림 11">
             <a:extLst>
               <a:ext uri="{FF2B5EF4-FFF2-40B4-BE49-F238E27FC236}">
-                <a16:creationId xmlns:a16="http://schemas.microsoft.com/office/drawing/2014/main" id="{AB3DA0B0-41AB-A752-835C-CD353CC0D828}"/>
+                <a16:creationId xmlns:a16="http://schemas.microsoft.com/office/drawing/2014/main" id="{07839A73-7737-2F15-E021-A97D607E10E3}"/>
               </a:ext>
             </a:extLst>
           </p:cNvPr>
@@ -14192,7 +13662,7 @@
           <p:cNvPr id="14" name="그림 13">
             <a:extLst>
               <a:ext uri="{FF2B5EF4-FFF2-40B4-BE49-F238E27FC236}">
-                <a16:creationId xmlns:a16="http://schemas.microsoft.com/office/drawing/2014/main" id="{17CF56B9-76CF-02E3-7FDD-B8F6D2CB3FC6}"/>
+                <a16:creationId xmlns:a16="http://schemas.microsoft.com/office/drawing/2014/main" id="{AF6EDF7D-50A1-E34B-6823-1041A9E14B22}"/>
               </a:ext>
             </a:extLst>
           </p:cNvPr>
@@ -14222,7 +13692,7 @@
           <p:cNvPr id="2" name="PHOTO_BOX">
             <a:extLst>
               <a:ext uri="{FF2B5EF4-FFF2-40B4-BE49-F238E27FC236}">
-                <a16:creationId xmlns:a16="http://schemas.microsoft.com/office/drawing/2014/main" id="{F63F018A-1445-DA47-60AD-412AACB09812}"/>
+                <a16:creationId xmlns:a16="http://schemas.microsoft.com/office/drawing/2014/main" id="{6DE922BE-1941-B90A-F5DC-14113ACADD10}"/>
               </a:ext>
             </a:extLst>
           </p:cNvPr>
@@ -14273,7 +13743,7 @@
     </p:spTree>
     <p:extLst>
       <p:ext uri="{BB962C8B-B14F-4D97-AF65-F5344CB8AC3E}">
-        <p14:creationId xmlns:p14="http://schemas.microsoft.com/office/powerpoint/2010/main" val="283509453"/>
+        <p14:creationId xmlns:p14="http://schemas.microsoft.com/office/powerpoint/2010/main" val="2621218370"/>
       </p:ext>
     </p:extLst>
   </p:cSld>
@@ -14283,7 +13753,7 @@
 </p:sld>
 </file>
 
-<file path=ppt/slides/slide19.xml><?xml version="1.0" encoding="utf-8"?>
+<file path=ppt/slides/slide5.xml><?xml version="1.0" encoding="utf-8"?>
 <p:sld xmlns:a="http://schemas.openxmlformats.org/drawingml/2006/main" xmlns:r="http://schemas.openxmlformats.org/officeDocument/2006/relationships" xmlns:p="http://schemas.openxmlformats.org/presentationml/2006/main">
   <p:cSld>
     <p:spTree>
@@ -14291,7 +13761,7 @@
         <p:cNvPr id="1" name="">
           <a:extLst>
             <a:ext uri="{FF2B5EF4-FFF2-40B4-BE49-F238E27FC236}">
-              <a16:creationId xmlns:a16="http://schemas.microsoft.com/office/drawing/2014/main" id="{EFA7DD7F-0C3C-D202-C2E5-AE9DAE893D1E}"/>
+              <a16:creationId xmlns:a16="http://schemas.microsoft.com/office/drawing/2014/main" id="{17572B21-05D3-62AE-B285-C83CF175C352}"/>
             </a:ext>
           </a:extLst>
         </p:cNvPr>
@@ -14311,7 +13781,7 @@
           <p:cNvPr id="3" name="표 2">
             <a:extLst>
               <a:ext uri="{FF2B5EF4-FFF2-40B4-BE49-F238E27FC236}">
-                <a16:creationId xmlns:a16="http://schemas.microsoft.com/office/drawing/2014/main" id="{0BDFBA52-DB23-E5EE-6A6E-D800450F9C0B}"/>
+                <a16:creationId xmlns:a16="http://schemas.microsoft.com/office/drawing/2014/main" id="{0046EC17-379F-3607-8C64-AC9189054F30}"/>
               </a:ext>
             </a:extLst>
           </p:cNvPr>
@@ -14685,9 +14155,10 @@
                     <a:p>
                       <a:pPr algn="ctr"/>
                       <a:r>
-                        <a:rPr sz="1800"/>
-                        <a:t>전선거치 조치, 감전 및 화재위험</a:t>
+                        <a:rPr lang="en-US" sz="3500" dirty="0"/>
+                        <a:t>1</a:t>
                       </a:r>
+                      <a:endParaRPr sz="3500" dirty="0"/>
                     </a:p>
                   </a:txBody>
                   <a:tcPr marL="92882" marR="92882" marT="46441" marB="46441" anchor="ctr">
@@ -14755,9 +14226,10 @@
                     <a:p>
                       <a:pPr algn="ctr"/>
                       <a:r>
-                        <a:rPr sz="2000"/>
-                        <a:t>电线架空管理，防触电及火灾</a:t>
+                        <a:rPr lang="en-US" sz="3500" dirty="0"/>
+                        <a:t>2</a:t>
                       </a:r>
+                      <a:endParaRPr sz="3500" dirty="0"/>
                     </a:p>
                   </a:txBody>
                   <a:tcPr marL="92882" marR="92882" marT="46441" marB="46441" anchor="ctr">
@@ -14825,9 +14297,10 @@
                     <a:p>
                       <a:pPr algn="ctr"/>
                       <a:r>
-                        <a:rPr sz="1200"/>
-                        <a:t>Treo dây điện, nguy cơ điện giật và hỏa hoạn</a:t>
+                        <a:rPr lang="en-US" sz="3500" dirty="0"/>
+                        <a:t>3</a:t>
                       </a:r>
+                      <a:endParaRPr sz="3500" dirty="0"/>
                     </a:p>
                   </a:txBody>
                   <a:tcPr marL="92882" marR="92882" marT="46441" marB="46441" anchor="ctr">
@@ -14895,9 +14368,10 @@
                     <a:p>
                       <a:pPr algn="ctr"/>
                       <a:r>
-                        <a:rPr sz="1000"/>
-                        <a:t>ဝါယာကြိုးများချိတ်ဆွဲရန်၊ ဓာတ်လိုက်မှုနှင့် မီးဘေးအန္တရာယ်</a:t>
+                        <a:rPr lang="en-US" sz="3500" dirty="0"/>
+                        <a:t>4</a:t>
                       </a:r>
+                      <a:endParaRPr sz="3500" dirty="0"/>
                     </a:p>
                   </a:txBody>
                   <a:tcPr marL="88479" marR="88479" marT="44240" marB="44240" anchor="ctr">
@@ -14955,7 +14429,7 @@
           <p:cNvPr id="36" name="그림 35">
             <a:extLst>
               <a:ext uri="{FF2B5EF4-FFF2-40B4-BE49-F238E27FC236}">
-                <a16:creationId xmlns:a16="http://schemas.microsoft.com/office/drawing/2014/main" id="{8F87E245-8340-536C-8671-DE05B0B60362}"/>
+                <a16:creationId xmlns:a16="http://schemas.microsoft.com/office/drawing/2014/main" id="{B5A930C2-F5C4-E105-E816-B5F64E2FA08C}"/>
               </a:ext>
             </a:extLst>
           </p:cNvPr>
@@ -14991,7 +14465,7 @@
           <p:cNvPr id="40" name="그림 39">
             <a:extLst>
               <a:ext uri="{FF2B5EF4-FFF2-40B4-BE49-F238E27FC236}">
-                <a16:creationId xmlns:a16="http://schemas.microsoft.com/office/drawing/2014/main" id="{851E2F00-248C-AE0B-083F-2DF49A3BCF45}"/>
+                <a16:creationId xmlns:a16="http://schemas.microsoft.com/office/drawing/2014/main" id="{D40A8C20-4AA1-D4DB-50BF-EB0DC98C616A}"/>
               </a:ext>
             </a:extLst>
           </p:cNvPr>
@@ -15027,7 +14501,7 @@
           <p:cNvPr id="12" name="그림 11">
             <a:extLst>
               <a:ext uri="{FF2B5EF4-FFF2-40B4-BE49-F238E27FC236}">
-                <a16:creationId xmlns:a16="http://schemas.microsoft.com/office/drawing/2014/main" id="{E5AE9692-BC26-C7D1-D35F-D416D9715A52}"/>
+                <a16:creationId xmlns:a16="http://schemas.microsoft.com/office/drawing/2014/main" id="{D91078C0-AF83-2681-9C4E-08007ADC0FBB}"/>
               </a:ext>
             </a:extLst>
           </p:cNvPr>
@@ -15057,7 +14531,7 @@
           <p:cNvPr id="14" name="그림 13">
             <a:extLst>
               <a:ext uri="{FF2B5EF4-FFF2-40B4-BE49-F238E27FC236}">
-                <a16:creationId xmlns:a16="http://schemas.microsoft.com/office/drawing/2014/main" id="{E3A75129-9414-DA38-CE75-F1CDD3DE797F}"/>
+                <a16:creationId xmlns:a16="http://schemas.microsoft.com/office/drawing/2014/main" id="{84B82B29-9D6F-D246-764B-88D21BAE2965}"/>
               </a:ext>
             </a:extLst>
           </p:cNvPr>
@@ -15087,7 +14561,7 @@
           <p:cNvPr id="2" name="PHOTO_BOX">
             <a:extLst>
               <a:ext uri="{FF2B5EF4-FFF2-40B4-BE49-F238E27FC236}">
-                <a16:creationId xmlns:a16="http://schemas.microsoft.com/office/drawing/2014/main" id="{064F009E-F2B3-7091-32B4-DADDAE6D8F27}"/>
+                <a16:creationId xmlns:a16="http://schemas.microsoft.com/office/drawing/2014/main" id="{57C5AA6F-4023-CE87-1D65-58D5F5B6B6E5}"/>
               </a:ext>
             </a:extLst>
           </p:cNvPr>
@@ -15138,7 +14612,7 @@
     </p:spTree>
     <p:extLst>
       <p:ext uri="{BB962C8B-B14F-4D97-AF65-F5344CB8AC3E}">
-        <p14:creationId xmlns:p14="http://schemas.microsoft.com/office/powerpoint/2010/main" val="1138023877"/>
+        <p14:creationId xmlns:p14="http://schemas.microsoft.com/office/powerpoint/2010/main" val="2006151633"/>
       </p:ext>
     </p:extLst>
   </p:cSld>
@@ -15148,7 +14622,7 @@
 </p:sld>
 </file>
 
-<file path=ppt/slides/slide2.xml><?xml version="1.0" encoding="utf-8"?>
+<file path=ppt/slides/slide6.xml><?xml version="1.0" encoding="utf-8"?>
 <p:sld xmlns:a="http://schemas.openxmlformats.org/drawingml/2006/main" xmlns:r="http://schemas.openxmlformats.org/officeDocument/2006/relationships" xmlns:p="http://schemas.openxmlformats.org/presentationml/2006/main">
   <p:cSld>
     <p:spTree>
@@ -15156,7 +14630,7 @@
         <p:cNvPr id="1" name="">
           <a:extLst>
             <a:ext uri="{FF2B5EF4-FFF2-40B4-BE49-F238E27FC236}">
-              <a16:creationId xmlns:a16="http://schemas.microsoft.com/office/drawing/2014/main" id="{DFEFC2AE-3AA3-4D6E-23FD-1DB05BD4F4E6}"/>
+              <a16:creationId xmlns:a16="http://schemas.microsoft.com/office/drawing/2014/main" id="{92CFED3F-5C8A-9D95-09C4-2B6845B3F99F}"/>
             </a:ext>
           </a:extLst>
         </p:cNvPr>
@@ -15176,7 +14650,7 @@
           <p:cNvPr id="3" name="표 2">
             <a:extLst>
               <a:ext uri="{FF2B5EF4-FFF2-40B4-BE49-F238E27FC236}">
-                <a16:creationId xmlns:a16="http://schemas.microsoft.com/office/drawing/2014/main" id="{0D62D30E-1977-D3BE-6457-AF06D56FDBE0}"/>
+                <a16:creationId xmlns:a16="http://schemas.microsoft.com/office/drawing/2014/main" id="{7CE1ADB7-E0DD-5EE1-7A13-E0862F50BE28}"/>
               </a:ext>
             </a:extLst>
           </p:cNvPr>
@@ -15550,9 +15024,10 @@
                     <a:p>
                       <a:pPr algn="ctr"/>
                       <a:r>
-                        <a:rPr sz="1800"/>
-                        <a:t>전선거치 조치, 감전 및 화재위험</a:t>
+                        <a:rPr lang="en-US" sz="3500" dirty="0"/>
+                        <a:t>1</a:t>
                       </a:r>
+                      <a:endParaRPr sz="3500" dirty="0"/>
                     </a:p>
                   </a:txBody>
                   <a:tcPr marL="92882" marR="92882" marT="46441" marB="46441" anchor="ctr">
@@ -15620,9 +15095,10 @@
                     <a:p>
                       <a:pPr algn="ctr"/>
                       <a:r>
-                        <a:rPr sz="2000"/>
-                        <a:t>电线架空管理，防触电及火灾</a:t>
+                        <a:rPr lang="en-US" sz="3500" dirty="0"/>
+                        <a:t>2</a:t>
                       </a:r>
+                      <a:endParaRPr sz="3500" dirty="0"/>
                     </a:p>
                   </a:txBody>
                   <a:tcPr marL="92882" marR="92882" marT="46441" marB="46441" anchor="ctr">
@@ -15690,9 +15166,10 @@
                     <a:p>
                       <a:pPr algn="ctr"/>
                       <a:r>
-                        <a:rPr sz="1200"/>
-                        <a:t>Treo dây điện, nguy cơ điện giật và hỏa hoạn</a:t>
+                        <a:rPr lang="en-US" sz="3500" dirty="0"/>
+                        <a:t>3</a:t>
                       </a:r>
+                      <a:endParaRPr sz="3500" dirty="0"/>
                     </a:p>
                   </a:txBody>
                   <a:tcPr marL="92882" marR="92882" marT="46441" marB="46441" anchor="ctr">
@@ -15760,9 +15237,10 @@
                     <a:p>
                       <a:pPr algn="ctr"/>
                       <a:r>
-                        <a:rPr sz="1000"/>
-                        <a:t>ဝါယာကြိုးများချိတ်ဆွဲရန်၊ ဓာတ်လိုက်မှုနှင့် မီးဘေးအန္တရာယ်</a:t>
+                        <a:rPr lang="en-US" sz="3500" dirty="0"/>
+                        <a:t>4</a:t>
                       </a:r>
+                      <a:endParaRPr sz="3500" dirty="0"/>
                     </a:p>
                   </a:txBody>
                   <a:tcPr marL="88479" marR="88479" marT="44240" marB="44240" anchor="ctr">
@@ -15820,7 +15298,7 @@
           <p:cNvPr id="36" name="그림 35">
             <a:extLst>
               <a:ext uri="{FF2B5EF4-FFF2-40B4-BE49-F238E27FC236}">
-                <a16:creationId xmlns:a16="http://schemas.microsoft.com/office/drawing/2014/main" id="{9B09A87F-13D9-C690-7DCE-1F11E3B83623}"/>
+                <a16:creationId xmlns:a16="http://schemas.microsoft.com/office/drawing/2014/main" id="{A8C5DB49-D7CD-6A75-D605-6BBC6EE637F3}"/>
               </a:ext>
             </a:extLst>
           </p:cNvPr>
@@ -15856,7 +15334,7 @@
           <p:cNvPr id="40" name="그림 39">
             <a:extLst>
               <a:ext uri="{FF2B5EF4-FFF2-40B4-BE49-F238E27FC236}">
-                <a16:creationId xmlns:a16="http://schemas.microsoft.com/office/drawing/2014/main" id="{EE0F1A88-6F26-B216-DE8F-5B06A0F85C55}"/>
+                <a16:creationId xmlns:a16="http://schemas.microsoft.com/office/drawing/2014/main" id="{A833BB92-54BA-56DC-142F-62AD861B6942}"/>
               </a:ext>
             </a:extLst>
           </p:cNvPr>
@@ -15892,7 +15370,7 @@
           <p:cNvPr id="12" name="그림 11">
             <a:extLst>
               <a:ext uri="{FF2B5EF4-FFF2-40B4-BE49-F238E27FC236}">
-                <a16:creationId xmlns:a16="http://schemas.microsoft.com/office/drawing/2014/main" id="{0484DFC2-3DAE-03FA-F185-5E6BC4262AD4}"/>
+                <a16:creationId xmlns:a16="http://schemas.microsoft.com/office/drawing/2014/main" id="{DDE4DC4B-2BC2-EC15-EF95-CD7184D0A8FE}"/>
               </a:ext>
             </a:extLst>
           </p:cNvPr>
@@ -15922,7 +15400,7 @@
           <p:cNvPr id="14" name="그림 13">
             <a:extLst>
               <a:ext uri="{FF2B5EF4-FFF2-40B4-BE49-F238E27FC236}">
-                <a16:creationId xmlns:a16="http://schemas.microsoft.com/office/drawing/2014/main" id="{B395A9A4-0361-6121-6BC3-602270BCFE5C}"/>
+                <a16:creationId xmlns:a16="http://schemas.microsoft.com/office/drawing/2014/main" id="{3C35ADF6-CE87-396F-B40A-9F5A3C95142E}"/>
               </a:ext>
             </a:extLst>
           </p:cNvPr>
@@ -15952,7 +15430,7 @@
           <p:cNvPr id="2" name="PHOTO_BOX">
             <a:extLst>
               <a:ext uri="{FF2B5EF4-FFF2-40B4-BE49-F238E27FC236}">
-                <a16:creationId xmlns:a16="http://schemas.microsoft.com/office/drawing/2014/main" id="{2E4D5016-A59C-2B0B-0EB1-98376CC39C7D}"/>
+                <a16:creationId xmlns:a16="http://schemas.microsoft.com/office/drawing/2014/main" id="{1AC086CF-BB02-414D-07B8-0FEBDC7C8BD6}"/>
               </a:ext>
             </a:extLst>
           </p:cNvPr>
@@ -16003,7 +15481,7 @@
     </p:spTree>
     <p:extLst>
       <p:ext uri="{BB962C8B-B14F-4D97-AF65-F5344CB8AC3E}">
-        <p14:creationId xmlns:p14="http://schemas.microsoft.com/office/powerpoint/2010/main" val="1318132969"/>
+        <p14:creationId xmlns:p14="http://schemas.microsoft.com/office/powerpoint/2010/main" val="788356424"/>
       </p:ext>
     </p:extLst>
   </p:cSld>
@@ -16013,7 +15491,7 @@
 </p:sld>
 </file>
 
-<file path=ppt/slides/slide20.xml><?xml version="1.0" encoding="utf-8"?>
+<file path=ppt/slides/slide7.xml><?xml version="1.0" encoding="utf-8"?>
 <p:sld xmlns:a="http://schemas.openxmlformats.org/drawingml/2006/main" xmlns:r="http://schemas.openxmlformats.org/officeDocument/2006/relationships" xmlns:p="http://schemas.openxmlformats.org/presentationml/2006/main">
   <p:cSld>
     <p:spTree>
@@ -16021,7 +15499,7 @@
         <p:cNvPr id="1" name="">
           <a:extLst>
             <a:ext uri="{FF2B5EF4-FFF2-40B4-BE49-F238E27FC236}">
-              <a16:creationId xmlns:a16="http://schemas.microsoft.com/office/drawing/2014/main" id="{57A3EE30-970D-9E00-0A8C-FC1AAC9B9E04}"/>
+              <a16:creationId xmlns:a16="http://schemas.microsoft.com/office/drawing/2014/main" id="{DE3C2779-0EBB-7E33-9593-AE28072B8C49}"/>
             </a:ext>
           </a:extLst>
         </p:cNvPr>
@@ -16041,7 +15519,7 @@
           <p:cNvPr id="3" name="표 2">
             <a:extLst>
               <a:ext uri="{FF2B5EF4-FFF2-40B4-BE49-F238E27FC236}">
-                <a16:creationId xmlns:a16="http://schemas.microsoft.com/office/drawing/2014/main" id="{FE72056E-9070-0399-9255-E9333AA1E66D}"/>
+                <a16:creationId xmlns:a16="http://schemas.microsoft.com/office/drawing/2014/main" id="{D35FAED4-D7F1-B30C-0C2E-5C0356A831DD}"/>
               </a:ext>
             </a:extLst>
           </p:cNvPr>
@@ -16415,9 +15893,10 @@
                     <a:p>
                       <a:pPr algn="ctr"/>
                       <a:r>
-                        <a:rPr sz="1800"/>
-                        <a:t>전선거치 조치, 감전 및 화재위험</a:t>
+                        <a:rPr lang="en-US" sz="3500" dirty="0"/>
+                        <a:t>1</a:t>
                       </a:r>
+                      <a:endParaRPr sz="3500" dirty="0"/>
                     </a:p>
                   </a:txBody>
                   <a:tcPr marL="92882" marR="92882" marT="46441" marB="46441" anchor="ctr">
@@ -16485,9 +15964,10 @@
                     <a:p>
                       <a:pPr algn="ctr"/>
                       <a:r>
-                        <a:rPr sz="2000"/>
-                        <a:t>电线架空管理，防触电及火灾</a:t>
+                        <a:rPr lang="en-US" sz="3500" dirty="0"/>
+                        <a:t>2</a:t>
                       </a:r>
+                      <a:endParaRPr sz="3500" dirty="0"/>
                     </a:p>
                   </a:txBody>
                   <a:tcPr marL="92882" marR="92882" marT="46441" marB="46441" anchor="ctr">
@@ -16555,9 +16035,10 @@
                     <a:p>
                       <a:pPr algn="ctr"/>
                       <a:r>
-                        <a:rPr sz="1200"/>
-                        <a:t>Treo dây điện, nguy cơ điện giật và hỏa hoạn</a:t>
+                        <a:rPr lang="en-US" sz="3500" dirty="0"/>
+                        <a:t>3</a:t>
                       </a:r>
+                      <a:endParaRPr sz="3500" dirty="0"/>
                     </a:p>
                   </a:txBody>
                   <a:tcPr marL="92882" marR="92882" marT="46441" marB="46441" anchor="ctr">
@@ -16625,9 +16106,10 @@
                     <a:p>
                       <a:pPr algn="ctr"/>
                       <a:r>
-                        <a:rPr sz="1000"/>
-                        <a:t>ဝါယာကြိုးများချိတ်ဆွဲရန်၊ ဓာတ်လိုက်မှုနှင့် မီးဘေးအန္တရာယ်</a:t>
+                        <a:rPr lang="en-US" sz="3500" dirty="0"/>
+                        <a:t>4</a:t>
                       </a:r>
+                      <a:endParaRPr sz="3500" dirty="0"/>
                     </a:p>
                   </a:txBody>
                   <a:tcPr marL="88479" marR="88479" marT="44240" marB="44240" anchor="ctr">
@@ -16685,7 +16167,7 @@
           <p:cNvPr id="36" name="그림 35">
             <a:extLst>
               <a:ext uri="{FF2B5EF4-FFF2-40B4-BE49-F238E27FC236}">
-                <a16:creationId xmlns:a16="http://schemas.microsoft.com/office/drawing/2014/main" id="{AFF86478-ECFB-8832-30DE-3C13AE8B900A}"/>
+                <a16:creationId xmlns:a16="http://schemas.microsoft.com/office/drawing/2014/main" id="{F2B60A4C-9343-E5E1-DC0E-7F29069CA04D}"/>
               </a:ext>
             </a:extLst>
           </p:cNvPr>
@@ -16721,7 +16203,7 @@
           <p:cNvPr id="40" name="그림 39">
             <a:extLst>
               <a:ext uri="{FF2B5EF4-FFF2-40B4-BE49-F238E27FC236}">
-                <a16:creationId xmlns:a16="http://schemas.microsoft.com/office/drawing/2014/main" id="{5D1006BF-7B7A-4319-228C-BF34DDAFF2A3}"/>
+                <a16:creationId xmlns:a16="http://schemas.microsoft.com/office/drawing/2014/main" id="{44E371B4-F2DA-B29F-2A0D-809A63062B74}"/>
               </a:ext>
             </a:extLst>
           </p:cNvPr>
@@ -16757,7 +16239,7 @@
           <p:cNvPr id="12" name="그림 11">
             <a:extLst>
               <a:ext uri="{FF2B5EF4-FFF2-40B4-BE49-F238E27FC236}">
-                <a16:creationId xmlns:a16="http://schemas.microsoft.com/office/drawing/2014/main" id="{465AD219-5D5E-9BD7-B5CF-96A640E81802}"/>
+                <a16:creationId xmlns:a16="http://schemas.microsoft.com/office/drawing/2014/main" id="{77B737BB-C592-9C91-37F8-E8BB85799DF5}"/>
               </a:ext>
             </a:extLst>
           </p:cNvPr>
@@ -16787,7 +16269,7 @@
           <p:cNvPr id="14" name="그림 13">
             <a:extLst>
               <a:ext uri="{FF2B5EF4-FFF2-40B4-BE49-F238E27FC236}">
-                <a16:creationId xmlns:a16="http://schemas.microsoft.com/office/drawing/2014/main" id="{689F2B69-78A2-A013-BA14-D1D441C82ABB}"/>
+                <a16:creationId xmlns:a16="http://schemas.microsoft.com/office/drawing/2014/main" id="{8B86691F-4C37-91DE-84EB-06B85F79D9BC}"/>
               </a:ext>
             </a:extLst>
           </p:cNvPr>
@@ -16817,7 +16299,7 @@
           <p:cNvPr id="2" name="PHOTO_BOX">
             <a:extLst>
               <a:ext uri="{FF2B5EF4-FFF2-40B4-BE49-F238E27FC236}">
-                <a16:creationId xmlns:a16="http://schemas.microsoft.com/office/drawing/2014/main" id="{57D69017-2936-A533-1759-E34C8BB72E6D}"/>
+                <a16:creationId xmlns:a16="http://schemas.microsoft.com/office/drawing/2014/main" id="{7EEA4C51-F3F6-85DA-1BA8-1342A83A2DBE}"/>
               </a:ext>
             </a:extLst>
           </p:cNvPr>
@@ -16868,7 +16350,7 @@
     </p:spTree>
     <p:extLst>
       <p:ext uri="{BB962C8B-B14F-4D97-AF65-F5344CB8AC3E}">
-        <p14:creationId xmlns:p14="http://schemas.microsoft.com/office/powerpoint/2010/main" val="12538181"/>
+        <p14:creationId xmlns:p14="http://schemas.microsoft.com/office/powerpoint/2010/main" val="198844709"/>
       </p:ext>
     </p:extLst>
   </p:cSld>
@@ -16878,7 +16360,7 @@
 </p:sld>
 </file>
 
-<file path=ppt/slides/slide3.xml><?xml version="1.0" encoding="utf-8"?>
+<file path=ppt/slides/slide8.xml><?xml version="1.0" encoding="utf-8"?>
 <p:sld xmlns:a="http://schemas.openxmlformats.org/drawingml/2006/main" xmlns:r="http://schemas.openxmlformats.org/officeDocument/2006/relationships" xmlns:p="http://schemas.openxmlformats.org/presentationml/2006/main">
   <p:cSld>
     <p:spTree>
@@ -16886,7 +16368,7 @@
         <p:cNvPr id="1" name="">
           <a:extLst>
             <a:ext uri="{FF2B5EF4-FFF2-40B4-BE49-F238E27FC236}">
-              <a16:creationId xmlns:a16="http://schemas.microsoft.com/office/drawing/2014/main" id="{0ABD990D-924E-CC08-70CE-E96848E1EC94}"/>
+              <a16:creationId xmlns:a16="http://schemas.microsoft.com/office/drawing/2014/main" id="{758AB4D9-99CF-EDA5-F80A-DF5545A8DCD2}"/>
             </a:ext>
           </a:extLst>
         </p:cNvPr>
@@ -16906,7 +16388,7 @@
           <p:cNvPr id="3" name="표 2">
             <a:extLst>
               <a:ext uri="{FF2B5EF4-FFF2-40B4-BE49-F238E27FC236}">
-                <a16:creationId xmlns:a16="http://schemas.microsoft.com/office/drawing/2014/main" id="{4401E4D4-84C8-A4A4-27EA-ED3317DC2C1E}"/>
+                <a16:creationId xmlns:a16="http://schemas.microsoft.com/office/drawing/2014/main" id="{BE6CC87E-EDCE-BDD7-1E49-1E9036FE13C1}"/>
               </a:ext>
             </a:extLst>
           </p:cNvPr>
@@ -17280,9 +16762,10 @@
                     <a:p>
                       <a:pPr algn="ctr"/>
                       <a:r>
-                        <a:rPr sz="1800"/>
-                        <a:t>전선거치 조치, 감전 및 화재위험</a:t>
+                        <a:rPr lang="en-US" sz="3500" dirty="0"/>
+                        <a:t>1</a:t>
                       </a:r>
+                      <a:endParaRPr sz="3500" dirty="0"/>
                     </a:p>
                   </a:txBody>
                   <a:tcPr marL="92882" marR="92882" marT="46441" marB="46441" anchor="ctr">
@@ -17350,9 +16833,10 @@
                     <a:p>
                       <a:pPr algn="ctr"/>
                       <a:r>
-                        <a:rPr sz="2000"/>
-                        <a:t>电线架空管理，防触电及火灾</a:t>
+                        <a:rPr lang="en-US" sz="3500" dirty="0"/>
+                        <a:t>2</a:t>
                       </a:r>
+                      <a:endParaRPr sz="3500" dirty="0"/>
                     </a:p>
                   </a:txBody>
                   <a:tcPr marL="92882" marR="92882" marT="46441" marB="46441" anchor="ctr">
@@ -17420,9 +16904,10 @@
                     <a:p>
                       <a:pPr algn="ctr"/>
                       <a:r>
-                        <a:rPr sz="1200"/>
-                        <a:t>Treo dây điện, nguy cơ điện giật và hỏa hoạn</a:t>
+                        <a:rPr lang="en-US" sz="3500" dirty="0"/>
+                        <a:t>3</a:t>
                       </a:r>
+                      <a:endParaRPr sz="3500" dirty="0"/>
                     </a:p>
                   </a:txBody>
                   <a:tcPr marL="92882" marR="92882" marT="46441" marB="46441" anchor="ctr">
@@ -17490,9 +16975,10 @@
                     <a:p>
                       <a:pPr algn="ctr"/>
                       <a:r>
-                        <a:rPr sz="1000"/>
-                        <a:t>ဝါယာကြိုးများချိတ်ဆွဲရန်၊ ဓာတ်လိုက်မှုနှင့် မီးဘေးအန္တရာယ်</a:t>
+                        <a:rPr lang="en-US" sz="3500" dirty="0"/>
+                        <a:t>4</a:t>
                       </a:r>
+                      <a:endParaRPr sz="3500" dirty="0"/>
                     </a:p>
                   </a:txBody>
                   <a:tcPr marL="88479" marR="88479" marT="44240" marB="44240" anchor="ctr">
@@ -17550,7 +17036,7 @@
           <p:cNvPr id="36" name="그림 35">
             <a:extLst>
               <a:ext uri="{FF2B5EF4-FFF2-40B4-BE49-F238E27FC236}">
-                <a16:creationId xmlns:a16="http://schemas.microsoft.com/office/drawing/2014/main" id="{C6CBFEE4-105E-622B-29DB-E19136C62F90}"/>
+                <a16:creationId xmlns:a16="http://schemas.microsoft.com/office/drawing/2014/main" id="{52546BFE-BFCD-70A0-5C54-7A0A627D1795}"/>
               </a:ext>
             </a:extLst>
           </p:cNvPr>
@@ -17586,7 +17072,7 @@
           <p:cNvPr id="40" name="그림 39">
             <a:extLst>
               <a:ext uri="{FF2B5EF4-FFF2-40B4-BE49-F238E27FC236}">
-                <a16:creationId xmlns:a16="http://schemas.microsoft.com/office/drawing/2014/main" id="{769D149A-3586-73B3-4D46-9F43D482A2BB}"/>
+                <a16:creationId xmlns:a16="http://schemas.microsoft.com/office/drawing/2014/main" id="{860EB61D-338B-4E31-B211-85D768B49A1B}"/>
               </a:ext>
             </a:extLst>
           </p:cNvPr>
@@ -17622,7 +17108,7 @@
           <p:cNvPr id="12" name="그림 11">
             <a:extLst>
               <a:ext uri="{FF2B5EF4-FFF2-40B4-BE49-F238E27FC236}">
-                <a16:creationId xmlns:a16="http://schemas.microsoft.com/office/drawing/2014/main" id="{6C1DE936-21F4-67E4-2B20-B5E44A361B32}"/>
+                <a16:creationId xmlns:a16="http://schemas.microsoft.com/office/drawing/2014/main" id="{6A3640C1-ABD4-7BBB-3622-061B22424A1B}"/>
               </a:ext>
             </a:extLst>
           </p:cNvPr>
@@ -17652,7 +17138,7 @@
           <p:cNvPr id="14" name="그림 13">
             <a:extLst>
               <a:ext uri="{FF2B5EF4-FFF2-40B4-BE49-F238E27FC236}">
-                <a16:creationId xmlns:a16="http://schemas.microsoft.com/office/drawing/2014/main" id="{872BF08C-E24F-B806-D8A0-DCC185D287BC}"/>
+                <a16:creationId xmlns:a16="http://schemas.microsoft.com/office/drawing/2014/main" id="{A3A36CA7-EC6B-B31A-5CFF-6798EAB84DB8}"/>
               </a:ext>
             </a:extLst>
           </p:cNvPr>
@@ -17682,7 +17168,7 @@
           <p:cNvPr id="2" name="PHOTO_BOX">
             <a:extLst>
               <a:ext uri="{FF2B5EF4-FFF2-40B4-BE49-F238E27FC236}">
-                <a16:creationId xmlns:a16="http://schemas.microsoft.com/office/drawing/2014/main" id="{C43B2B40-9346-427E-98F2-D53928218A71}"/>
+                <a16:creationId xmlns:a16="http://schemas.microsoft.com/office/drawing/2014/main" id="{1DF3FD6C-A5E2-0A2D-5AA2-0A6D156DACC0}"/>
               </a:ext>
             </a:extLst>
           </p:cNvPr>
@@ -17733,7 +17219,7 @@
     </p:spTree>
     <p:extLst>
       <p:ext uri="{BB962C8B-B14F-4D97-AF65-F5344CB8AC3E}">
-        <p14:creationId xmlns:p14="http://schemas.microsoft.com/office/powerpoint/2010/main" val="4054754208"/>
+        <p14:creationId xmlns:p14="http://schemas.microsoft.com/office/powerpoint/2010/main" val="1360409313"/>
       </p:ext>
     </p:extLst>
   </p:cSld>
@@ -17743,7 +17229,7 @@
 </p:sld>
 </file>
 
-<file path=ppt/slides/slide4.xml><?xml version="1.0" encoding="utf-8"?>
+<file path=ppt/slides/slide9.xml><?xml version="1.0" encoding="utf-8"?>
 <p:sld xmlns:a="http://schemas.openxmlformats.org/drawingml/2006/main" xmlns:r="http://schemas.openxmlformats.org/officeDocument/2006/relationships" xmlns:p="http://schemas.openxmlformats.org/presentationml/2006/main">
   <p:cSld>
     <p:spTree>
@@ -17751,7 +17237,7 @@
         <p:cNvPr id="1" name="">
           <a:extLst>
             <a:ext uri="{FF2B5EF4-FFF2-40B4-BE49-F238E27FC236}">
-              <a16:creationId xmlns:a16="http://schemas.microsoft.com/office/drawing/2014/main" id="{BFBCAAF9-F2D0-186F-B9F9-3F3A44E3F2B5}"/>
+              <a16:creationId xmlns:a16="http://schemas.microsoft.com/office/drawing/2014/main" id="{CE137DB9-84EC-BE1C-8238-7BD788862FEC}"/>
             </a:ext>
           </a:extLst>
         </p:cNvPr>
@@ -17771,7 +17257,7 @@
           <p:cNvPr id="3" name="표 2">
             <a:extLst>
               <a:ext uri="{FF2B5EF4-FFF2-40B4-BE49-F238E27FC236}">
-                <a16:creationId xmlns:a16="http://schemas.microsoft.com/office/drawing/2014/main" id="{00AF012B-7799-FD4A-26D6-8A357EB05D0F}"/>
+                <a16:creationId xmlns:a16="http://schemas.microsoft.com/office/drawing/2014/main" id="{DC61EFDC-760E-82EA-B40A-26B5989E5668}"/>
               </a:ext>
             </a:extLst>
           </p:cNvPr>
@@ -18145,9 +17631,10 @@
                     <a:p>
                       <a:pPr algn="ctr"/>
                       <a:r>
-                        <a:rPr sz="1800"/>
-                        <a:t>전선거치 조치, 감전 및 화재위험</a:t>
+                        <a:rPr lang="en-US" sz="3500" dirty="0"/>
+                        <a:t>1</a:t>
                       </a:r>
+                      <a:endParaRPr sz="3500" dirty="0"/>
                     </a:p>
                   </a:txBody>
                   <a:tcPr marL="92882" marR="92882" marT="46441" marB="46441" anchor="ctr">
@@ -18215,9 +17702,10 @@
                     <a:p>
                       <a:pPr algn="ctr"/>
                       <a:r>
-                        <a:rPr sz="2000"/>
-                        <a:t>电线架空管理，防触电及火灾</a:t>
+                        <a:rPr lang="en-US" sz="3500" dirty="0"/>
+                        <a:t>2</a:t>
                       </a:r>
+                      <a:endParaRPr sz="3500" dirty="0"/>
                     </a:p>
                   </a:txBody>
                   <a:tcPr marL="92882" marR="92882" marT="46441" marB="46441" anchor="ctr">
@@ -18285,9 +17773,10 @@
                     <a:p>
                       <a:pPr algn="ctr"/>
                       <a:r>
-                        <a:rPr sz="1200"/>
-                        <a:t>Treo dây điện, nguy cơ điện giật và hỏa hoạn</a:t>
+                        <a:rPr lang="en-US" sz="3500" dirty="0"/>
+                        <a:t>3</a:t>
                       </a:r>
+                      <a:endParaRPr sz="3500" dirty="0"/>
                     </a:p>
                   </a:txBody>
                   <a:tcPr marL="92882" marR="92882" marT="46441" marB="46441" anchor="ctr">
@@ -18355,9 +17844,10 @@
                     <a:p>
                       <a:pPr algn="ctr"/>
                       <a:r>
-                        <a:rPr sz="1000"/>
-                        <a:t>ဝါယာကြိုးများချိတ်ဆွဲရန်၊ ဓာတ်လိုက်မှုနှင့် မီးဘေးအန္တရာယ်</a:t>
+                        <a:rPr lang="en-US" sz="3500" dirty="0"/>
+                        <a:t>4</a:t>
                       </a:r>
+                      <a:endParaRPr sz="3500" dirty="0"/>
                     </a:p>
                   </a:txBody>
                   <a:tcPr marL="88479" marR="88479" marT="44240" marB="44240" anchor="ctr">
@@ -18415,7 +17905,7 @@
           <p:cNvPr id="36" name="그림 35">
             <a:extLst>
               <a:ext uri="{FF2B5EF4-FFF2-40B4-BE49-F238E27FC236}">
-                <a16:creationId xmlns:a16="http://schemas.microsoft.com/office/drawing/2014/main" id="{50F81710-E751-8302-3956-1BC62F570DA8}"/>
+                <a16:creationId xmlns:a16="http://schemas.microsoft.com/office/drawing/2014/main" id="{C7462AEC-FA54-ADA4-C08A-BC3510FB2A06}"/>
               </a:ext>
             </a:extLst>
           </p:cNvPr>
@@ -18451,7 +17941,7 @@
           <p:cNvPr id="40" name="그림 39">
             <a:extLst>
               <a:ext uri="{FF2B5EF4-FFF2-40B4-BE49-F238E27FC236}">
-                <a16:creationId xmlns:a16="http://schemas.microsoft.com/office/drawing/2014/main" id="{81CB9B20-19A9-0CEA-4DF0-83F56746A6E6}"/>
+                <a16:creationId xmlns:a16="http://schemas.microsoft.com/office/drawing/2014/main" id="{33C2BD59-FAA2-6CE0-B5BE-57EC95495D22}"/>
               </a:ext>
             </a:extLst>
           </p:cNvPr>
@@ -18487,7 +17977,7 @@
           <p:cNvPr id="12" name="그림 11">
             <a:extLst>
               <a:ext uri="{FF2B5EF4-FFF2-40B4-BE49-F238E27FC236}">
-                <a16:creationId xmlns:a16="http://schemas.microsoft.com/office/drawing/2014/main" id="{46E60444-16CC-2DD2-D27A-65EBDCB8A92B}"/>
+                <a16:creationId xmlns:a16="http://schemas.microsoft.com/office/drawing/2014/main" id="{284B4D30-BA0D-3A33-69BF-16EE59BF1D83}"/>
               </a:ext>
             </a:extLst>
           </p:cNvPr>
@@ -18517,7 +18007,7 @@
           <p:cNvPr id="14" name="그림 13">
             <a:extLst>
               <a:ext uri="{FF2B5EF4-FFF2-40B4-BE49-F238E27FC236}">
-                <a16:creationId xmlns:a16="http://schemas.microsoft.com/office/drawing/2014/main" id="{328AE450-D7B1-D0CF-2348-00793FE61D20}"/>
+                <a16:creationId xmlns:a16="http://schemas.microsoft.com/office/drawing/2014/main" id="{242E22AF-39B0-6EF6-D736-1F316F1C0D04}"/>
               </a:ext>
             </a:extLst>
           </p:cNvPr>
@@ -18547,7 +18037,7 @@
           <p:cNvPr id="2" name="PHOTO_BOX">
             <a:extLst>
               <a:ext uri="{FF2B5EF4-FFF2-40B4-BE49-F238E27FC236}">
-                <a16:creationId xmlns:a16="http://schemas.microsoft.com/office/drawing/2014/main" id="{AB97577E-B3D3-F4F4-6CF6-3D314D7C7A44}"/>
+                <a16:creationId xmlns:a16="http://schemas.microsoft.com/office/drawing/2014/main" id="{0A3645C6-8028-BB51-6A17-01E0ED0D6F86}"/>
               </a:ext>
             </a:extLst>
           </p:cNvPr>
@@ -18598,4332 +18088,7 @@
     </p:spTree>
     <p:extLst>
       <p:ext uri="{BB962C8B-B14F-4D97-AF65-F5344CB8AC3E}">
-        <p14:creationId xmlns:p14="http://schemas.microsoft.com/office/powerpoint/2010/main" val="2114431498"/>
-      </p:ext>
-    </p:extLst>
-  </p:cSld>
-  <p:clrMapOvr>
-    <a:masterClrMapping/>
-  </p:clrMapOvr>
-</p:sld>
-</file>
-
-<file path=ppt/slides/slide5.xml><?xml version="1.0" encoding="utf-8"?>
-<p:sld xmlns:a="http://schemas.openxmlformats.org/drawingml/2006/main" xmlns:r="http://schemas.openxmlformats.org/officeDocument/2006/relationships" xmlns:p="http://schemas.openxmlformats.org/presentationml/2006/main">
-  <p:cSld>
-    <p:spTree>
-      <p:nvGrpSpPr>
-        <p:cNvPr id="1" name="">
-          <a:extLst>
-            <a:ext uri="{FF2B5EF4-FFF2-40B4-BE49-F238E27FC236}">
-              <a16:creationId xmlns:a16="http://schemas.microsoft.com/office/drawing/2014/main" id="{04079265-7A6C-B1B4-CD93-D39FFA2B9FE8}"/>
-            </a:ext>
-          </a:extLst>
-        </p:cNvPr>
-        <p:cNvGrpSpPr/>
-        <p:nvPr/>
-      </p:nvGrpSpPr>
-      <p:grpSpPr>
-        <a:xfrm>
-          <a:off x="0" y="0"/>
-          <a:ext cx="0" cy="0"/>
-          <a:chOff x="0" y="0"/>
-          <a:chExt cx="0" cy="0"/>
-        </a:xfrm>
-      </p:grpSpPr>
-      <p:graphicFrame>
-        <p:nvGraphicFramePr>
-          <p:cNvPr id="3" name="표 2">
-            <a:extLst>
-              <a:ext uri="{FF2B5EF4-FFF2-40B4-BE49-F238E27FC236}">
-                <a16:creationId xmlns:a16="http://schemas.microsoft.com/office/drawing/2014/main" id="{ADE89EB8-1123-7A87-B5D9-E43DC5C313B0}"/>
-              </a:ext>
-            </a:extLst>
-          </p:cNvPr>
-          <p:cNvGraphicFramePr>
-            <a:graphicFrameLocks noGrp="1"/>
-          </p:cNvGraphicFramePr>
-          <p:nvPr/>
-        </p:nvGraphicFramePr>
-        <p:xfrm>
-          <a:off x="0" y="-63316"/>
-          <a:ext cx="11114069" cy="6812712"/>
-        </p:xfrm>
-        <a:graphic>
-          <a:graphicData uri="http://schemas.openxmlformats.org/drawingml/2006/table">
-            <a:tbl>
-              <a:tblPr firstRow="1" bandRow="1">
-                <a:tableStyleId>{5C22544A-7EE6-4342-B048-85BDC9FD1C3A}</a:tableStyleId>
-              </a:tblPr>
-              <a:tblGrid>
-                <a:gridCol w="6538945">
-                  <a:extLst>
-                    <a:ext uri="{9D8B030D-6E8A-4147-A177-3AD203B41FA5}">
-                      <a16:colId xmlns:a16="http://schemas.microsoft.com/office/drawing/2014/main" val="1432983574"/>
-                    </a:ext>
-                  </a:extLst>
-                </a:gridCol>
-                <a:gridCol w="4575124">
-                  <a:extLst>
-                    <a:ext uri="{9D8B030D-6E8A-4147-A177-3AD203B41FA5}">
-                      <a16:colId xmlns:a16="http://schemas.microsoft.com/office/drawing/2014/main" val="3008074637"/>
-                    </a:ext>
-                  </a:extLst>
-                </a:gridCol>
-              </a:tblGrid>
-              <a:tr h="641556">
-                <a:tc gridSpan="2">
-                  <a:txBody>
-                    <a:bodyPr/>
-                    <a:lstStyle/>
-                    <a:p>
-                      <a:pPr marL="0" marR="0" lvl="0" indent="0" algn="ctr" defTabSz="914400" rtl="0" eaLnBrk="1" fontAlgn="auto" latinLnBrk="1" hangingPunct="1">
-                        <a:lnSpc>
-                          <a:spcPct val="100000"/>
-                        </a:lnSpc>
-                        <a:spcBef>
-                          <a:spcPts val="0"/>
-                        </a:spcBef>
-                        <a:spcAft>
-                          <a:spcPts val="0"/>
-                        </a:spcAft>
-                        <a:buClrTx/>
-                        <a:buSzTx/>
-                        <a:buFontTx/>
-                        <a:buNone/>
-                        <a:tabLst/>
-                        <a:defRPr/>
-                      </a:pPr>
-                      <a:r>
-                        <a:rPr lang="ko-KR" altLang="en-US" sz="3700" b="1" kern="1200">
-                          <a:solidFill>
-                            <a:schemeClr val="bg1"/>
-                          </a:solidFill>
-                          <a:latin typeface="현대하모니 L"/>
-                          <a:ea typeface="현대하모니 L" panose="02020603020101020101" pitchFamily="18" charset="-127"/>
-                          <a:cs typeface="+mn-cs"/>
-                        </a:rPr>
-                        <a:t>사진대지</a:t>
-                      </a:r>
-                    </a:p>
-                  </a:txBody>
-                  <a:tcPr marL="92882" marR="92882" marT="46441" marB="46441" anchor="ctr">
-                    <a:lnL w="12700" cap="flat" cmpd="sng" algn="ctr">
-                      <a:solidFill>
-                        <a:schemeClr val="tx1"/>
-                      </a:solidFill>
-                      <a:prstDash val="solid"/>
-                      <a:round/>
-                      <a:headEnd type="none" w="med" len="med"/>
-                      <a:tailEnd type="none" w="med" len="med"/>
-                    </a:lnL>
-                    <a:lnR w="12700" cap="flat" cmpd="sng" algn="ctr">
-                      <a:solidFill>
-                        <a:schemeClr val="tx1"/>
-                      </a:solidFill>
-                      <a:prstDash val="solid"/>
-                      <a:round/>
-                      <a:headEnd type="none" w="med" len="med"/>
-                      <a:tailEnd type="none" w="med" len="med"/>
-                    </a:lnR>
-                    <a:lnT w="12700" cap="flat" cmpd="sng" algn="ctr">
-                      <a:solidFill>
-                        <a:schemeClr val="tx1"/>
-                      </a:solidFill>
-                      <a:prstDash val="solid"/>
-                      <a:round/>
-                      <a:headEnd type="none" w="med" len="med"/>
-                      <a:tailEnd type="none" w="med" len="med"/>
-                    </a:lnT>
-                    <a:lnB w="12700" cap="flat" cmpd="sng" algn="ctr">
-                      <a:solidFill>
-                        <a:schemeClr val="tx1"/>
-                      </a:solidFill>
-                      <a:prstDash val="solid"/>
-                      <a:round/>
-                      <a:headEnd type="none" w="med" len="med"/>
-                      <a:tailEnd type="none" w="med" len="med"/>
-                    </a:lnB>
-                    <a:solidFill>
-                      <a:srgbClr val="002060"/>
-                    </a:solidFill>
-                  </a:tcPr>
-                </a:tc>
-                <a:tc hMerge="1">
-                  <a:txBody>
-                    <a:bodyPr/>
-                    <a:lstStyle/>
-                    <a:p>
-                      <a:pPr latinLnBrk="1"/>
-                      <a:endParaRPr lang="ko-KR" altLang="en-US"/>
-                    </a:p>
-                  </a:txBody>
-                  <a:tcPr>
-                    <a:lnL w="12700" cap="flat" cmpd="sng" algn="ctr">
-                      <a:solidFill>
-                        <a:schemeClr val="tx1"/>
-                      </a:solidFill>
-                      <a:prstDash val="solid"/>
-                      <a:round/>
-                      <a:headEnd type="none" w="med" len="med"/>
-                      <a:tailEnd type="none" w="med" len="med"/>
-                    </a:lnL>
-                    <a:lnR w="12700" cap="flat" cmpd="sng" algn="ctr">
-                      <a:solidFill>
-                        <a:schemeClr val="tx1"/>
-                      </a:solidFill>
-                      <a:prstDash val="solid"/>
-                      <a:round/>
-                      <a:headEnd type="none" w="med" len="med"/>
-                      <a:tailEnd type="none" w="med" len="med"/>
-                    </a:lnR>
-                    <a:lnT w="12700" cap="flat" cmpd="sng" algn="ctr">
-                      <a:solidFill>
-                        <a:schemeClr val="tx1"/>
-                      </a:solidFill>
-                      <a:prstDash val="solid"/>
-                      <a:round/>
-                      <a:headEnd type="none" w="med" len="med"/>
-                      <a:tailEnd type="none" w="med" len="med"/>
-                    </a:lnT>
-                    <a:lnB w="12700" cap="flat" cmpd="sng" algn="ctr">
-                      <a:solidFill>
-                        <a:schemeClr val="tx1"/>
-                      </a:solidFill>
-                      <a:prstDash val="solid"/>
-                      <a:round/>
-                      <a:headEnd type="none" w="med" len="med"/>
-                      <a:tailEnd type="none" w="med" len="med"/>
-                    </a:lnB>
-                  </a:tcPr>
-                </a:tc>
-                <a:extLst>
-                  <a:ext uri="{0D108BD9-81ED-4DB2-BD59-A6C34878D82A}">
-                    <a16:rowId xmlns:a16="http://schemas.microsoft.com/office/drawing/2014/main" val="3795485425"/>
-                  </a:ext>
-                </a:extLst>
-              </a:tr>
-              <a:tr h="582007">
-                <a:tc rowSpan="5">
-                  <a:txBody>
-                    <a:bodyPr/>
-                    <a:lstStyle/>
-                    <a:p>
-                      <a:pPr latinLnBrk="1"/>
-                      <a:endParaRPr lang="ko-KR" altLang="en-US" sz="2400" dirty="0"/>
-                    </a:p>
-                  </a:txBody>
-                  <a:tcPr marL="92882" marR="92882" marT="46441" marB="46441">
-                    <a:lnL w="12700" cap="flat" cmpd="sng" algn="ctr">
-                      <a:solidFill>
-                        <a:schemeClr val="tx1"/>
-                      </a:solidFill>
-                      <a:prstDash val="solid"/>
-                      <a:round/>
-                      <a:headEnd type="none" w="med" len="med"/>
-                      <a:tailEnd type="none" w="med" len="med"/>
-                    </a:lnL>
-                    <a:lnR w="12700" cap="flat" cmpd="sng" algn="ctr">
-                      <a:solidFill>
-                        <a:schemeClr val="tx1"/>
-                      </a:solidFill>
-                      <a:prstDash val="solid"/>
-                      <a:round/>
-                      <a:headEnd type="none" w="med" len="med"/>
-                      <a:tailEnd type="none" w="med" len="med"/>
-                    </a:lnR>
-                    <a:lnT w="12700" cap="flat" cmpd="sng" algn="ctr">
-                      <a:solidFill>
-                        <a:schemeClr val="tx1"/>
-                      </a:solidFill>
-                      <a:prstDash val="solid"/>
-                      <a:round/>
-                      <a:headEnd type="none" w="med" len="med"/>
-                      <a:tailEnd type="none" w="med" len="med"/>
-                    </a:lnT>
-                    <a:lnB w="12700" cap="flat" cmpd="sng" algn="ctr">
-                      <a:solidFill>
-                        <a:schemeClr val="tx1"/>
-                      </a:solidFill>
-                      <a:prstDash val="solid"/>
-                      <a:round/>
-                      <a:headEnd type="none" w="med" len="med"/>
-                      <a:tailEnd type="none" w="med" len="med"/>
-                    </a:lnB>
-                    <a:noFill/>
-                  </a:tcPr>
-                </a:tc>
-                <a:tc>
-                  <a:txBody>
-                    <a:bodyPr/>
-                    <a:lstStyle/>
-                    <a:p>
-                      <a:pPr marL="0" marR="0" lvl="0" indent="0" algn="ctr" defTabSz="914400" rtl="0" eaLnBrk="1" fontAlgn="auto" latinLnBrk="1" hangingPunct="1">
-                        <a:lnSpc>
-                          <a:spcPct val="100000"/>
-                        </a:lnSpc>
-                        <a:spcBef>
-                          <a:spcPts val="0"/>
-                        </a:spcBef>
-                        <a:spcAft>
-                          <a:spcPts val="0"/>
-                        </a:spcAft>
-                        <a:buClrTx/>
-                        <a:buSzTx/>
-                        <a:buFontTx/>
-                        <a:buNone/>
-                        <a:tabLst/>
-                        <a:defRPr/>
-                      </a:pPr>
-                      <a:r>
-                        <a:rPr lang="ko-KR" altLang="en-US" sz="3300" b="1" kern="1200" dirty="0">
-                          <a:ln>
-                            <a:solidFill>
-                              <a:prstClr val="white">
-                                <a:alpha val="0"/>
-                              </a:prstClr>
-                            </a:solidFill>
-                          </a:ln>
-                          <a:solidFill>
-                            <a:prstClr val="black"/>
-                          </a:solidFill>
-                          <a:latin typeface="현대하모니 L"/>
-                          <a:ea typeface="현대하모니 L" panose="02020603020101020101" pitchFamily="18" charset="-127"/>
-                          <a:cs typeface="+mn-cs"/>
-                        </a:rPr>
-                        <a:t>설명</a:t>
-                      </a:r>
-                      <a:r>
-                        <a:rPr lang="en-US" altLang="ko-KR" sz="3300" b="1" kern="1200" dirty="0">
-                          <a:ln>
-                            <a:solidFill>
-                              <a:prstClr val="white">
-                                <a:alpha val="0"/>
-                              </a:prstClr>
-                            </a:solidFill>
-                          </a:ln>
-                          <a:solidFill>
-                            <a:prstClr val="black"/>
-                          </a:solidFill>
-                          <a:latin typeface="현대하모니 L"/>
-                          <a:ea typeface="현대하모니 L" panose="02020603020101020101" pitchFamily="18" charset="-127"/>
-                          <a:cs typeface="+mn-cs"/>
-                        </a:rPr>
-                        <a:t>/</a:t>
-                      </a:r>
-                      <a:r>
-                        <a:rPr lang="ko-KR" altLang="en-US" sz="3300" b="0" i="0" kern="1200" dirty="0">
-                          <a:solidFill>
-                            <a:schemeClr val="dk1"/>
-                          </a:solidFill>
-                          <a:effectLst/>
-                          <a:latin typeface="+mn-lt"/>
-                          <a:ea typeface="+mn-ea"/>
-                          <a:cs typeface="+mn-cs"/>
-                        </a:rPr>
-                        <a:t>说明</a:t>
-                      </a:r>
-                      <a:endParaRPr lang="en-US" altLang="ko-KR" sz="3300" b="1" kern="1200" dirty="0">
-                        <a:ln>
-                          <a:solidFill>
-                            <a:prstClr val="white">
-                              <a:alpha val="0"/>
-                            </a:prstClr>
-                          </a:solidFill>
-                        </a:ln>
-                        <a:solidFill>
-                          <a:prstClr val="black"/>
-                        </a:solidFill>
-                        <a:latin typeface="현대하모니 L" panose="02020603020101020101" pitchFamily="18" charset="-127"/>
-                        <a:ea typeface="현대하모니 L" panose="02020603020101020101" pitchFamily="18" charset="-127"/>
-                        <a:cs typeface="+mn-cs"/>
-                      </a:endParaRPr>
-                    </a:p>
-                  </a:txBody>
-                  <a:tcPr marL="92882" marR="92882" marT="46441" marB="46441" anchor="ctr">
-                    <a:lnL w="12700" cap="flat" cmpd="sng" algn="ctr">
-                      <a:solidFill>
-                        <a:schemeClr val="tx1"/>
-                      </a:solidFill>
-                      <a:prstDash val="solid"/>
-                      <a:round/>
-                      <a:headEnd type="none" w="med" len="med"/>
-                      <a:tailEnd type="none" w="med" len="med"/>
-                    </a:lnL>
-                    <a:lnR w="12700" cap="flat" cmpd="sng" algn="ctr">
-                      <a:solidFill>
-                        <a:schemeClr val="tx1"/>
-                      </a:solidFill>
-                      <a:prstDash val="solid"/>
-                      <a:round/>
-                      <a:headEnd type="none" w="med" len="med"/>
-                      <a:tailEnd type="none" w="med" len="med"/>
-                    </a:lnR>
-                    <a:lnT w="12700" cap="flat" cmpd="sng" algn="ctr">
-                      <a:solidFill>
-                        <a:schemeClr val="tx1"/>
-                      </a:solidFill>
-                      <a:prstDash val="solid"/>
-                      <a:round/>
-                      <a:headEnd type="none" w="med" len="med"/>
-                      <a:tailEnd type="none" w="med" len="med"/>
-                    </a:lnT>
-                    <a:lnB w="12700" cap="flat" cmpd="sng" algn="ctr">
-                      <a:solidFill>
-                        <a:schemeClr val="tx1"/>
-                      </a:solidFill>
-                      <a:prstDash val="solid"/>
-                      <a:round/>
-                      <a:headEnd type="none" w="med" len="med"/>
-                      <a:tailEnd type="none" w="med" len="med"/>
-                    </a:lnB>
-                    <a:solidFill>
-                      <a:schemeClr val="accent1">
-                        <a:lumMod val="20000"/>
-                        <a:lumOff val="80000"/>
-                      </a:schemeClr>
-                    </a:solidFill>
-                  </a:tcPr>
-                </a:tc>
-                <a:extLst>
-                  <a:ext uri="{0D108BD9-81ED-4DB2-BD59-A6C34878D82A}">
-                    <a16:rowId xmlns:a16="http://schemas.microsoft.com/office/drawing/2014/main" val="1910052640"/>
-                  </a:ext>
-                </a:extLst>
-              </a:tr>
-              <a:tr h="1146175">
-                <a:tc vMerge="1">
-                  <a:txBody>
-                    <a:bodyPr/>
-                    <a:lstStyle/>
-                    <a:p>
-                      <a:pPr latinLnBrk="1"/>
-                      <a:endParaRPr lang="ko-KR" altLang="en-US"/>
-                    </a:p>
-                  </a:txBody>
-                  <a:tcPr/>
-                </a:tc>
-                <a:tc>
-                  <a:txBody>
-                    <a:bodyPr/>
-                    <a:lstStyle/>
-                    <a:p>
-                      <a:pPr algn="ctr"/>
-                      <a:r>
-                        <a:rPr sz="1800"/>
-                        <a:t>전선거치 조치, 감전 및 화재위험</a:t>
-                      </a:r>
-                    </a:p>
-                  </a:txBody>
-                  <a:tcPr marL="92882" marR="92882" marT="46441" marB="46441" anchor="ctr">
-                    <a:lnL w="12700" cap="flat" cmpd="sng" algn="ctr">
-                      <a:solidFill>
-                        <a:schemeClr val="tx1"/>
-                      </a:solidFill>
-                      <a:prstDash val="solid"/>
-                      <a:round/>
-                      <a:headEnd type="none" w="med" len="med"/>
-                      <a:tailEnd type="none" w="med" len="med"/>
-                    </a:lnL>
-                    <a:lnR w="12700" cap="flat" cmpd="sng" algn="ctr">
-                      <a:solidFill>
-                        <a:schemeClr val="tx1"/>
-                      </a:solidFill>
-                      <a:prstDash val="solid"/>
-                      <a:round/>
-                      <a:headEnd type="none" w="med" len="med"/>
-                      <a:tailEnd type="none" w="med" len="med"/>
-                    </a:lnR>
-                    <a:lnT w="12700" cap="flat" cmpd="sng" algn="ctr">
-                      <a:solidFill>
-                        <a:schemeClr val="tx1"/>
-                      </a:solidFill>
-                      <a:prstDash val="solid"/>
-                      <a:round/>
-                      <a:headEnd type="none" w="med" len="med"/>
-                      <a:tailEnd type="none" w="med" len="med"/>
-                    </a:lnT>
-                    <a:lnB w="12700" cap="flat" cmpd="sng" algn="ctr">
-                      <a:solidFill>
-                        <a:schemeClr val="tx1"/>
-                      </a:solidFill>
-                      <a:prstDash val="solid"/>
-                      <a:round/>
-                      <a:headEnd type="none" w="med" len="med"/>
-                      <a:tailEnd type="none" w="med" len="med"/>
-                    </a:lnB>
-                    <a:noFill/>
-                  </a:tcPr>
-                </a:tc>
-                <a:extLst>
-                  <a:ext uri="{0D108BD9-81ED-4DB2-BD59-A6C34878D82A}">
-                    <a16:rowId xmlns:a16="http://schemas.microsoft.com/office/drawing/2014/main" val="3538895530"/>
-                  </a:ext>
-                </a:extLst>
-              </a:tr>
-              <a:tr h="1557124">
-                <a:tc vMerge="1">
-                  <a:txBody>
-                    <a:bodyPr/>
-                    <a:lstStyle/>
-                    <a:p>
-                      <a:pPr latinLnBrk="1"/>
-                      <a:endParaRPr lang="ko-KR" altLang="en-US"/>
-                    </a:p>
-                  </a:txBody>
-                  <a:tcPr/>
-                </a:tc>
-                <a:tc>
-                  <a:txBody>
-                    <a:bodyPr/>
-                    <a:lstStyle/>
-                    <a:p>
-                      <a:pPr algn="ctr"/>
-                      <a:r>
-                        <a:rPr sz="2000"/>
-                        <a:t>电线架空管理，防触电及火灾</a:t>
-                      </a:r>
-                    </a:p>
-                  </a:txBody>
-                  <a:tcPr marL="92882" marR="92882" marT="46441" marB="46441" anchor="ctr">
-                    <a:lnL w="12700" cap="flat" cmpd="sng" algn="ctr">
-                      <a:solidFill>
-                        <a:schemeClr val="tx1"/>
-                      </a:solidFill>
-                      <a:prstDash val="solid"/>
-                      <a:round/>
-                      <a:headEnd type="none" w="med" len="med"/>
-                      <a:tailEnd type="none" w="med" len="med"/>
-                    </a:lnL>
-                    <a:lnR w="12700" cap="flat" cmpd="sng" algn="ctr">
-                      <a:solidFill>
-                        <a:schemeClr val="tx1"/>
-                      </a:solidFill>
-                      <a:prstDash val="solid"/>
-                      <a:round/>
-                      <a:headEnd type="none" w="med" len="med"/>
-                      <a:tailEnd type="none" w="med" len="med"/>
-                    </a:lnR>
-                    <a:lnT w="12700" cap="flat" cmpd="sng" algn="ctr">
-                      <a:solidFill>
-                        <a:schemeClr val="tx1"/>
-                      </a:solidFill>
-                      <a:prstDash val="solid"/>
-                      <a:round/>
-                      <a:headEnd type="none" w="med" len="med"/>
-                      <a:tailEnd type="none" w="med" len="med"/>
-                    </a:lnT>
-                    <a:lnB w="12700" cap="flat" cmpd="sng" algn="ctr">
-                      <a:solidFill>
-                        <a:schemeClr val="tx1"/>
-                      </a:solidFill>
-                      <a:prstDash val="solid"/>
-                      <a:round/>
-                      <a:headEnd type="none" w="med" len="med"/>
-                      <a:tailEnd type="none" w="med" len="med"/>
-                    </a:lnB>
-                    <a:noFill/>
-                  </a:tcPr>
-                </a:tc>
-                <a:extLst>
-                  <a:ext uri="{0D108BD9-81ED-4DB2-BD59-A6C34878D82A}">
-                    <a16:rowId xmlns:a16="http://schemas.microsoft.com/office/drawing/2014/main" val="3739360056"/>
-                  </a:ext>
-                </a:extLst>
-              </a:tr>
-              <a:tr h="1341252">
-                <a:tc vMerge="1">
-                  <a:txBody>
-                    <a:bodyPr/>
-                    <a:lstStyle/>
-                    <a:p>
-                      <a:pPr latinLnBrk="1"/>
-                      <a:endParaRPr lang="ko-KR" altLang="en-US"/>
-                    </a:p>
-                  </a:txBody>
-                  <a:tcPr/>
-                </a:tc>
-                <a:tc>
-                  <a:txBody>
-                    <a:bodyPr/>
-                    <a:lstStyle/>
-                    <a:p>
-                      <a:pPr algn="ctr"/>
-                      <a:r>
-                        <a:rPr sz="1200"/>
-                        <a:t>Treo dây điện, nguy cơ điện giật và hỏa hoạn</a:t>
-                      </a:r>
-                    </a:p>
-                  </a:txBody>
-                  <a:tcPr marL="92882" marR="92882" marT="46441" marB="46441" anchor="ctr">
-                    <a:lnL w="12700" cap="flat" cmpd="sng" algn="ctr">
-                      <a:solidFill>
-                        <a:schemeClr val="tx1"/>
-                      </a:solidFill>
-                      <a:prstDash val="solid"/>
-                      <a:round/>
-                      <a:headEnd type="none" w="med" len="med"/>
-                      <a:tailEnd type="none" w="med" len="med"/>
-                    </a:lnL>
-                    <a:lnR w="12700" cap="flat" cmpd="sng" algn="ctr">
-                      <a:solidFill>
-                        <a:schemeClr val="tx1"/>
-                      </a:solidFill>
-                      <a:prstDash val="solid"/>
-                      <a:round/>
-                      <a:headEnd type="none" w="med" len="med"/>
-                      <a:tailEnd type="none" w="med" len="med"/>
-                    </a:lnR>
-                    <a:lnT w="12700" cap="flat" cmpd="sng" algn="ctr">
-                      <a:solidFill>
-                        <a:schemeClr val="tx1"/>
-                      </a:solidFill>
-                      <a:prstDash val="solid"/>
-                      <a:round/>
-                      <a:headEnd type="none" w="med" len="med"/>
-                      <a:tailEnd type="none" w="med" len="med"/>
-                    </a:lnT>
-                    <a:lnB w="12700" cap="flat" cmpd="sng" algn="ctr">
-                      <a:solidFill>
-                        <a:schemeClr val="tx1"/>
-                      </a:solidFill>
-                      <a:prstDash val="solid"/>
-                      <a:round/>
-                      <a:headEnd type="none" w="med" len="med"/>
-                      <a:tailEnd type="none" w="med" len="med"/>
-                    </a:lnB>
-                    <a:noFill/>
-                  </a:tcPr>
-                </a:tc>
-                <a:extLst>
-                  <a:ext uri="{0D108BD9-81ED-4DB2-BD59-A6C34878D82A}">
-                    <a16:rowId xmlns:a16="http://schemas.microsoft.com/office/drawing/2014/main" val="2576126919"/>
-                  </a:ext>
-                </a:extLst>
-              </a:tr>
-              <a:tr h="1515597">
-                <a:tc vMerge="1">
-                  <a:txBody>
-                    <a:bodyPr/>
-                    <a:lstStyle/>
-                    <a:p>
-                      <a:pPr latinLnBrk="1"/>
-                      <a:endParaRPr lang="ko-KR" altLang="en-US"/>
-                    </a:p>
-                  </a:txBody>
-                  <a:tcPr/>
-                </a:tc>
-                <a:tc>
-                  <a:txBody>
-                    <a:bodyPr/>
-                    <a:lstStyle/>
-                    <a:p>
-                      <a:pPr algn="ctr"/>
-                      <a:r>
-                        <a:rPr sz="1000"/>
-                        <a:t>ဝါယာကြိုးများချိတ်ဆွဲရန်၊ ဓာတ်လိုက်မှုနှင့် မီးဘေးအန္တရာယ်</a:t>
-                      </a:r>
-                    </a:p>
-                  </a:txBody>
-                  <a:tcPr marL="88479" marR="88479" marT="44240" marB="44240" anchor="ctr">
-                    <a:lnL w="12700" cap="flat" cmpd="sng" algn="ctr">
-                      <a:solidFill>
-                        <a:schemeClr val="tx1"/>
-                      </a:solidFill>
-                      <a:prstDash val="solid"/>
-                      <a:round/>
-                      <a:headEnd type="none" w="med" len="med"/>
-                      <a:tailEnd type="none" w="med" len="med"/>
-                    </a:lnL>
-                    <a:lnR w="12700" cap="flat" cmpd="sng" algn="ctr">
-                      <a:solidFill>
-                        <a:schemeClr val="tx1"/>
-                      </a:solidFill>
-                      <a:prstDash val="solid"/>
-                      <a:round/>
-                      <a:headEnd type="none" w="med" len="med"/>
-                      <a:tailEnd type="none" w="med" len="med"/>
-                    </a:lnR>
-                    <a:lnT w="12700" cap="flat" cmpd="sng" algn="ctr">
-                      <a:solidFill>
-                        <a:schemeClr val="tx1"/>
-                      </a:solidFill>
-                      <a:prstDash val="solid"/>
-                      <a:round/>
-                      <a:headEnd type="none" w="med" len="med"/>
-                      <a:tailEnd type="none" w="med" len="med"/>
-                    </a:lnT>
-                    <a:lnB w="12700" cap="flat" cmpd="sng" algn="ctr">
-                      <a:solidFill>
-                        <a:schemeClr val="tx1"/>
-                      </a:solidFill>
-                      <a:prstDash val="solid"/>
-                      <a:round/>
-                      <a:headEnd type="none" w="med" len="med"/>
-                      <a:tailEnd type="none" w="med" len="med"/>
-                    </a:lnB>
-                    <a:noFill/>
-                  </a:tcPr>
-                </a:tc>
-                <a:extLst>
-                  <a:ext uri="{0D108BD9-81ED-4DB2-BD59-A6C34878D82A}">
-                    <a16:rowId xmlns:a16="http://schemas.microsoft.com/office/drawing/2014/main" val="2531484610"/>
-                  </a:ext>
-                </a:extLst>
-              </a:tr>
-            </a:tbl>
-          </a:graphicData>
-        </a:graphic>
-      </p:graphicFrame>
-      <p:pic>
-        <p:nvPicPr>
-          <p:cNvPr id="36" name="그림 35">
-            <a:extLst>
-              <a:ext uri="{FF2B5EF4-FFF2-40B4-BE49-F238E27FC236}">
-                <a16:creationId xmlns:a16="http://schemas.microsoft.com/office/drawing/2014/main" id="{C2BC0956-6722-046A-8E30-05DE9ECBE689}"/>
-              </a:ext>
-            </a:extLst>
-          </p:cNvPr>
-          <p:cNvPicPr>
-            <a:picLocks noChangeAspect="1"/>
-          </p:cNvPicPr>
-          <p:nvPr/>
-        </p:nvPicPr>
-        <p:blipFill>
-          <a:blip r:embed="rId3" cstate="screen">
-            <a:extLst>
-              <a:ext uri="{28A0092B-C50C-407E-A947-70E740481C1C}">
-                <a14:useLocalDpi xmlns:a14="http://schemas.microsoft.com/office/drawing/2010/main"/>
-              </a:ext>
-            </a:extLst>
-          </a:blip>
-          <a:stretch>
-            <a:fillRect/>
-          </a:stretch>
-        </p:blipFill>
-        <p:spPr>
-          <a:xfrm>
-            <a:off x="11198128" y="1446210"/>
-            <a:ext cx="993874" cy="663993"/>
-          </a:xfrm>
-          <a:prstGeom prst="rect">
-            <a:avLst/>
-          </a:prstGeom>
-        </p:spPr>
-      </p:pic>
-      <p:pic>
-        <p:nvPicPr>
-          <p:cNvPr id="40" name="그림 39">
-            <a:extLst>
-              <a:ext uri="{FF2B5EF4-FFF2-40B4-BE49-F238E27FC236}">
-                <a16:creationId xmlns:a16="http://schemas.microsoft.com/office/drawing/2014/main" id="{CCD7010A-0E3E-650A-DD0C-D3788CB26476}"/>
-              </a:ext>
-            </a:extLst>
-          </p:cNvPr>
-          <p:cNvPicPr>
-            <a:picLocks noChangeAspect="1"/>
-          </p:cNvPicPr>
-          <p:nvPr/>
-        </p:nvPicPr>
-        <p:blipFill>
-          <a:blip r:embed="rId4" cstate="screen">
-            <a:extLst>
-              <a:ext uri="{28A0092B-C50C-407E-A947-70E740481C1C}">
-                <a14:useLocalDpi xmlns:a14="http://schemas.microsoft.com/office/drawing/2010/main"/>
-              </a:ext>
-            </a:extLst>
-          </a:blip>
-          <a:stretch>
-            <a:fillRect/>
-          </a:stretch>
-        </p:blipFill>
-        <p:spPr>
-          <a:xfrm>
-            <a:off x="11198128" y="2793791"/>
-            <a:ext cx="993874" cy="663435"/>
-          </a:xfrm>
-          <a:prstGeom prst="rect">
-            <a:avLst/>
-          </a:prstGeom>
-        </p:spPr>
-      </p:pic>
-      <p:pic>
-        <p:nvPicPr>
-          <p:cNvPr id="12" name="그림 11">
-            <a:extLst>
-              <a:ext uri="{FF2B5EF4-FFF2-40B4-BE49-F238E27FC236}">
-                <a16:creationId xmlns:a16="http://schemas.microsoft.com/office/drawing/2014/main" id="{491D55D9-0AD7-66B3-C97E-19FCBFBE0FFC}"/>
-              </a:ext>
-            </a:extLst>
-          </p:cNvPr>
-          <p:cNvPicPr>
-            <a:picLocks noChangeAspect="1"/>
-          </p:cNvPicPr>
-          <p:nvPr/>
-        </p:nvPicPr>
-        <p:blipFill>
-          <a:blip r:embed="rId5"/>
-          <a:stretch>
-            <a:fillRect/>
-          </a:stretch>
-        </p:blipFill>
-        <p:spPr>
-          <a:xfrm>
-            <a:off x="11198128" y="5869574"/>
-            <a:ext cx="993874" cy="663435"/>
-          </a:xfrm>
-          <a:prstGeom prst="rect">
-            <a:avLst/>
-          </a:prstGeom>
-        </p:spPr>
-      </p:pic>
-      <p:pic>
-        <p:nvPicPr>
-          <p:cNvPr id="14" name="그림 13">
-            <a:extLst>
-              <a:ext uri="{FF2B5EF4-FFF2-40B4-BE49-F238E27FC236}">
-                <a16:creationId xmlns:a16="http://schemas.microsoft.com/office/drawing/2014/main" id="{F5231BFC-7F4B-9CBD-C971-DE411F040FC0}"/>
-              </a:ext>
-            </a:extLst>
-          </p:cNvPr>
-          <p:cNvPicPr>
-            <a:picLocks noChangeAspect="1"/>
-          </p:cNvPicPr>
-          <p:nvPr/>
-        </p:nvPicPr>
-        <p:blipFill>
-          <a:blip r:embed="rId6"/>
-          <a:stretch>
-            <a:fillRect/>
-          </a:stretch>
-        </p:blipFill>
-        <p:spPr>
-          <a:xfrm>
-            <a:off x="11198128" y="4522551"/>
-            <a:ext cx="993874" cy="663435"/>
-          </a:xfrm>
-          <a:prstGeom prst="rect">
-            <a:avLst/>
-          </a:prstGeom>
-        </p:spPr>
-      </p:pic>
-      <p:sp>
-        <p:nvSpPr>
-          <p:cNvPr id="2" name="PHOTO_BOX">
-            <a:extLst>
-              <a:ext uri="{FF2B5EF4-FFF2-40B4-BE49-F238E27FC236}">
-                <a16:creationId xmlns:a16="http://schemas.microsoft.com/office/drawing/2014/main" id="{6D3F0CE2-DA03-36AA-FEE2-6373F3D7B8CD}"/>
-              </a:ext>
-            </a:extLst>
-          </p:cNvPr>
-          <p:cNvSpPr/>
-          <p:nvPr/>
-        </p:nvSpPr>
-        <p:spPr>
-          <a:xfrm>
-            <a:off x="0" y="603504"/>
-            <a:ext cx="6510528" cy="6254496"/>
-          </a:xfrm>
-          <a:prstGeom prst="rect">
-            <a:avLst/>
-          </a:prstGeom>
-          <a:solidFill>
-            <a:srgbClr val="FF0000"/>
-          </a:solidFill>
-        </p:spPr>
-        <p:style>
-          <a:lnRef idx="2">
-            <a:schemeClr val="accent1">
-              <a:shade val="15000"/>
-            </a:schemeClr>
-          </a:lnRef>
-          <a:fillRef idx="1">
-            <a:schemeClr val="accent1"/>
-          </a:fillRef>
-          <a:effectRef idx="0">
-            <a:schemeClr val="accent1"/>
-          </a:effectRef>
-          <a:fontRef idx="minor">
-            <a:schemeClr val="lt1"/>
-          </a:fontRef>
-        </p:style>
-        <p:txBody>
-          <a:bodyPr rtlCol="0" anchor="ctr"/>
-          <a:lstStyle/>
-          <a:p>
-            <a:pPr algn="ctr"/>
-            <a:r>
-              <a:rPr lang="en-US" altLang="ko-KR" sz="4800" dirty="0"/>
-              <a:t>PHOTO_BOX</a:t>
-            </a:r>
-            <a:endParaRPr lang="ko-KR" altLang="en-US" sz="4800" dirty="0"/>
-          </a:p>
-        </p:txBody>
-      </p:sp>
-    </p:spTree>
-    <p:extLst>
-      <p:ext uri="{BB962C8B-B14F-4D97-AF65-F5344CB8AC3E}">
-        <p14:creationId xmlns:p14="http://schemas.microsoft.com/office/powerpoint/2010/main" val="2639474268"/>
-      </p:ext>
-    </p:extLst>
-  </p:cSld>
-  <p:clrMapOvr>
-    <a:masterClrMapping/>
-  </p:clrMapOvr>
-</p:sld>
-</file>
-
-<file path=ppt/slides/slide6.xml><?xml version="1.0" encoding="utf-8"?>
-<p:sld xmlns:a="http://schemas.openxmlformats.org/drawingml/2006/main" xmlns:r="http://schemas.openxmlformats.org/officeDocument/2006/relationships" xmlns:p="http://schemas.openxmlformats.org/presentationml/2006/main">
-  <p:cSld>
-    <p:spTree>
-      <p:nvGrpSpPr>
-        <p:cNvPr id="1" name="">
-          <a:extLst>
-            <a:ext uri="{FF2B5EF4-FFF2-40B4-BE49-F238E27FC236}">
-              <a16:creationId xmlns:a16="http://schemas.microsoft.com/office/drawing/2014/main" id="{248BF595-5E76-66A3-DB57-317418B328F1}"/>
-            </a:ext>
-          </a:extLst>
-        </p:cNvPr>
-        <p:cNvGrpSpPr/>
-        <p:nvPr/>
-      </p:nvGrpSpPr>
-      <p:grpSpPr>
-        <a:xfrm>
-          <a:off x="0" y="0"/>
-          <a:ext cx="0" cy="0"/>
-          <a:chOff x="0" y="0"/>
-          <a:chExt cx="0" cy="0"/>
-        </a:xfrm>
-      </p:grpSpPr>
-      <p:graphicFrame>
-        <p:nvGraphicFramePr>
-          <p:cNvPr id="3" name="표 2">
-            <a:extLst>
-              <a:ext uri="{FF2B5EF4-FFF2-40B4-BE49-F238E27FC236}">
-                <a16:creationId xmlns:a16="http://schemas.microsoft.com/office/drawing/2014/main" id="{72B81987-CD12-89DC-CEB8-8E07AFF953B5}"/>
-              </a:ext>
-            </a:extLst>
-          </p:cNvPr>
-          <p:cNvGraphicFramePr>
-            <a:graphicFrameLocks noGrp="1"/>
-          </p:cNvGraphicFramePr>
-          <p:nvPr/>
-        </p:nvGraphicFramePr>
-        <p:xfrm>
-          <a:off x="0" y="-63316"/>
-          <a:ext cx="11114069" cy="6812712"/>
-        </p:xfrm>
-        <a:graphic>
-          <a:graphicData uri="http://schemas.openxmlformats.org/drawingml/2006/table">
-            <a:tbl>
-              <a:tblPr firstRow="1" bandRow="1">
-                <a:tableStyleId>{5C22544A-7EE6-4342-B048-85BDC9FD1C3A}</a:tableStyleId>
-              </a:tblPr>
-              <a:tblGrid>
-                <a:gridCol w="6538945">
-                  <a:extLst>
-                    <a:ext uri="{9D8B030D-6E8A-4147-A177-3AD203B41FA5}">
-                      <a16:colId xmlns:a16="http://schemas.microsoft.com/office/drawing/2014/main" val="1432983574"/>
-                    </a:ext>
-                  </a:extLst>
-                </a:gridCol>
-                <a:gridCol w="4575124">
-                  <a:extLst>
-                    <a:ext uri="{9D8B030D-6E8A-4147-A177-3AD203B41FA5}">
-                      <a16:colId xmlns:a16="http://schemas.microsoft.com/office/drawing/2014/main" val="3008074637"/>
-                    </a:ext>
-                  </a:extLst>
-                </a:gridCol>
-              </a:tblGrid>
-              <a:tr h="641556">
-                <a:tc gridSpan="2">
-                  <a:txBody>
-                    <a:bodyPr/>
-                    <a:lstStyle/>
-                    <a:p>
-                      <a:pPr marL="0" marR="0" lvl="0" indent="0" algn="ctr" defTabSz="914400" rtl="0" eaLnBrk="1" fontAlgn="auto" latinLnBrk="1" hangingPunct="1">
-                        <a:lnSpc>
-                          <a:spcPct val="100000"/>
-                        </a:lnSpc>
-                        <a:spcBef>
-                          <a:spcPts val="0"/>
-                        </a:spcBef>
-                        <a:spcAft>
-                          <a:spcPts val="0"/>
-                        </a:spcAft>
-                        <a:buClrTx/>
-                        <a:buSzTx/>
-                        <a:buFontTx/>
-                        <a:buNone/>
-                        <a:tabLst/>
-                        <a:defRPr/>
-                      </a:pPr>
-                      <a:r>
-                        <a:rPr lang="ko-KR" altLang="en-US" sz="3700" b="1" kern="1200">
-                          <a:solidFill>
-                            <a:schemeClr val="bg1"/>
-                          </a:solidFill>
-                          <a:latin typeface="현대하모니 L"/>
-                          <a:ea typeface="현대하모니 L" panose="02020603020101020101" pitchFamily="18" charset="-127"/>
-                          <a:cs typeface="+mn-cs"/>
-                        </a:rPr>
-                        <a:t>사진대지</a:t>
-                      </a:r>
-                    </a:p>
-                  </a:txBody>
-                  <a:tcPr marL="92882" marR="92882" marT="46441" marB="46441" anchor="ctr">
-                    <a:lnL w="12700" cap="flat" cmpd="sng" algn="ctr">
-                      <a:solidFill>
-                        <a:schemeClr val="tx1"/>
-                      </a:solidFill>
-                      <a:prstDash val="solid"/>
-                      <a:round/>
-                      <a:headEnd type="none" w="med" len="med"/>
-                      <a:tailEnd type="none" w="med" len="med"/>
-                    </a:lnL>
-                    <a:lnR w="12700" cap="flat" cmpd="sng" algn="ctr">
-                      <a:solidFill>
-                        <a:schemeClr val="tx1"/>
-                      </a:solidFill>
-                      <a:prstDash val="solid"/>
-                      <a:round/>
-                      <a:headEnd type="none" w="med" len="med"/>
-                      <a:tailEnd type="none" w="med" len="med"/>
-                    </a:lnR>
-                    <a:lnT w="12700" cap="flat" cmpd="sng" algn="ctr">
-                      <a:solidFill>
-                        <a:schemeClr val="tx1"/>
-                      </a:solidFill>
-                      <a:prstDash val="solid"/>
-                      <a:round/>
-                      <a:headEnd type="none" w="med" len="med"/>
-                      <a:tailEnd type="none" w="med" len="med"/>
-                    </a:lnT>
-                    <a:lnB w="12700" cap="flat" cmpd="sng" algn="ctr">
-                      <a:solidFill>
-                        <a:schemeClr val="tx1"/>
-                      </a:solidFill>
-                      <a:prstDash val="solid"/>
-                      <a:round/>
-                      <a:headEnd type="none" w="med" len="med"/>
-                      <a:tailEnd type="none" w="med" len="med"/>
-                    </a:lnB>
-                    <a:solidFill>
-                      <a:srgbClr val="002060"/>
-                    </a:solidFill>
-                  </a:tcPr>
-                </a:tc>
-                <a:tc hMerge="1">
-                  <a:txBody>
-                    <a:bodyPr/>
-                    <a:lstStyle/>
-                    <a:p>
-                      <a:pPr latinLnBrk="1"/>
-                      <a:endParaRPr lang="ko-KR" altLang="en-US"/>
-                    </a:p>
-                  </a:txBody>
-                  <a:tcPr>
-                    <a:lnL w="12700" cap="flat" cmpd="sng" algn="ctr">
-                      <a:solidFill>
-                        <a:schemeClr val="tx1"/>
-                      </a:solidFill>
-                      <a:prstDash val="solid"/>
-                      <a:round/>
-                      <a:headEnd type="none" w="med" len="med"/>
-                      <a:tailEnd type="none" w="med" len="med"/>
-                    </a:lnL>
-                    <a:lnR w="12700" cap="flat" cmpd="sng" algn="ctr">
-                      <a:solidFill>
-                        <a:schemeClr val="tx1"/>
-                      </a:solidFill>
-                      <a:prstDash val="solid"/>
-                      <a:round/>
-                      <a:headEnd type="none" w="med" len="med"/>
-                      <a:tailEnd type="none" w="med" len="med"/>
-                    </a:lnR>
-                    <a:lnT w="12700" cap="flat" cmpd="sng" algn="ctr">
-                      <a:solidFill>
-                        <a:schemeClr val="tx1"/>
-                      </a:solidFill>
-                      <a:prstDash val="solid"/>
-                      <a:round/>
-                      <a:headEnd type="none" w="med" len="med"/>
-                      <a:tailEnd type="none" w="med" len="med"/>
-                    </a:lnT>
-                    <a:lnB w="12700" cap="flat" cmpd="sng" algn="ctr">
-                      <a:solidFill>
-                        <a:schemeClr val="tx1"/>
-                      </a:solidFill>
-                      <a:prstDash val="solid"/>
-                      <a:round/>
-                      <a:headEnd type="none" w="med" len="med"/>
-                      <a:tailEnd type="none" w="med" len="med"/>
-                    </a:lnB>
-                  </a:tcPr>
-                </a:tc>
-                <a:extLst>
-                  <a:ext uri="{0D108BD9-81ED-4DB2-BD59-A6C34878D82A}">
-                    <a16:rowId xmlns:a16="http://schemas.microsoft.com/office/drawing/2014/main" val="3795485425"/>
-                  </a:ext>
-                </a:extLst>
-              </a:tr>
-              <a:tr h="582007">
-                <a:tc rowSpan="5">
-                  <a:txBody>
-                    <a:bodyPr/>
-                    <a:lstStyle/>
-                    <a:p>
-                      <a:pPr latinLnBrk="1"/>
-                      <a:endParaRPr lang="ko-KR" altLang="en-US" sz="2400" dirty="0"/>
-                    </a:p>
-                  </a:txBody>
-                  <a:tcPr marL="92882" marR="92882" marT="46441" marB="46441">
-                    <a:lnL w="12700" cap="flat" cmpd="sng" algn="ctr">
-                      <a:solidFill>
-                        <a:schemeClr val="tx1"/>
-                      </a:solidFill>
-                      <a:prstDash val="solid"/>
-                      <a:round/>
-                      <a:headEnd type="none" w="med" len="med"/>
-                      <a:tailEnd type="none" w="med" len="med"/>
-                    </a:lnL>
-                    <a:lnR w="12700" cap="flat" cmpd="sng" algn="ctr">
-                      <a:solidFill>
-                        <a:schemeClr val="tx1"/>
-                      </a:solidFill>
-                      <a:prstDash val="solid"/>
-                      <a:round/>
-                      <a:headEnd type="none" w="med" len="med"/>
-                      <a:tailEnd type="none" w="med" len="med"/>
-                    </a:lnR>
-                    <a:lnT w="12700" cap="flat" cmpd="sng" algn="ctr">
-                      <a:solidFill>
-                        <a:schemeClr val="tx1"/>
-                      </a:solidFill>
-                      <a:prstDash val="solid"/>
-                      <a:round/>
-                      <a:headEnd type="none" w="med" len="med"/>
-                      <a:tailEnd type="none" w="med" len="med"/>
-                    </a:lnT>
-                    <a:lnB w="12700" cap="flat" cmpd="sng" algn="ctr">
-                      <a:solidFill>
-                        <a:schemeClr val="tx1"/>
-                      </a:solidFill>
-                      <a:prstDash val="solid"/>
-                      <a:round/>
-                      <a:headEnd type="none" w="med" len="med"/>
-                      <a:tailEnd type="none" w="med" len="med"/>
-                    </a:lnB>
-                    <a:noFill/>
-                  </a:tcPr>
-                </a:tc>
-                <a:tc>
-                  <a:txBody>
-                    <a:bodyPr/>
-                    <a:lstStyle/>
-                    <a:p>
-                      <a:pPr marL="0" marR="0" lvl="0" indent="0" algn="ctr" defTabSz="914400" rtl="0" eaLnBrk="1" fontAlgn="auto" latinLnBrk="1" hangingPunct="1">
-                        <a:lnSpc>
-                          <a:spcPct val="100000"/>
-                        </a:lnSpc>
-                        <a:spcBef>
-                          <a:spcPts val="0"/>
-                        </a:spcBef>
-                        <a:spcAft>
-                          <a:spcPts val="0"/>
-                        </a:spcAft>
-                        <a:buClrTx/>
-                        <a:buSzTx/>
-                        <a:buFontTx/>
-                        <a:buNone/>
-                        <a:tabLst/>
-                        <a:defRPr/>
-                      </a:pPr>
-                      <a:r>
-                        <a:rPr lang="ko-KR" altLang="en-US" sz="3300" b="1" kern="1200" dirty="0">
-                          <a:ln>
-                            <a:solidFill>
-                              <a:prstClr val="white">
-                                <a:alpha val="0"/>
-                              </a:prstClr>
-                            </a:solidFill>
-                          </a:ln>
-                          <a:solidFill>
-                            <a:prstClr val="black"/>
-                          </a:solidFill>
-                          <a:latin typeface="현대하모니 L"/>
-                          <a:ea typeface="현대하모니 L" panose="02020603020101020101" pitchFamily="18" charset="-127"/>
-                          <a:cs typeface="+mn-cs"/>
-                        </a:rPr>
-                        <a:t>설명</a:t>
-                      </a:r>
-                      <a:r>
-                        <a:rPr lang="en-US" altLang="ko-KR" sz="3300" b="1" kern="1200" dirty="0">
-                          <a:ln>
-                            <a:solidFill>
-                              <a:prstClr val="white">
-                                <a:alpha val="0"/>
-                              </a:prstClr>
-                            </a:solidFill>
-                          </a:ln>
-                          <a:solidFill>
-                            <a:prstClr val="black"/>
-                          </a:solidFill>
-                          <a:latin typeface="현대하모니 L"/>
-                          <a:ea typeface="현대하모니 L" panose="02020603020101020101" pitchFamily="18" charset="-127"/>
-                          <a:cs typeface="+mn-cs"/>
-                        </a:rPr>
-                        <a:t>/</a:t>
-                      </a:r>
-                      <a:r>
-                        <a:rPr lang="ko-KR" altLang="en-US" sz="3300" b="0" i="0" kern="1200" dirty="0">
-                          <a:solidFill>
-                            <a:schemeClr val="dk1"/>
-                          </a:solidFill>
-                          <a:effectLst/>
-                          <a:latin typeface="+mn-lt"/>
-                          <a:ea typeface="+mn-ea"/>
-                          <a:cs typeface="+mn-cs"/>
-                        </a:rPr>
-                        <a:t>说明</a:t>
-                      </a:r>
-                      <a:endParaRPr lang="en-US" altLang="ko-KR" sz="3300" b="1" kern="1200" dirty="0">
-                        <a:ln>
-                          <a:solidFill>
-                            <a:prstClr val="white">
-                              <a:alpha val="0"/>
-                            </a:prstClr>
-                          </a:solidFill>
-                        </a:ln>
-                        <a:solidFill>
-                          <a:prstClr val="black"/>
-                        </a:solidFill>
-                        <a:latin typeface="현대하모니 L" panose="02020603020101020101" pitchFamily="18" charset="-127"/>
-                        <a:ea typeface="현대하모니 L" panose="02020603020101020101" pitchFamily="18" charset="-127"/>
-                        <a:cs typeface="+mn-cs"/>
-                      </a:endParaRPr>
-                    </a:p>
-                  </a:txBody>
-                  <a:tcPr marL="92882" marR="92882" marT="46441" marB="46441" anchor="ctr">
-                    <a:lnL w="12700" cap="flat" cmpd="sng" algn="ctr">
-                      <a:solidFill>
-                        <a:schemeClr val="tx1"/>
-                      </a:solidFill>
-                      <a:prstDash val="solid"/>
-                      <a:round/>
-                      <a:headEnd type="none" w="med" len="med"/>
-                      <a:tailEnd type="none" w="med" len="med"/>
-                    </a:lnL>
-                    <a:lnR w="12700" cap="flat" cmpd="sng" algn="ctr">
-                      <a:solidFill>
-                        <a:schemeClr val="tx1"/>
-                      </a:solidFill>
-                      <a:prstDash val="solid"/>
-                      <a:round/>
-                      <a:headEnd type="none" w="med" len="med"/>
-                      <a:tailEnd type="none" w="med" len="med"/>
-                    </a:lnR>
-                    <a:lnT w="12700" cap="flat" cmpd="sng" algn="ctr">
-                      <a:solidFill>
-                        <a:schemeClr val="tx1"/>
-                      </a:solidFill>
-                      <a:prstDash val="solid"/>
-                      <a:round/>
-                      <a:headEnd type="none" w="med" len="med"/>
-                      <a:tailEnd type="none" w="med" len="med"/>
-                    </a:lnT>
-                    <a:lnB w="12700" cap="flat" cmpd="sng" algn="ctr">
-                      <a:solidFill>
-                        <a:schemeClr val="tx1"/>
-                      </a:solidFill>
-                      <a:prstDash val="solid"/>
-                      <a:round/>
-                      <a:headEnd type="none" w="med" len="med"/>
-                      <a:tailEnd type="none" w="med" len="med"/>
-                    </a:lnB>
-                    <a:solidFill>
-                      <a:schemeClr val="accent1">
-                        <a:lumMod val="20000"/>
-                        <a:lumOff val="80000"/>
-                      </a:schemeClr>
-                    </a:solidFill>
-                  </a:tcPr>
-                </a:tc>
-                <a:extLst>
-                  <a:ext uri="{0D108BD9-81ED-4DB2-BD59-A6C34878D82A}">
-                    <a16:rowId xmlns:a16="http://schemas.microsoft.com/office/drawing/2014/main" val="1910052640"/>
-                  </a:ext>
-                </a:extLst>
-              </a:tr>
-              <a:tr h="1146175">
-                <a:tc vMerge="1">
-                  <a:txBody>
-                    <a:bodyPr/>
-                    <a:lstStyle/>
-                    <a:p>
-                      <a:pPr latinLnBrk="1"/>
-                      <a:endParaRPr lang="ko-KR" altLang="en-US"/>
-                    </a:p>
-                  </a:txBody>
-                  <a:tcPr/>
-                </a:tc>
-                <a:tc>
-                  <a:txBody>
-                    <a:bodyPr/>
-                    <a:lstStyle/>
-                    <a:p>
-                      <a:pPr algn="ctr"/>
-                      <a:r>
-                        <a:rPr sz="1800"/>
-                        <a:t>전선거치 조치, 감전 및 화재위험</a:t>
-                      </a:r>
-                    </a:p>
-                  </a:txBody>
-                  <a:tcPr marL="92882" marR="92882" marT="46441" marB="46441" anchor="ctr">
-                    <a:lnL w="12700" cap="flat" cmpd="sng" algn="ctr">
-                      <a:solidFill>
-                        <a:schemeClr val="tx1"/>
-                      </a:solidFill>
-                      <a:prstDash val="solid"/>
-                      <a:round/>
-                      <a:headEnd type="none" w="med" len="med"/>
-                      <a:tailEnd type="none" w="med" len="med"/>
-                    </a:lnL>
-                    <a:lnR w="12700" cap="flat" cmpd="sng" algn="ctr">
-                      <a:solidFill>
-                        <a:schemeClr val="tx1"/>
-                      </a:solidFill>
-                      <a:prstDash val="solid"/>
-                      <a:round/>
-                      <a:headEnd type="none" w="med" len="med"/>
-                      <a:tailEnd type="none" w="med" len="med"/>
-                    </a:lnR>
-                    <a:lnT w="12700" cap="flat" cmpd="sng" algn="ctr">
-                      <a:solidFill>
-                        <a:schemeClr val="tx1"/>
-                      </a:solidFill>
-                      <a:prstDash val="solid"/>
-                      <a:round/>
-                      <a:headEnd type="none" w="med" len="med"/>
-                      <a:tailEnd type="none" w="med" len="med"/>
-                    </a:lnT>
-                    <a:lnB w="12700" cap="flat" cmpd="sng" algn="ctr">
-                      <a:solidFill>
-                        <a:schemeClr val="tx1"/>
-                      </a:solidFill>
-                      <a:prstDash val="solid"/>
-                      <a:round/>
-                      <a:headEnd type="none" w="med" len="med"/>
-                      <a:tailEnd type="none" w="med" len="med"/>
-                    </a:lnB>
-                    <a:noFill/>
-                  </a:tcPr>
-                </a:tc>
-                <a:extLst>
-                  <a:ext uri="{0D108BD9-81ED-4DB2-BD59-A6C34878D82A}">
-                    <a16:rowId xmlns:a16="http://schemas.microsoft.com/office/drawing/2014/main" val="3538895530"/>
-                  </a:ext>
-                </a:extLst>
-              </a:tr>
-              <a:tr h="1557124">
-                <a:tc vMerge="1">
-                  <a:txBody>
-                    <a:bodyPr/>
-                    <a:lstStyle/>
-                    <a:p>
-                      <a:pPr latinLnBrk="1"/>
-                      <a:endParaRPr lang="ko-KR" altLang="en-US"/>
-                    </a:p>
-                  </a:txBody>
-                  <a:tcPr/>
-                </a:tc>
-                <a:tc>
-                  <a:txBody>
-                    <a:bodyPr/>
-                    <a:lstStyle/>
-                    <a:p>
-                      <a:pPr algn="ctr"/>
-                      <a:r>
-                        <a:rPr sz="2000"/>
-                        <a:t>电线架空管理，防触电及火灾</a:t>
-                      </a:r>
-                    </a:p>
-                  </a:txBody>
-                  <a:tcPr marL="92882" marR="92882" marT="46441" marB="46441" anchor="ctr">
-                    <a:lnL w="12700" cap="flat" cmpd="sng" algn="ctr">
-                      <a:solidFill>
-                        <a:schemeClr val="tx1"/>
-                      </a:solidFill>
-                      <a:prstDash val="solid"/>
-                      <a:round/>
-                      <a:headEnd type="none" w="med" len="med"/>
-                      <a:tailEnd type="none" w="med" len="med"/>
-                    </a:lnL>
-                    <a:lnR w="12700" cap="flat" cmpd="sng" algn="ctr">
-                      <a:solidFill>
-                        <a:schemeClr val="tx1"/>
-                      </a:solidFill>
-                      <a:prstDash val="solid"/>
-                      <a:round/>
-                      <a:headEnd type="none" w="med" len="med"/>
-                      <a:tailEnd type="none" w="med" len="med"/>
-                    </a:lnR>
-                    <a:lnT w="12700" cap="flat" cmpd="sng" algn="ctr">
-                      <a:solidFill>
-                        <a:schemeClr val="tx1"/>
-                      </a:solidFill>
-                      <a:prstDash val="solid"/>
-                      <a:round/>
-                      <a:headEnd type="none" w="med" len="med"/>
-                      <a:tailEnd type="none" w="med" len="med"/>
-                    </a:lnT>
-                    <a:lnB w="12700" cap="flat" cmpd="sng" algn="ctr">
-                      <a:solidFill>
-                        <a:schemeClr val="tx1"/>
-                      </a:solidFill>
-                      <a:prstDash val="solid"/>
-                      <a:round/>
-                      <a:headEnd type="none" w="med" len="med"/>
-                      <a:tailEnd type="none" w="med" len="med"/>
-                    </a:lnB>
-                    <a:noFill/>
-                  </a:tcPr>
-                </a:tc>
-                <a:extLst>
-                  <a:ext uri="{0D108BD9-81ED-4DB2-BD59-A6C34878D82A}">
-                    <a16:rowId xmlns:a16="http://schemas.microsoft.com/office/drawing/2014/main" val="3739360056"/>
-                  </a:ext>
-                </a:extLst>
-              </a:tr>
-              <a:tr h="1341252">
-                <a:tc vMerge="1">
-                  <a:txBody>
-                    <a:bodyPr/>
-                    <a:lstStyle/>
-                    <a:p>
-                      <a:pPr latinLnBrk="1"/>
-                      <a:endParaRPr lang="ko-KR" altLang="en-US"/>
-                    </a:p>
-                  </a:txBody>
-                  <a:tcPr/>
-                </a:tc>
-                <a:tc>
-                  <a:txBody>
-                    <a:bodyPr/>
-                    <a:lstStyle/>
-                    <a:p>
-                      <a:pPr algn="ctr"/>
-                      <a:r>
-                        <a:rPr sz="1200"/>
-                        <a:t>Treo dây điện, nguy cơ điện giật và hỏa hoạn</a:t>
-                      </a:r>
-                    </a:p>
-                  </a:txBody>
-                  <a:tcPr marL="92882" marR="92882" marT="46441" marB="46441" anchor="ctr">
-                    <a:lnL w="12700" cap="flat" cmpd="sng" algn="ctr">
-                      <a:solidFill>
-                        <a:schemeClr val="tx1"/>
-                      </a:solidFill>
-                      <a:prstDash val="solid"/>
-                      <a:round/>
-                      <a:headEnd type="none" w="med" len="med"/>
-                      <a:tailEnd type="none" w="med" len="med"/>
-                    </a:lnL>
-                    <a:lnR w="12700" cap="flat" cmpd="sng" algn="ctr">
-                      <a:solidFill>
-                        <a:schemeClr val="tx1"/>
-                      </a:solidFill>
-                      <a:prstDash val="solid"/>
-                      <a:round/>
-                      <a:headEnd type="none" w="med" len="med"/>
-                      <a:tailEnd type="none" w="med" len="med"/>
-                    </a:lnR>
-                    <a:lnT w="12700" cap="flat" cmpd="sng" algn="ctr">
-                      <a:solidFill>
-                        <a:schemeClr val="tx1"/>
-                      </a:solidFill>
-                      <a:prstDash val="solid"/>
-                      <a:round/>
-                      <a:headEnd type="none" w="med" len="med"/>
-                      <a:tailEnd type="none" w="med" len="med"/>
-                    </a:lnT>
-                    <a:lnB w="12700" cap="flat" cmpd="sng" algn="ctr">
-                      <a:solidFill>
-                        <a:schemeClr val="tx1"/>
-                      </a:solidFill>
-                      <a:prstDash val="solid"/>
-                      <a:round/>
-                      <a:headEnd type="none" w="med" len="med"/>
-                      <a:tailEnd type="none" w="med" len="med"/>
-                    </a:lnB>
-                    <a:noFill/>
-                  </a:tcPr>
-                </a:tc>
-                <a:extLst>
-                  <a:ext uri="{0D108BD9-81ED-4DB2-BD59-A6C34878D82A}">
-                    <a16:rowId xmlns:a16="http://schemas.microsoft.com/office/drawing/2014/main" val="2576126919"/>
-                  </a:ext>
-                </a:extLst>
-              </a:tr>
-              <a:tr h="1515597">
-                <a:tc vMerge="1">
-                  <a:txBody>
-                    <a:bodyPr/>
-                    <a:lstStyle/>
-                    <a:p>
-                      <a:pPr latinLnBrk="1"/>
-                      <a:endParaRPr lang="ko-KR" altLang="en-US"/>
-                    </a:p>
-                  </a:txBody>
-                  <a:tcPr/>
-                </a:tc>
-                <a:tc>
-                  <a:txBody>
-                    <a:bodyPr/>
-                    <a:lstStyle/>
-                    <a:p>
-                      <a:pPr algn="ctr"/>
-                      <a:r>
-                        <a:rPr sz="1000"/>
-                        <a:t>ဝါယာကြိုးများချိတ်ဆွဲရန်၊ ဓာတ်လိုက်မှုနှင့် မီးဘေးအန္တရာယ်</a:t>
-                      </a:r>
-                    </a:p>
-                  </a:txBody>
-                  <a:tcPr marL="88479" marR="88479" marT="44240" marB="44240" anchor="ctr">
-                    <a:lnL w="12700" cap="flat" cmpd="sng" algn="ctr">
-                      <a:solidFill>
-                        <a:schemeClr val="tx1"/>
-                      </a:solidFill>
-                      <a:prstDash val="solid"/>
-                      <a:round/>
-                      <a:headEnd type="none" w="med" len="med"/>
-                      <a:tailEnd type="none" w="med" len="med"/>
-                    </a:lnL>
-                    <a:lnR w="12700" cap="flat" cmpd="sng" algn="ctr">
-                      <a:solidFill>
-                        <a:schemeClr val="tx1"/>
-                      </a:solidFill>
-                      <a:prstDash val="solid"/>
-                      <a:round/>
-                      <a:headEnd type="none" w="med" len="med"/>
-                      <a:tailEnd type="none" w="med" len="med"/>
-                    </a:lnR>
-                    <a:lnT w="12700" cap="flat" cmpd="sng" algn="ctr">
-                      <a:solidFill>
-                        <a:schemeClr val="tx1"/>
-                      </a:solidFill>
-                      <a:prstDash val="solid"/>
-                      <a:round/>
-                      <a:headEnd type="none" w="med" len="med"/>
-                      <a:tailEnd type="none" w="med" len="med"/>
-                    </a:lnT>
-                    <a:lnB w="12700" cap="flat" cmpd="sng" algn="ctr">
-                      <a:solidFill>
-                        <a:schemeClr val="tx1"/>
-                      </a:solidFill>
-                      <a:prstDash val="solid"/>
-                      <a:round/>
-                      <a:headEnd type="none" w="med" len="med"/>
-                      <a:tailEnd type="none" w="med" len="med"/>
-                    </a:lnB>
-                    <a:noFill/>
-                  </a:tcPr>
-                </a:tc>
-                <a:extLst>
-                  <a:ext uri="{0D108BD9-81ED-4DB2-BD59-A6C34878D82A}">
-                    <a16:rowId xmlns:a16="http://schemas.microsoft.com/office/drawing/2014/main" val="2531484610"/>
-                  </a:ext>
-                </a:extLst>
-              </a:tr>
-            </a:tbl>
-          </a:graphicData>
-        </a:graphic>
-      </p:graphicFrame>
-      <p:pic>
-        <p:nvPicPr>
-          <p:cNvPr id="36" name="그림 35">
-            <a:extLst>
-              <a:ext uri="{FF2B5EF4-FFF2-40B4-BE49-F238E27FC236}">
-                <a16:creationId xmlns:a16="http://schemas.microsoft.com/office/drawing/2014/main" id="{514EFDEA-2606-5E08-EC3B-D12877CDE399}"/>
-              </a:ext>
-            </a:extLst>
-          </p:cNvPr>
-          <p:cNvPicPr>
-            <a:picLocks noChangeAspect="1"/>
-          </p:cNvPicPr>
-          <p:nvPr/>
-        </p:nvPicPr>
-        <p:blipFill>
-          <a:blip r:embed="rId3" cstate="screen">
-            <a:extLst>
-              <a:ext uri="{28A0092B-C50C-407E-A947-70E740481C1C}">
-                <a14:useLocalDpi xmlns:a14="http://schemas.microsoft.com/office/drawing/2010/main"/>
-              </a:ext>
-            </a:extLst>
-          </a:blip>
-          <a:stretch>
-            <a:fillRect/>
-          </a:stretch>
-        </p:blipFill>
-        <p:spPr>
-          <a:xfrm>
-            <a:off x="11198128" y="1446210"/>
-            <a:ext cx="993874" cy="663993"/>
-          </a:xfrm>
-          <a:prstGeom prst="rect">
-            <a:avLst/>
-          </a:prstGeom>
-        </p:spPr>
-      </p:pic>
-      <p:pic>
-        <p:nvPicPr>
-          <p:cNvPr id="40" name="그림 39">
-            <a:extLst>
-              <a:ext uri="{FF2B5EF4-FFF2-40B4-BE49-F238E27FC236}">
-                <a16:creationId xmlns:a16="http://schemas.microsoft.com/office/drawing/2014/main" id="{A9C02905-2A7D-C815-3B60-DE1C3C3BA7AF}"/>
-              </a:ext>
-            </a:extLst>
-          </p:cNvPr>
-          <p:cNvPicPr>
-            <a:picLocks noChangeAspect="1"/>
-          </p:cNvPicPr>
-          <p:nvPr/>
-        </p:nvPicPr>
-        <p:blipFill>
-          <a:blip r:embed="rId4" cstate="screen">
-            <a:extLst>
-              <a:ext uri="{28A0092B-C50C-407E-A947-70E740481C1C}">
-                <a14:useLocalDpi xmlns:a14="http://schemas.microsoft.com/office/drawing/2010/main"/>
-              </a:ext>
-            </a:extLst>
-          </a:blip>
-          <a:stretch>
-            <a:fillRect/>
-          </a:stretch>
-        </p:blipFill>
-        <p:spPr>
-          <a:xfrm>
-            <a:off x="11198128" y="2793791"/>
-            <a:ext cx="993874" cy="663435"/>
-          </a:xfrm>
-          <a:prstGeom prst="rect">
-            <a:avLst/>
-          </a:prstGeom>
-        </p:spPr>
-      </p:pic>
-      <p:pic>
-        <p:nvPicPr>
-          <p:cNvPr id="12" name="그림 11">
-            <a:extLst>
-              <a:ext uri="{FF2B5EF4-FFF2-40B4-BE49-F238E27FC236}">
-                <a16:creationId xmlns:a16="http://schemas.microsoft.com/office/drawing/2014/main" id="{3A7D0DB5-3AD1-5A08-0A34-74D8A776F325}"/>
-              </a:ext>
-            </a:extLst>
-          </p:cNvPr>
-          <p:cNvPicPr>
-            <a:picLocks noChangeAspect="1"/>
-          </p:cNvPicPr>
-          <p:nvPr/>
-        </p:nvPicPr>
-        <p:blipFill>
-          <a:blip r:embed="rId5"/>
-          <a:stretch>
-            <a:fillRect/>
-          </a:stretch>
-        </p:blipFill>
-        <p:spPr>
-          <a:xfrm>
-            <a:off x="11198128" y="5869574"/>
-            <a:ext cx="993874" cy="663435"/>
-          </a:xfrm>
-          <a:prstGeom prst="rect">
-            <a:avLst/>
-          </a:prstGeom>
-        </p:spPr>
-      </p:pic>
-      <p:pic>
-        <p:nvPicPr>
-          <p:cNvPr id="14" name="그림 13">
-            <a:extLst>
-              <a:ext uri="{FF2B5EF4-FFF2-40B4-BE49-F238E27FC236}">
-                <a16:creationId xmlns:a16="http://schemas.microsoft.com/office/drawing/2014/main" id="{C97C2449-FA49-4E95-0DE8-15755D2EF5DA}"/>
-              </a:ext>
-            </a:extLst>
-          </p:cNvPr>
-          <p:cNvPicPr>
-            <a:picLocks noChangeAspect="1"/>
-          </p:cNvPicPr>
-          <p:nvPr/>
-        </p:nvPicPr>
-        <p:blipFill>
-          <a:blip r:embed="rId6"/>
-          <a:stretch>
-            <a:fillRect/>
-          </a:stretch>
-        </p:blipFill>
-        <p:spPr>
-          <a:xfrm>
-            <a:off x="11198128" y="4522551"/>
-            <a:ext cx="993874" cy="663435"/>
-          </a:xfrm>
-          <a:prstGeom prst="rect">
-            <a:avLst/>
-          </a:prstGeom>
-        </p:spPr>
-      </p:pic>
-      <p:sp>
-        <p:nvSpPr>
-          <p:cNvPr id="2" name="PHOTO_BOX">
-            <a:extLst>
-              <a:ext uri="{FF2B5EF4-FFF2-40B4-BE49-F238E27FC236}">
-                <a16:creationId xmlns:a16="http://schemas.microsoft.com/office/drawing/2014/main" id="{E828B544-76C5-90D8-1620-25C5B5B8D360}"/>
-              </a:ext>
-            </a:extLst>
-          </p:cNvPr>
-          <p:cNvSpPr/>
-          <p:nvPr/>
-        </p:nvSpPr>
-        <p:spPr>
-          <a:xfrm>
-            <a:off x="0" y="603504"/>
-            <a:ext cx="6510528" cy="6254496"/>
-          </a:xfrm>
-          <a:prstGeom prst="rect">
-            <a:avLst/>
-          </a:prstGeom>
-          <a:solidFill>
-            <a:srgbClr val="FF0000"/>
-          </a:solidFill>
-        </p:spPr>
-        <p:style>
-          <a:lnRef idx="2">
-            <a:schemeClr val="accent1">
-              <a:shade val="15000"/>
-            </a:schemeClr>
-          </a:lnRef>
-          <a:fillRef idx="1">
-            <a:schemeClr val="accent1"/>
-          </a:fillRef>
-          <a:effectRef idx="0">
-            <a:schemeClr val="accent1"/>
-          </a:effectRef>
-          <a:fontRef idx="minor">
-            <a:schemeClr val="lt1"/>
-          </a:fontRef>
-        </p:style>
-        <p:txBody>
-          <a:bodyPr rtlCol="0" anchor="ctr"/>
-          <a:lstStyle/>
-          <a:p>
-            <a:pPr algn="ctr"/>
-            <a:r>
-              <a:rPr lang="en-US" altLang="ko-KR" sz="4800" dirty="0"/>
-              <a:t>PHOTO_BOX</a:t>
-            </a:r>
-            <a:endParaRPr lang="ko-KR" altLang="en-US" sz="4800" dirty="0"/>
-          </a:p>
-        </p:txBody>
-      </p:sp>
-    </p:spTree>
-    <p:extLst>
-      <p:ext uri="{BB962C8B-B14F-4D97-AF65-F5344CB8AC3E}">
-        <p14:creationId xmlns:p14="http://schemas.microsoft.com/office/powerpoint/2010/main" val="2274898286"/>
-      </p:ext>
-    </p:extLst>
-  </p:cSld>
-  <p:clrMapOvr>
-    <a:masterClrMapping/>
-  </p:clrMapOvr>
-</p:sld>
-</file>
-
-<file path=ppt/slides/slide7.xml><?xml version="1.0" encoding="utf-8"?>
-<p:sld xmlns:a="http://schemas.openxmlformats.org/drawingml/2006/main" xmlns:r="http://schemas.openxmlformats.org/officeDocument/2006/relationships" xmlns:p="http://schemas.openxmlformats.org/presentationml/2006/main">
-  <p:cSld>
-    <p:spTree>
-      <p:nvGrpSpPr>
-        <p:cNvPr id="1" name="">
-          <a:extLst>
-            <a:ext uri="{FF2B5EF4-FFF2-40B4-BE49-F238E27FC236}">
-              <a16:creationId xmlns:a16="http://schemas.microsoft.com/office/drawing/2014/main" id="{BC7B6F2E-F1AB-12A5-F5FA-794424E98490}"/>
-            </a:ext>
-          </a:extLst>
-        </p:cNvPr>
-        <p:cNvGrpSpPr/>
-        <p:nvPr/>
-      </p:nvGrpSpPr>
-      <p:grpSpPr>
-        <a:xfrm>
-          <a:off x="0" y="0"/>
-          <a:ext cx="0" cy="0"/>
-          <a:chOff x="0" y="0"/>
-          <a:chExt cx="0" cy="0"/>
-        </a:xfrm>
-      </p:grpSpPr>
-      <p:graphicFrame>
-        <p:nvGraphicFramePr>
-          <p:cNvPr id="3" name="표 2">
-            <a:extLst>
-              <a:ext uri="{FF2B5EF4-FFF2-40B4-BE49-F238E27FC236}">
-                <a16:creationId xmlns:a16="http://schemas.microsoft.com/office/drawing/2014/main" id="{01DE59B2-7A3E-75F9-F0D5-CFD298EA046C}"/>
-              </a:ext>
-            </a:extLst>
-          </p:cNvPr>
-          <p:cNvGraphicFramePr>
-            <a:graphicFrameLocks noGrp="1"/>
-          </p:cNvGraphicFramePr>
-          <p:nvPr/>
-        </p:nvGraphicFramePr>
-        <p:xfrm>
-          <a:off x="0" y="-63316"/>
-          <a:ext cx="11114069" cy="6812712"/>
-        </p:xfrm>
-        <a:graphic>
-          <a:graphicData uri="http://schemas.openxmlformats.org/drawingml/2006/table">
-            <a:tbl>
-              <a:tblPr firstRow="1" bandRow="1">
-                <a:tableStyleId>{5C22544A-7EE6-4342-B048-85BDC9FD1C3A}</a:tableStyleId>
-              </a:tblPr>
-              <a:tblGrid>
-                <a:gridCol w="6538945">
-                  <a:extLst>
-                    <a:ext uri="{9D8B030D-6E8A-4147-A177-3AD203B41FA5}">
-                      <a16:colId xmlns:a16="http://schemas.microsoft.com/office/drawing/2014/main" val="1432983574"/>
-                    </a:ext>
-                  </a:extLst>
-                </a:gridCol>
-                <a:gridCol w="4575124">
-                  <a:extLst>
-                    <a:ext uri="{9D8B030D-6E8A-4147-A177-3AD203B41FA5}">
-                      <a16:colId xmlns:a16="http://schemas.microsoft.com/office/drawing/2014/main" val="3008074637"/>
-                    </a:ext>
-                  </a:extLst>
-                </a:gridCol>
-              </a:tblGrid>
-              <a:tr h="641556">
-                <a:tc gridSpan="2">
-                  <a:txBody>
-                    <a:bodyPr/>
-                    <a:lstStyle/>
-                    <a:p>
-                      <a:pPr marL="0" marR="0" lvl="0" indent="0" algn="ctr" defTabSz="914400" rtl="0" eaLnBrk="1" fontAlgn="auto" latinLnBrk="1" hangingPunct="1">
-                        <a:lnSpc>
-                          <a:spcPct val="100000"/>
-                        </a:lnSpc>
-                        <a:spcBef>
-                          <a:spcPts val="0"/>
-                        </a:spcBef>
-                        <a:spcAft>
-                          <a:spcPts val="0"/>
-                        </a:spcAft>
-                        <a:buClrTx/>
-                        <a:buSzTx/>
-                        <a:buFontTx/>
-                        <a:buNone/>
-                        <a:tabLst/>
-                        <a:defRPr/>
-                      </a:pPr>
-                      <a:r>
-                        <a:rPr lang="ko-KR" altLang="en-US" sz="3700" b="1" kern="1200">
-                          <a:solidFill>
-                            <a:schemeClr val="bg1"/>
-                          </a:solidFill>
-                          <a:latin typeface="현대하모니 L"/>
-                          <a:ea typeface="현대하모니 L" panose="02020603020101020101" pitchFamily="18" charset="-127"/>
-                          <a:cs typeface="+mn-cs"/>
-                        </a:rPr>
-                        <a:t>사진대지</a:t>
-                      </a:r>
-                    </a:p>
-                  </a:txBody>
-                  <a:tcPr marL="92882" marR="92882" marT="46441" marB="46441" anchor="ctr">
-                    <a:lnL w="12700" cap="flat" cmpd="sng" algn="ctr">
-                      <a:solidFill>
-                        <a:schemeClr val="tx1"/>
-                      </a:solidFill>
-                      <a:prstDash val="solid"/>
-                      <a:round/>
-                      <a:headEnd type="none" w="med" len="med"/>
-                      <a:tailEnd type="none" w="med" len="med"/>
-                    </a:lnL>
-                    <a:lnR w="12700" cap="flat" cmpd="sng" algn="ctr">
-                      <a:solidFill>
-                        <a:schemeClr val="tx1"/>
-                      </a:solidFill>
-                      <a:prstDash val="solid"/>
-                      <a:round/>
-                      <a:headEnd type="none" w="med" len="med"/>
-                      <a:tailEnd type="none" w="med" len="med"/>
-                    </a:lnR>
-                    <a:lnT w="12700" cap="flat" cmpd="sng" algn="ctr">
-                      <a:solidFill>
-                        <a:schemeClr val="tx1"/>
-                      </a:solidFill>
-                      <a:prstDash val="solid"/>
-                      <a:round/>
-                      <a:headEnd type="none" w="med" len="med"/>
-                      <a:tailEnd type="none" w="med" len="med"/>
-                    </a:lnT>
-                    <a:lnB w="12700" cap="flat" cmpd="sng" algn="ctr">
-                      <a:solidFill>
-                        <a:schemeClr val="tx1"/>
-                      </a:solidFill>
-                      <a:prstDash val="solid"/>
-                      <a:round/>
-                      <a:headEnd type="none" w="med" len="med"/>
-                      <a:tailEnd type="none" w="med" len="med"/>
-                    </a:lnB>
-                    <a:solidFill>
-                      <a:srgbClr val="002060"/>
-                    </a:solidFill>
-                  </a:tcPr>
-                </a:tc>
-                <a:tc hMerge="1">
-                  <a:txBody>
-                    <a:bodyPr/>
-                    <a:lstStyle/>
-                    <a:p>
-                      <a:pPr latinLnBrk="1"/>
-                      <a:endParaRPr lang="ko-KR" altLang="en-US"/>
-                    </a:p>
-                  </a:txBody>
-                  <a:tcPr>
-                    <a:lnL w="12700" cap="flat" cmpd="sng" algn="ctr">
-                      <a:solidFill>
-                        <a:schemeClr val="tx1"/>
-                      </a:solidFill>
-                      <a:prstDash val="solid"/>
-                      <a:round/>
-                      <a:headEnd type="none" w="med" len="med"/>
-                      <a:tailEnd type="none" w="med" len="med"/>
-                    </a:lnL>
-                    <a:lnR w="12700" cap="flat" cmpd="sng" algn="ctr">
-                      <a:solidFill>
-                        <a:schemeClr val="tx1"/>
-                      </a:solidFill>
-                      <a:prstDash val="solid"/>
-                      <a:round/>
-                      <a:headEnd type="none" w="med" len="med"/>
-                      <a:tailEnd type="none" w="med" len="med"/>
-                    </a:lnR>
-                    <a:lnT w="12700" cap="flat" cmpd="sng" algn="ctr">
-                      <a:solidFill>
-                        <a:schemeClr val="tx1"/>
-                      </a:solidFill>
-                      <a:prstDash val="solid"/>
-                      <a:round/>
-                      <a:headEnd type="none" w="med" len="med"/>
-                      <a:tailEnd type="none" w="med" len="med"/>
-                    </a:lnT>
-                    <a:lnB w="12700" cap="flat" cmpd="sng" algn="ctr">
-                      <a:solidFill>
-                        <a:schemeClr val="tx1"/>
-                      </a:solidFill>
-                      <a:prstDash val="solid"/>
-                      <a:round/>
-                      <a:headEnd type="none" w="med" len="med"/>
-                      <a:tailEnd type="none" w="med" len="med"/>
-                    </a:lnB>
-                  </a:tcPr>
-                </a:tc>
-                <a:extLst>
-                  <a:ext uri="{0D108BD9-81ED-4DB2-BD59-A6C34878D82A}">
-                    <a16:rowId xmlns:a16="http://schemas.microsoft.com/office/drawing/2014/main" val="3795485425"/>
-                  </a:ext>
-                </a:extLst>
-              </a:tr>
-              <a:tr h="582007">
-                <a:tc rowSpan="5">
-                  <a:txBody>
-                    <a:bodyPr/>
-                    <a:lstStyle/>
-                    <a:p>
-                      <a:pPr latinLnBrk="1"/>
-                      <a:endParaRPr lang="ko-KR" altLang="en-US" sz="2400" dirty="0"/>
-                    </a:p>
-                  </a:txBody>
-                  <a:tcPr marL="92882" marR="92882" marT="46441" marB="46441">
-                    <a:lnL w="12700" cap="flat" cmpd="sng" algn="ctr">
-                      <a:solidFill>
-                        <a:schemeClr val="tx1"/>
-                      </a:solidFill>
-                      <a:prstDash val="solid"/>
-                      <a:round/>
-                      <a:headEnd type="none" w="med" len="med"/>
-                      <a:tailEnd type="none" w="med" len="med"/>
-                    </a:lnL>
-                    <a:lnR w="12700" cap="flat" cmpd="sng" algn="ctr">
-                      <a:solidFill>
-                        <a:schemeClr val="tx1"/>
-                      </a:solidFill>
-                      <a:prstDash val="solid"/>
-                      <a:round/>
-                      <a:headEnd type="none" w="med" len="med"/>
-                      <a:tailEnd type="none" w="med" len="med"/>
-                    </a:lnR>
-                    <a:lnT w="12700" cap="flat" cmpd="sng" algn="ctr">
-                      <a:solidFill>
-                        <a:schemeClr val="tx1"/>
-                      </a:solidFill>
-                      <a:prstDash val="solid"/>
-                      <a:round/>
-                      <a:headEnd type="none" w="med" len="med"/>
-                      <a:tailEnd type="none" w="med" len="med"/>
-                    </a:lnT>
-                    <a:lnB w="12700" cap="flat" cmpd="sng" algn="ctr">
-                      <a:solidFill>
-                        <a:schemeClr val="tx1"/>
-                      </a:solidFill>
-                      <a:prstDash val="solid"/>
-                      <a:round/>
-                      <a:headEnd type="none" w="med" len="med"/>
-                      <a:tailEnd type="none" w="med" len="med"/>
-                    </a:lnB>
-                    <a:noFill/>
-                  </a:tcPr>
-                </a:tc>
-                <a:tc>
-                  <a:txBody>
-                    <a:bodyPr/>
-                    <a:lstStyle/>
-                    <a:p>
-                      <a:pPr marL="0" marR="0" lvl="0" indent="0" algn="ctr" defTabSz="914400" rtl="0" eaLnBrk="1" fontAlgn="auto" latinLnBrk="1" hangingPunct="1">
-                        <a:lnSpc>
-                          <a:spcPct val="100000"/>
-                        </a:lnSpc>
-                        <a:spcBef>
-                          <a:spcPts val="0"/>
-                        </a:spcBef>
-                        <a:spcAft>
-                          <a:spcPts val="0"/>
-                        </a:spcAft>
-                        <a:buClrTx/>
-                        <a:buSzTx/>
-                        <a:buFontTx/>
-                        <a:buNone/>
-                        <a:tabLst/>
-                        <a:defRPr/>
-                      </a:pPr>
-                      <a:r>
-                        <a:rPr lang="ko-KR" altLang="en-US" sz="3300" b="1" kern="1200" dirty="0">
-                          <a:ln>
-                            <a:solidFill>
-                              <a:prstClr val="white">
-                                <a:alpha val="0"/>
-                              </a:prstClr>
-                            </a:solidFill>
-                          </a:ln>
-                          <a:solidFill>
-                            <a:prstClr val="black"/>
-                          </a:solidFill>
-                          <a:latin typeface="현대하모니 L"/>
-                          <a:ea typeface="현대하모니 L" panose="02020603020101020101" pitchFamily="18" charset="-127"/>
-                          <a:cs typeface="+mn-cs"/>
-                        </a:rPr>
-                        <a:t>설명</a:t>
-                      </a:r>
-                      <a:r>
-                        <a:rPr lang="en-US" altLang="ko-KR" sz="3300" b="1" kern="1200" dirty="0">
-                          <a:ln>
-                            <a:solidFill>
-                              <a:prstClr val="white">
-                                <a:alpha val="0"/>
-                              </a:prstClr>
-                            </a:solidFill>
-                          </a:ln>
-                          <a:solidFill>
-                            <a:prstClr val="black"/>
-                          </a:solidFill>
-                          <a:latin typeface="현대하모니 L"/>
-                          <a:ea typeface="현대하모니 L" panose="02020603020101020101" pitchFamily="18" charset="-127"/>
-                          <a:cs typeface="+mn-cs"/>
-                        </a:rPr>
-                        <a:t>/</a:t>
-                      </a:r>
-                      <a:r>
-                        <a:rPr lang="ko-KR" altLang="en-US" sz="3300" b="0" i="0" kern="1200" dirty="0">
-                          <a:solidFill>
-                            <a:schemeClr val="dk1"/>
-                          </a:solidFill>
-                          <a:effectLst/>
-                          <a:latin typeface="+mn-lt"/>
-                          <a:ea typeface="+mn-ea"/>
-                          <a:cs typeface="+mn-cs"/>
-                        </a:rPr>
-                        <a:t>说明</a:t>
-                      </a:r>
-                      <a:endParaRPr lang="en-US" altLang="ko-KR" sz="3300" b="1" kern="1200" dirty="0">
-                        <a:ln>
-                          <a:solidFill>
-                            <a:prstClr val="white">
-                              <a:alpha val="0"/>
-                            </a:prstClr>
-                          </a:solidFill>
-                        </a:ln>
-                        <a:solidFill>
-                          <a:prstClr val="black"/>
-                        </a:solidFill>
-                        <a:latin typeface="현대하모니 L" panose="02020603020101020101" pitchFamily="18" charset="-127"/>
-                        <a:ea typeface="현대하모니 L" panose="02020603020101020101" pitchFamily="18" charset="-127"/>
-                        <a:cs typeface="+mn-cs"/>
-                      </a:endParaRPr>
-                    </a:p>
-                  </a:txBody>
-                  <a:tcPr marL="92882" marR="92882" marT="46441" marB="46441" anchor="ctr">
-                    <a:lnL w="12700" cap="flat" cmpd="sng" algn="ctr">
-                      <a:solidFill>
-                        <a:schemeClr val="tx1"/>
-                      </a:solidFill>
-                      <a:prstDash val="solid"/>
-                      <a:round/>
-                      <a:headEnd type="none" w="med" len="med"/>
-                      <a:tailEnd type="none" w="med" len="med"/>
-                    </a:lnL>
-                    <a:lnR w="12700" cap="flat" cmpd="sng" algn="ctr">
-                      <a:solidFill>
-                        <a:schemeClr val="tx1"/>
-                      </a:solidFill>
-                      <a:prstDash val="solid"/>
-                      <a:round/>
-                      <a:headEnd type="none" w="med" len="med"/>
-                      <a:tailEnd type="none" w="med" len="med"/>
-                    </a:lnR>
-                    <a:lnT w="12700" cap="flat" cmpd="sng" algn="ctr">
-                      <a:solidFill>
-                        <a:schemeClr val="tx1"/>
-                      </a:solidFill>
-                      <a:prstDash val="solid"/>
-                      <a:round/>
-                      <a:headEnd type="none" w="med" len="med"/>
-                      <a:tailEnd type="none" w="med" len="med"/>
-                    </a:lnT>
-                    <a:lnB w="12700" cap="flat" cmpd="sng" algn="ctr">
-                      <a:solidFill>
-                        <a:schemeClr val="tx1"/>
-                      </a:solidFill>
-                      <a:prstDash val="solid"/>
-                      <a:round/>
-                      <a:headEnd type="none" w="med" len="med"/>
-                      <a:tailEnd type="none" w="med" len="med"/>
-                    </a:lnB>
-                    <a:solidFill>
-                      <a:schemeClr val="accent1">
-                        <a:lumMod val="20000"/>
-                        <a:lumOff val="80000"/>
-                      </a:schemeClr>
-                    </a:solidFill>
-                  </a:tcPr>
-                </a:tc>
-                <a:extLst>
-                  <a:ext uri="{0D108BD9-81ED-4DB2-BD59-A6C34878D82A}">
-                    <a16:rowId xmlns:a16="http://schemas.microsoft.com/office/drawing/2014/main" val="1910052640"/>
-                  </a:ext>
-                </a:extLst>
-              </a:tr>
-              <a:tr h="1146175">
-                <a:tc vMerge="1">
-                  <a:txBody>
-                    <a:bodyPr/>
-                    <a:lstStyle/>
-                    <a:p>
-                      <a:pPr latinLnBrk="1"/>
-                      <a:endParaRPr lang="ko-KR" altLang="en-US"/>
-                    </a:p>
-                  </a:txBody>
-                  <a:tcPr/>
-                </a:tc>
-                <a:tc>
-                  <a:txBody>
-                    <a:bodyPr/>
-                    <a:lstStyle/>
-                    <a:p>
-                      <a:pPr algn="ctr"/>
-                      <a:r>
-                        <a:rPr sz="1800"/>
-                        <a:t>전선거치 조치, 감전 및 화재위험</a:t>
-                      </a:r>
-                    </a:p>
-                  </a:txBody>
-                  <a:tcPr marL="92882" marR="92882" marT="46441" marB="46441" anchor="ctr">
-                    <a:lnL w="12700" cap="flat" cmpd="sng" algn="ctr">
-                      <a:solidFill>
-                        <a:schemeClr val="tx1"/>
-                      </a:solidFill>
-                      <a:prstDash val="solid"/>
-                      <a:round/>
-                      <a:headEnd type="none" w="med" len="med"/>
-                      <a:tailEnd type="none" w="med" len="med"/>
-                    </a:lnL>
-                    <a:lnR w="12700" cap="flat" cmpd="sng" algn="ctr">
-                      <a:solidFill>
-                        <a:schemeClr val="tx1"/>
-                      </a:solidFill>
-                      <a:prstDash val="solid"/>
-                      <a:round/>
-                      <a:headEnd type="none" w="med" len="med"/>
-                      <a:tailEnd type="none" w="med" len="med"/>
-                    </a:lnR>
-                    <a:lnT w="12700" cap="flat" cmpd="sng" algn="ctr">
-                      <a:solidFill>
-                        <a:schemeClr val="tx1"/>
-                      </a:solidFill>
-                      <a:prstDash val="solid"/>
-                      <a:round/>
-                      <a:headEnd type="none" w="med" len="med"/>
-                      <a:tailEnd type="none" w="med" len="med"/>
-                    </a:lnT>
-                    <a:lnB w="12700" cap="flat" cmpd="sng" algn="ctr">
-                      <a:solidFill>
-                        <a:schemeClr val="tx1"/>
-                      </a:solidFill>
-                      <a:prstDash val="solid"/>
-                      <a:round/>
-                      <a:headEnd type="none" w="med" len="med"/>
-                      <a:tailEnd type="none" w="med" len="med"/>
-                    </a:lnB>
-                    <a:noFill/>
-                  </a:tcPr>
-                </a:tc>
-                <a:extLst>
-                  <a:ext uri="{0D108BD9-81ED-4DB2-BD59-A6C34878D82A}">
-                    <a16:rowId xmlns:a16="http://schemas.microsoft.com/office/drawing/2014/main" val="3538895530"/>
-                  </a:ext>
-                </a:extLst>
-              </a:tr>
-              <a:tr h="1557124">
-                <a:tc vMerge="1">
-                  <a:txBody>
-                    <a:bodyPr/>
-                    <a:lstStyle/>
-                    <a:p>
-                      <a:pPr latinLnBrk="1"/>
-                      <a:endParaRPr lang="ko-KR" altLang="en-US"/>
-                    </a:p>
-                  </a:txBody>
-                  <a:tcPr/>
-                </a:tc>
-                <a:tc>
-                  <a:txBody>
-                    <a:bodyPr/>
-                    <a:lstStyle/>
-                    <a:p>
-                      <a:pPr algn="ctr"/>
-                      <a:r>
-                        <a:rPr sz="2000"/>
-                        <a:t>电线架空管理，防触电及火灾</a:t>
-                      </a:r>
-                    </a:p>
-                  </a:txBody>
-                  <a:tcPr marL="92882" marR="92882" marT="46441" marB="46441" anchor="ctr">
-                    <a:lnL w="12700" cap="flat" cmpd="sng" algn="ctr">
-                      <a:solidFill>
-                        <a:schemeClr val="tx1"/>
-                      </a:solidFill>
-                      <a:prstDash val="solid"/>
-                      <a:round/>
-                      <a:headEnd type="none" w="med" len="med"/>
-                      <a:tailEnd type="none" w="med" len="med"/>
-                    </a:lnL>
-                    <a:lnR w="12700" cap="flat" cmpd="sng" algn="ctr">
-                      <a:solidFill>
-                        <a:schemeClr val="tx1"/>
-                      </a:solidFill>
-                      <a:prstDash val="solid"/>
-                      <a:round/>
-                      <a:headEnd type="none" w="med" len="med"/>
-                      <a:tailEnd type="none" w="med" len="med"/>
-                    </a:lnR>
-                    <a:lnT w="12700" cap="flat" cmpd="sng" algn="ctr">
-                      <a:solidFill>
-                        <a:schemeClr val="tx1"/>
-                      </a:solidFill>
-                      <a:prstDash val="solid"/>
-                      <a:round/>
-                      <a:headEnd type="none" w="med" len="med"/>
-                      <a:tailEnd type="none" w="med" len="med"/>
-                    </a:lnT>
-                    <a:lnB w="12700" cap="flat" cmpd="sng" algn="ctr">
-                      <a:solidFill>
-                        <a:schemeClr val="tx1"/>
-                      </a:solidFill>
-                      <a:prstDash val="solid"/>
-                      <a:round/>
-                      <a:headEnd type="none" w="med" len="med"/>
-                      <a:tailEnd type="none" w="med" len="med"/>
-                    </a:lnB>
-                    <a:noFill/>
-                  </a:tcPr>
-                </a:tc>
-                <a:extLst>
-                  <a:ext uri="{0D108BD9-81ED-4DB2-BD59-A6C34878D82A}">
-                    <a16:rowId xmlns:a16="http://schemas.microsoft.com/office/drawing/2014/main" val="3739360056"/>
-                  </a:ext>
-                </a:extLst>
-              </a:tr>
-              <a:tr h="1341252">
-                <a:tc vMerge="1">
-                  <a:txBody>
-                    <a:bodyPr/>
-                    <a:lstStyle/>
-                    <a:p>
-                      <a:pPr latinLnBrk="1"/>
-                      <a:endParaRPr lang="ko-KR" altLang="en-US"/>
-                    </a:p>
-                  </a:txBody>
-                  <a:tcPr/>
-                </a:tc>
-                <a:tc>
-                  <a:txBody>
-                    <a:bodyPr/>
-                    <a:lstStyle/>
-                    <a:p>
-                      <a:pPr algn="ctr"/>
-                      <a:r>
-                        <a:rPr sz="1200"/>
-                        <a:t>Treo dây điện, nguy cơ điện giật và hỏa hoạn</a:t>
-                      </a:r>
-                    </a:p>
-                  </a:txBody>
-                  <a:tcPr marL="92882" marR="92882" marT="46441" marB="46441" anchor="ctr">
-                    <a:lnL w="12700" cap="flat" cmpd="sng" algn="ctr">
-                      <a:solidFill>
-                        <a:schemeClr val="tx1"/>
-                      </a:solidFill>
-                      <a:prstDash val="solid"/>
-                      <a:round/>
-                      <a:headEnd type="none" w="med" len="med"/>
-                      <a:tailEnd type="none" w="med" len="med"/>
-                    </a:lnL>
-                    <a:lnR w="12700" cap="flat" cmpd="sng" algn="ctr">
-                      <a:solidFill>
-                        <a:schemeClr val="tx1"/>
-                      </a:solidFill>
-                      <a:prstDash val="solid"/>
-                      <a:round/>
-                      <a:headEnd type="none" w="med" len="med"/>
-                      <a:tailEnd type="none" w="med" len="med"/>
-                    </a:lnR>
-                    <a:lnT w="12700" cap="flat" cmpd="sng" algn="ctr">
-                      <a:solidFill>
-                        <a:schemeClr val="tx1"/>
-                      </a:solidFill>
-                      <a:prstDash val="solid"/>
-                      <a:round/>
-                      <a:headEnd type="none" w="med" len="med"/>
-                      <a:tailEnd type="none" w="med" len="med"/>
-                    </a:lnT>
-                    <a:lnB w="12700" cap="flat" cmpd="sng" algn="ctr">
-                      <a:solidFill>
-                        <a:schemeClr val="tx1"/>
-                      </a:solidFill>
-                      <a:prstDash val="solid"/>
-                      <a:round/>
-                      <a:headEnd type="none" w="med" len="med"/>
-                      <a:tailEnd type="none" w="med" len="med"/>
-                    </a:lnB>
-                    <a:noFill/>
-                  </a:tcPr>
-                </a:tc>
-                <a:extLst>
-                  <a:ext uri="{0D108BD9-81ED-4DB2-BD59-A6C34878D82A}">
-                    <a16:rowId xmlns:a16="http://schemas.microsoft.com/office/drawing/2014/main" val="2576126919"/>
-                  </a:ext>
-                </a:extLst>
-              </a:tr>
-              <a:tr h="1515597">
-                <a:tc vMerge="1">
-                  <a:txBody>
-                    <a:bodyPr/>
-                    <a:lstStyle/>
-                    <a:p>
-                      <a:pPr latinLnBrk="1"/>
-                      <a:endParaRPr lang="ko-KR" altLang="en-US"/>
-                    </a:p>
-                  </a:txBody>
-                  <a:tcPr/>
-                </a:tc>
-                <a:tc>
-                  <a:txBody>
-                    <a:bodyPr/>
-                    <a:lstStyle/>
-                    <a:p>
-                      <a:pPr algn="ctr"/>
-                      <a:r>
-                        <a:rPr sz="1000"/>
-                        <a:t>ဝါယာကြိုးများချိတ်ဆွဲရန်၊ ဓာတ်လိုက်မှုနှင့် မီးဘေးအန္တရာယ်</a:t>
-                      </a:r>
-                    </a:p>
-                  </a:txBody>
-                  <a:tcPr marL="88479" marR="88479" marT="44240" marB="44240" anchor="ctr">
-                    <a:lnL w="12700" cap="flat" cmpd="sng" algn="ctr">
-                      <a:solidFill>
-                        <a:schemeClr val="tx1"/>
-                      </a:solidFill>
-                      <a:prstDash val="solid"/>
-                      <a:round/>
-                      <a:headEnd type="none" w="med" len="med"/>
-                      <a:tailEnd type="none" w="med" len="med"/>
-                    </a:lnL>
-                    <a:lnR w="12700" cap="flat" cmpd="sng" algn="ctr">
-                      <a:solidFill>
-                        <a:schemeClr val="tx1"/>
-                      </a:solidFill>
-                      <a:prstDash val="solid"/>
-                      <a:round/>
-                      <a:headEnd type="none" w="med" len="med"/>
-                      <a:tailEnd type="none" w="med" len="med"/>
-                    </a:lnR>
-                    <a:lnT w="12700" cap="flat" cmpd="sng" algn="ctr">
-                      <a:solidFill>
-                        <a:schemeClr val="tx1"/>
-                      </a:solidFill>
-                      <a:prstDash val="solid"/>
-                      <a:round/>
-                      <a:headEnd type="none" w="med" len="med"/>
-                      <a:tailEnd type="none" w="med" len="med"/>
-                    </a:lnT>
-                    <a:lnB w="12700" cap="flat" cmpd="sng" algn="ctr">
-                      <a:solidFill>
-                        <a:schemeClr val="tx1"/>
-                      </a:solidFill>
-                      <a:prstDash val="solid"/>
-                      <a:round/>
-                      <a:headEnd type="none" w="med" len="med"/>
-                      <a:tailEnd type="none" w="med" len="med"/>
-                    </a:lnB>
-                    <a:noFill/>
-                  </a:tcPr>
-                </a:tc>
-                <a:extLst>
-                  <a:ext uri="{0D108BD9-81ED-4DB2-BD59-A6C34878D82A}">
-                    <a16:rowId xmlns:a16="http://schemas.microsoft.com/office/drawing/2014/main" val="2531484610"/>
-                  </a:ext>
-                </a:extLst>
-              </a:tr>
-            </a:tbl>
-          </a:graphicData>
-        </a:graphic>
-      </p:graphicFrame>
-      <p:pic>
-        <p:nvPicPr>
-          <p:cNvPr id="36" name="그림 35">
-            <a:extLst>
-              <a:ext uri="{FF2B5EF4-FFF2-40B4-BE49-F238E27FC236}">
-                <a16:creationId xmlns:a16="http://schemas.microsoft.com/office/drawing/2014/main" id="{3D908BB8-F7E3-D948-2D96-0D9ACB9A1A75}"/>
-              </a:ext>
-            </a:extLst>
-          </p:cNvPr>
-          <p:cNvPicPr>
-            <a:picLocks noChangeAspect="1"/>
-          </p:cNvPicPr>
-          <p:nvPr/>
-        </p:nvPicPr>
-        <p:blipFill>
-          <a:blip r:embed="rId3" cstate="screen">
-            <a:extLst>
-              <a:ext uri="{28A0092B-C50C-407E-A947-70E740481C1C}">
-                <a14:useLocalDpi xmlns:a14="http://schemas.microsoft.com/office/drawing/2010/main"/>
-              </a:ext>
-            </a:extLst>
-          </a:blip>
-          <a:stretch>
-            <a:fillRect/>
-          </a:stretch>
-        </p:blipFill>
-        <p:spPr>
-          <a:xfrm>
-            <a:off x="11198128" y="1446210"/>
-            <a:ext cx="993874" cy="663993"/>
-          </a:xfrm>
-          <a:prstGeom prst="rect">
-            <a:avLst/>
-          </a:prstGeom>
-        </p:spPr>
-      </p:pic>
-      <p:pic>
-        <p:nvPicPr>
-          <p:cNvPr id="40" name="그림 39">
-            <a:extLst>
-              <a:ext uri="{FF2B5EF4-FFF2-40B4-BE49-F238E27FC236}">
-                <a16:creationId xmlns:a16="http://schemas.microsoft.com/office/drawing/2014/main" id="{A127C77E-D84D-EFB3-8843-B9D1B872300A}"/>
-              </a:ext>
-            </a:extLst>
-          </p:cNvPr>
-          <p:cNvPicPr>
-            <a:picLocks noChangeAspect="1"/>
-          </p:cNvPicPr>
-          <p:nvPr/>
-        </p:nvPicPr>
-        <p:blipFill>
-          <a:blip r:embed="rId4" cstate="screen">
-            <a:extLst>
-              <a:ext uri="{28A0092B-C50C-407E-A947-70E740481C1C}">
-                <a14:useLocalDpi xmlns:a14="http://schemas.microsoft.com/office/drawing/2010/main"/>
-              </a:ext>
-            </a:extLst>
-          </a:blip>
-          <a:stretch>
-            <a:fillRect/>
-          </a:stretch>
-        </p:blipFill>
-        <p:spPr>
-          <a:xfrm>
-            <a:off x="11198128" y="2793791"/>
-            <a:ext cx="993874" cy="663435"/>
-          </a:xfrm>
-          <a:prstGeom prst="rect">
-            <a:avLst/>
-          </a:prstGeom>
-        </p:spPr>
-      </p:pic>
-      <p:pic>
-        <p:nvPicPr>
-          <p:cNvPr id="12" name="그림 11">
-            <a:extLst>
-              <a:ext uri="{FF2B5EF4-FFF2-40B4-BE49-F238E27FC236}">
-                <a16:creationId xmlns:a16="http://schemas.microsoft.com/office/drawing/2014/main" id="{B29D3E0D-ED11-D9BA-70EA-642F31BB5D0C}"/>
-              </a:ext>
-            </a:extLst>
-          </p:cNvPr>
-          <p:cNvPicPr>
-            <a:picLocks noChangeAspect="1"/>
-          </p:cNvPicPr>
-          <p:nvPr/>
-        </p:nvPicPr>
-        <p:blipFill>
-          <a:blip r:embed="rId5"/>
-          <a:stretch>
-            <a:fillRect/>
-          </a:stretch>
-        </p:blipFill>
-        <p:spPr>
-          <a:xfrm>
-            <a:off x="11198128" y="5869574"/>
-            <a:ext cx="993874" cy="663435"/>
-          </a:xfrm>
-          <a:prstGeom prst="rect">
-            <a:avLst/>
-          </a:prstGeom>
-        </p:spPr>
-      </p:pic>
-      <p:pic>
-        <p:nvPicPr>
-          <p:cNvPr id="14" name="그림 13">
-            <a:extLst>
-              <a:ext uri="{FF2B5EF4-FFF2-40B4-BE49-F238E27FC236}">
-                <a16:creationId xmlns:a16="http://schemas.microsoft.com/office/drawing/2014/main" id="{AC0776CD-ECF6-8907-D67C-4C6483F7BAAE}"/>
-              </a:ext>
-            </a:extLst>
-          </p:cNvPr>
-          <p:cNvPicPr>
-            <a:picLocks noChangeAspect="1"/>
-          </p:cNvPicPr>
-          <p:nvPr/>
-        </p:nvPicPr>
-        <p:blipFill>
-          <a:blip r:embed="rId6"/>
-          <a:stretch>
-            <a:fillRect/>
-          </a:stretch>
-        </p:blipFill>
-        <p:spPr>
-          <a:xfrm>
-            <a:off x="11198128" y="4522551"/>
-            <a:ext cx="993874" cy="663435"/>
-          </a:xfrm>
-          <a:prstGeom prst="rect">
-            <a:avLst/>
-          </a:prstGeom>
-        </p:spPr>
-      </p:pic>
-      <p:sp>
-        <p:nvSpPr>
-          <p:cNvPr id="2" name="PHOTO_BOX">
-            <a:extLst>
-              <a:ext uri="{FF2B5EF4-FFF2-40B4-BE49-F238E27FC236}">
-                <a16:creationId xmlns:a16="http://schemas.microsoft.com/office/drawing/2014/main" id="{B44843C3-DA95-1D98-2B07-F21FFDF06215}"/>
-              </a:ext>
-            </a:extLst>
-          </p:cNvPr>
-          <p:cNvSpPr/>
-          <p:nvPr/>
-        </p:nvSpPr>
-        <p:spPr>
-          <a:xfrm>
-            <a:off x="0" y="603504"/>
-            <a:ext cx="6510528" cy="6254496"/>
-          </a:xfrm>
-          <a:prstGeom prst="rect">
-            <a:avLst/>
-          </a:prstGeom>
-          <a:solidFill>
-            <a:srgbClr val="FF0000"/>
-          </a:solidFill>
-        </p:spPr>
-        <p:style>
-          <a:lnRef idx="2">
-            <a:schemeClr val="accent1">
-              <a:shade val="15000"/>
-            </a:schemeClr>
-          </a:lnRef>
-          <a:fillRef idx="1">
-            <a:schemeClr val="accent1"/>
-          </a:fillRef>
-          <a:effectRef idx="0">
-            <a:schemeClr val="accent1"/>
-          </a:effectRef>
-          <a:fontRef idx="minor">
-            <a:schemeClr val="lt1"/>
-          </a:fontRef>
-        </p:style>
-        <p:txBody>
-          <a:bodyPr rtlCol="0" anchor="ctr"/>
-          <a:lstStyle/>
-          <a:p>
-            <a:pPr algn="ctr"/>
-            <a:r>
-              <a:rPr lang="en-US" altLang="ko-KR" sz="4800" dirty="0"/>
-              <a:t>PHOTO_BOX</a:t>
-            </a:r>
-            <a:endParaRPr lang="ko-KR" altLang="en-US" sz="4800" dirty="0"/>
-          </a:p>
-        </p:txBody>
-      </p:sp>
-    </p:spTree>
-    <p:extLst>
-      <p:ext uri="{BB962C8B-B14F-4D97-AF65-F5344CB8AC3E}">
-        <p14:creationId xmlns:p14="http://schemas.microsoft.com/office/powerpoint/2010/main" val="3995206588"/>
-      </p:ext>
-    </p:extLst>
-  </p:cSld>
-  <p:clrMapOvr>
-    <a:masterClrMapping/>
-  </p:clrMapOvr>
-</p:sld>
-</file>
-
-<file path=ppt/slides/slide8.xml><?xml version="1.0" encoding="utf-8"?>
-<p:sld xmlns:a="http://schemas.openxmlformats.org/drawingml/2006/main" xmlns:r="http://schemas.openxmlformats.org/officeDocument/2006/relationships" xmlns:p="http://schemas.openxmlformats.org/presentationml/2006/main">
-  <p:cSld>
-    <p:spTree>
-      <p:nvGrpSpPr>
-        <p:cNvPr id="1" name="">
-          <a:extLst>
-            <a:ext uri="{FF2B5EF4-FFF2-40B4-BE49-F238E27FC236}">
-              <a16:creationId xmlns:a16="http://schemas.microsoft.com/office/drawing/2014/main" id="{260D040D-6B7D-AF1B-C09C-BCC53DBB131D}"/>
-            </a:ext>
-          </a:extLst>
-        </p:cNvPr>
-        <p:cNvGrpSpPr/>
-        <p:nvPr/>
-      </p:nvGrpSpPr>
-      <p:grpSpPr>
-        <a:xfrm>
-          <a:off x="0" y="0"/>
-          <a:ext cx="0" cy="0"/>
-          <a:chOff x="0" y="0"/>
-          <a:chExt cx="0" cy="0"/>
-        </a:xfrm>
-      </p:grpSpPr>
-      <p:graphicFrame>
-        <p:nvGraphicFramePr>
-          <p:cNvPr id="3" name="표 2">
-            <a:extLst>
-              <a:ext uri="{FF2B5EF4-FFF2-40B4-BE49-F238E27FC236}">
-                <a16:creationId xmlns:a16="http://schemas.microsoft.com/office/drawing/2014/main" id="{2D1392A1-75CE-D8D8-0872-1A4945A38FAB}"/>
-              </a:ext>
-            </a:extLst>
-          </p:cNvPr>
-          <p:cNvGraphicFramePr>
-            <a:graphicFrameLocks noGrp="1"/>
-          </p:cNvGraphicFramePr>
-          <p:nvPr/>
-        </p:nvGraphicFramePr>
-        <p:xfrm>
-          <a:off x="0" y="-63316"/>
-          <a:ext cx="11114069" cy="6812712"/>
-        </p:xfrm>
-        <a:graphic>
-          <a:graphicData uri="http://schemas.openxmlformats.org/drawingml/2006/table">
-            <a:tbl>
-              <a:tblPr firstRow="1" bandRow="1">
-                <a:tableStyleId>{5C22544A-7EE6-4342-B048-85BDC9FD1C3A}</a:tableStyleId>
-              </a:tblPr>
-              <a:tblGrid>
-                <a:gridCol w="6538945">
-                  <a:extLst>
-                    <a:ext uri="{9D8B030D-6E8A-4147-A177-3AD203B41FA5}">
-                      <a16:colId xmlns:a16="http://schemas.microsoft.com/office/drawing/2014/main" val="1432983574"/>
-                    </a:ext>
-                  </a:extLst>
-                </a:gridCol>
-                <a:gridCol w="4575124">
-                  <a:extLst>
-                    <a:ext uri="{9D8B030D-6E8A-4147-A177-3AD203B41FA5}">
-                      <a16:colId xmlns:a16="http://schemas.microsoft.com/office/drawing/2014/main" val="3008074637"/>
-                    </a:ext>
-                  </a:extLst>
-                </a:gridCol>
-              </a:tblGrid>
-              <a:tr h="641556">
-                <a:tc gridSpan="2">
-                  <a:txBody>
-                    <a:bodyPr/>
-                    <a:lstStyle/>
-                    <a:p>
-                      <a:pPr marL="0" marR="0" lvl="0" indent="0" algn="ctr" defTabSz="914400" rtl="0" eaLnBrk="1" fontAlgn="auto" latinLnBrk="1" hangingPunct="1">
-                        <a:lnSpc>
-                          <a:spcPct val="100000"/>
-                        </a:lnSpc>
-                        <a:spcBef>
-                          <a:spcPts val="0"/>
-                        </a:spcBef>
-                        <a:spcAft>
-                          <a:spcPts val="0"/>
-                        </a:spcAft>
-                        <a:buClrTx/>
-                        <a:buSzTx/>
-                        <a:buFontTx/>
-                        <a:buNone/>
-                        <a:tabLst/>
-                        <a:defRPr/>
-                      </a:pPr>
-                      <a:r>
-                        <a:rPr lang="ko-KR" altLang="en-US" sz="3700" b="1" kern="1200">
-                          <a:solidFill>
-                            <a:schemeClr val="bg1"/>
-                          </a:solidFill>
-                          <a:latin typeface="현대하모니 L"/>
-                          <a:ea typeface="현대하모니 L" panose="02020603020101020101" pitchFamily="18" charset="-127"/>
-                          <a:cs typeface="+mn-cs"/>
-                        </a:rPr>
-                        <a:t>사진대지</a:t>
-                      </a:r>
-                    </a:p>
-                  </a:txBody>
-                  <a:tcPr marL="92882" marR="92882" marT="46441" marB="46441" anchor="ctr">
-                    <a:lnL w="12700" cap="flat" cmpd="sng" algn="ctr">
-                      <a:solidFill>
-                        <a:schemeClr val="tx1"/>
-                      </a:solidFill>
-                      <a:prstDash val="solid"/>
-                      <a:round/>
-                      <a:headEnd type="none" w="med" len="med"/>
-                      <a:tailEnd type="none" w="med" len="med"/>
-                    </a:lnL>
-                    <a:lnR w="12700" cap="flat" cmpd="sng" algn="ctr">
-                      <a:solidFill>
-                        <a:schemeClr val="tx1"/>
-                      </a:solidFill>
-                      <a:prstDash val="solid"/>
-                      <a:round/>
-                      <a:headEnd type="none" w="med" len="med"/>
-                      <a:tailEnd type="none" w="med" len="med"/>
-                    </a:lnR>
-                    <a:lnT w="12700" cap="flat" cmpd="sng" algn="ctr">
-                      <a:solidFill>
-                        <a:schemeClr val="tx1"/>
-                      </a:solidFill>
-                      <a:prstDash val="solid"/>
-                      <a:round/>
-                      <a:headEnd type="none" w="med" len="med"/>
-                      <a:tailEnd type="none" w="med" len="med"/>
-                    </a:lnT>
-                    <a:lnB w="12700" cap="flat" cmpd="sng" algn="ctr">
-                      <a:solidFill>
-                        <a:schemeClr val="tx1"/>
-                      </a:solidFill>
-                      <a:prstDash val="solid"/>
-                      <a:round/>
-                      <a:headEnd type="none" w="med" len="med"/>
-                      <a:tailEnd type="none" w="med" len="med"/>
-                    </a:lnB>
-                    <a:solidFill>
-                      <a:srgbClr val="002060"/>
-                    </a:solidFill>
-                  </a:tcPr>
-                </a:tc>
-                <a:tc hMerge="1">
-                  <a:txBody>
-                    <a:bodyPr/>
-                    <a:lstStyle/>
-                    <a:p>
-                      <a:pPr latinLnBrk="1"/>
-                      <a:endParaRPr lang="ko-KR" altLang="en-US"/>
-                    </a:p>
-                  </a:txBody>
-                  <a:tcPr>
-                    <a:lnL w="12700" cap="flat" cmpd="sng" algn="ctr">
-                      <a:solidFill>
-                        <a:schemeClr val="tx1"/>
-                      </a:solidFill>
-                      <a:prstDash val="solid"/>
-                      <a:round/>
-                      <a:headEnd type="none" w="med" len="med"/>
-                      <a:tailEnd type="none" w="med" len="med"/>
-                    </a:lnL>
-                    <a:lnR w="12700" cap="flat" cmpd="sng" algn="ctr">
-                      <a:solidFill>
-                        <a:schemeClr val="tx1"/>
-                      </a:solidFill>
-                      <a:prstDash val="solid"/>
-                      <a:round/>
-                      <a:headEnd type="none" w="med" len="med"/>
-                      <a:tailEnd type="none" w="med" len="med"/>
-                    </a:lnR>
-                    <a:lnT w="12700" cap="flat" cmpd="sng" algn="ctr">
-                      <a:solidFill>
-                        <a:schemeClr val="tx1"/>
-                      </a:solidFill>
-                      <a:prstDash val="solid"/>
-                      <a:round/>
-                      <a:headEnd type="none" w="med" len="med"/>
-                      <a:tailEnd type="none" w="med" len="med"/>
-                    </a:lnT>
-                    <a:lnB w="12700" cap="flat" cmpd="sng" algn="ctr">
-                      <a:solidFill>
-                        <a:schemeClr val="tx1"/>
-                      </a:solidFill>
-                      <a:prstDash val="solid"/>
-                      <a:round/>
-                      <a:headEnd type="none" w="med" len="med"/>
-                      <a:tailEnd type="none" w="med" len="med"/>
-                    </a:lnB>
-                  </a:tcPr>
-                </a:tc>
-                <a:extLst>
-                  <a:ext uri="{0D108BD9-81ED-4DB2-BD59-A6C34878D82A}">
-                    <a16:rowId xmlns:a16="http://schemas.microsoft.com/office/drawing/2014/main" val="3795485425"/>
-                  </a:ext>
-                </a:extLst>
-              </a:tr>
-              <a:tr h="582007">
-                <a:tc rowSpan="5">
-                  <a:txBody>
-                    <a:bodyPr/>
-                    <a:lstStyle/>
-                    <a:p>
-                      <a:pPr latinLnBrk="1"/>
-                      <a:endParaRPr lang="ko-KR" altLang="en-US" sz="2400" dirty="0"/>
-                    </a:p>
-                  </a:txBody>
-                  <a:tcPr marL="92882" marR="92882" marT="46441" marB="46441">
-                    <a:lnL w="12700" cap="flat" cmpd="sng" algn="ctr">
-                      <a:solidFill>
-                        <a:schemeClr val="tx1"/>
-                      </a:solidFill>
-                      <a:prstDash val="solid"/>
-                      <a:round/>
-                      <a:headEnd type="none" w="med" len="med"/>
-                      <a:tailEnd type="none" w="med" len="med"/>
-                    </a:lnL>
-                    <a:lnR w="12700" cap="flat" cmpd="sng" algn="ctr">
-                      <a:solidFill>
-                        <a:schemeClr val="tx1"/>
-                      </a:solidFill>
-                      <a:prstDash val="solid"/>
-                      <a:round/>
-                      <a:headEnd type="none" w="med" len="med"/>
-                      <a:tailEnd type="none" w="med" len="med"/>
-                    </a:lnR>
-                    <a:lnT w="12700" cap="flat" cmpd="sng" algn="ctr">
-                      <a:solidFill>
-                        <a:schemeClr val="tx1"/>
-                      </a:solidFill>
-                      <a:prstDash val="solid"/>
-                      <a:round/>
-                      <a:headEnd type="none" w="med" len="med"/>
-                      <a:tailEnd type="none" w="med" len="med"/>
-                    </a:lnT>
-                    <a:lnB w="12700" cap="flat" cmpd="sng" algn="ctr">
-                      <a:solidFill>
-                        <a:schemeClr val="tx1"/>
-                      </a:solidFill>
-                      <a:prstDash val="solid"/>
-                      <a:round/>
-                      <a:headEnd type="none" w="med" len="med"/>
-                      <a:tailEnd type="none" w="med" len="med"/>
-                    </a:lnB>
-                    <a:noFill/>
-                  </a:tcPr>
-                </a:tc>
-                <a:tc>
-                  <a:txBody>
-                    <a:bodyPr/>
-                    <a:lstStyle/>
-                    <a:p>
-                      <a:pPr marL="0" marR="0" lvl="0" indent="0" algn="ctr" defTabSz="914400" rtl="0" eaLnBrk="1" fontAlgn="auto" latinLnBrk="1" hangingPunct="1">
-                        <a:lnSpc>
-                          <a:spcPct val="100000"/>
-                        </a:lnSpc>
-                        <a:spcBef>
-                          <a:spcPts val="0"/>
-                        </a:spcBef>
-                        <a:spcAft>
-                          <a:spcPts val="0"/>
-                        </a:spcAft>
-                        <a:buClrTx/>
-                        <a:buSzTx/>
-                        <a:buFontTx/>
-                        <a:buNone/>
-                        <a:tabLst/>
-                        <a:defRPr/>
-                      </a:pPr>
-                      <a:r>
-                        <a:rPr lang="ko-KR" altLang="en-US" sz="3300" b="1" kern="1200" dirty="0">
-                          <a:ln>
-                            <a:solidFill>
-                              <a:prstClr val="white">
-                                <a:alpha val="0"/>
-                              </a:prstClr>
-                            </a:solidFill>
-                          </a:ln>
-                          <a:solidFill>
-                            <a:prstClr val="black"/>
-                          </a:solidFill>
-                          <a:latin typeface="현대하모니 L"/>
-                          <a:ea typeface="현대하모니 L" panose="02020603020101020101" pitchFamily="18" charset="-127"/>
-                          <a:cs typeface="+mn-cs"/>
-                        </a:rPr>
-                        <a:t>설명</a:t>
-                      </a:r>
-                      <a:r>
-                        <a:rPr lang="en-US" altLang="ko-KR" sz="3300" b="1" kern="1200" dirty="0">
-                          <a:ln>
-                            <a:solidFill>
-                              <a:prstClr val="white">
-                                <a:alpha val="0"/>
-                              </a:prstClr>
-                            </a:solidFill>
-                          </a:ln>
-                          <a:solidFill>
-                            <a:prstClr val="black"/>
-                          </a:solidFill>
-                          <a:latin typeface="현대하모니 L"/>
-                          <a:ea typeface="현대하모니 L" panose="02020603020101020101" pitchFamily="18" charset="-127"/>
-                          <a:cs typeface="+mn-cs"/>
-                        </a:rPr>
-                        <a:t>/</a:t>
-                      </a:r>
-                      <a:r>
-                        <a:rPr lang="ko-KR" altLang="en-US" sz="3300" b="0" i="0" kern="1200" dirty="0">
-                          <a:solidFill>
-                            <a:schemeClr val="dk1"/>
-                          </a:solidFill>
-                          <a:effectLst/>
-                          <a:latin typeface="+mn-lt"/>
-                          <a:ea typeface="+mn-ea"/>
-                          <a:cs typeface="+mn-cs"/>
-                        </a:rPr>
-                        <a:t>说明</a:t>
-                      </a:r>
-                      <a:endParaRPr lang="en-US" altLang="ko-KR" sz="3300" b="1" kern="1200" dirty="0">
-                        <a:ln>
-                          <a:solidFill>
-                            <a:prstClr val="white">
-                              <a:alpha val="0"/>
-                            </a:prstClr>
-                          </a:solidFill>
-                        </a:ln>
-                        <a:solidFill>
-                          <a:prstClr val="black"/>
-                        </a:solidFill>
-                        <a:latin typeface="현대하모니 L" panose="02020603020101020101" pitchFamily="18" charset="-127"/>
-                        <a:ea typeface="현대하모니 L" panose="02020603020101020101" pitchFamily="18" charset="-127"/>
-                        <a:cs typeface="+mn-cs"/>
-                      </a:endParaRPr>
-                    </a:p>
-                  </a:txBody>
-                  <a:tcPr marL="92882" marR="92882" marT="46441" marB="46441" anchor="ctr">
-                    <a:lnL w="12700" cap="flat" cmpd="sng" algn="ctr">
-                      <a:solidFill>
-                        <a:schemeClr val="tx1"/>
-                      </a:solidFill>
-                      <a:prstDash val="solid"/>
-                      <a:round/>
-                      <a:headEnd type="none" w="med" len="med"/>
-                      <a:tailEnd type="none" w="med" len="med"/>
-                    </a:lnL>
-                    <a:lnR w="12700" cap="flat" cmpd="sng" algn="ctr">
-                      <a:solidFill>
-                        <a:schemeClr val="tx1"/>
-                      </a:solidFill>
-                      <a:prstDash val="solid"/>
-                      <a:round/>
-                      <a:headEnd type="none" w="med" len="med"/>
-                      <a:tailEnd type="none" w="med" len="med"/>
-                    </a:lnR>
-                    <a:lnT w="12700" cap="flat" cmpd="sng" algn="ctr">
-                      <a:solidFill>
-                        <a:schemeClr val="tx1"/>
-                      </a:solidFill>
-                      <a:prstDash val="solid"/>
-                      <a:round/>
-                      <a:headEnd type="none" w="med" len="med"/>
-                      <a:tailEnd type="none" w="med" len="med"/>
-                    </a:lnT>
-                    <a:lnB w="12700" cap="flat" cmpd="sng" algn="ctr">
-                      <a:solidFill>
-                        <a:schemeClr val="tx1"/>
-                      </a:solidFill>
-                      <a:prstDash val="solid"/>
-                      <a:round/>
-                      <a:headEnd type="none" w="med" len="med"/>
-                      <a:tailEnd type="none" w="med" len="med"/>
-                    </a:lnB>
-                    <a:solidFill>
-                      <a:schemeClr val="accent1">
-                        <a:lumMod val="20000"/>
-                        <a:lumOff val="80000"/>
-                      </a:schemeClr>
-                    </a:solidFill>
-                  </a:tcPr>
-                </a:tc>
-                <a:extLst>
-                  <a:ext uri="{0D108BD9-81ED-4DB2-BD59-A6C34878D82A}">
-                    <a16:rowId xmlns:a16="http://schemas.microsoft.com/office/drawing/2014/main" val="1910052640"/>
-                  </a:ext>
-                </a:extLst>
-              </a:tr>
-              <a:tr h="1146175">
-                <a:tc vMerge="1">
-                  <a:txBody>
-                    <a:bodyPr/>
-                    <a:lstStyle/>
-                    <a:p>
-                      <a:pPr latinLnBrk="1"/>
-                      <a:endParaRPr lang="ko-KR" altLang="en-US"/>
-                    </a:p>
-                  </a:txBody>
-                  <a:tcPr/>
-                </a:tc>
-                <a:tc>
-                  <a:txBody>
-                    <a:bodyPr/>
-                    <a:lstStyle/>
-                    <a:p>
-                      <a:pPr algn="ctr"/>
-                      <a:r>
-                        <a:rPr sz="1800"/>
-                        <a:t>전선거치 조치, 감전 및 화재위험</a:t>
-                      </a:r>
-                    </a:p>
-                  </a:txBody>
-                  <a:tcPr marL="92882" marR="92882" marT="46441" marB="46441" anchor="ctr">
-                    <a:lnL w="12700" cap="flat" cmpd="sng" algn="ctr">
-                      <a:solidFill>
-                        <a:schemeClr val="tx1"/>
-                      </a:solidFill>
-                      <a:prstDash val="solid"/>
-                      <a:round/>
-                      <a:headEnd type="none" w="med" len="med"/>
-                      <a:tailEnd type="none" w="med" len="med"/>
-                    </a:lnL>
-                    <a:lnR w="12700" cap="flat" cmpd="sng" algn="ctr">
-                      <a:solidFill>
-                        <a:schemeClr val="tx1"/>
-                      </a:solidFill>
-                      <a:prstDash val="solid"/>
-                      <a:round/>
-                      <a:headEnd type="none" w="med" len="med"/>
-                      <a:tailEnd type="none" w="med" len="med"/>
-                    </a:lnR>
-                    <a:lnT w="12700" cap="flat" cmpd="sng" algn="ctr">
-                      <a:solidFill>
-                        <a:schemeClr val="tx1"/>
-                      </a:solidFill>
-                      <a:prstDash val="solid"/>
-                      <a:round/>
-                      <a:headEnd type="none" w="med" len="med"/>
-                      <a:tailEnd type="none" w="med" len="med"/>
-                    </a:lnT>
-                    <a:lnB w="12700" cap="flat" cmpd="sng" algn="ctr">
-                      <a:solidFill>
-                        <a:schemeClr val="tx1"/>
-                      </a:solidFill>
-                      <a:prstDash val="solid"/>
-                      <a:round/>
-                      <a:headEnd type="none" w="med" len="med"/>
-                      <a:tailEnd type="none" w="med" len="med"/>
-                    </a:lnB>
-                    <a:noFill/>
-                  </a:tcPr>
-                </a:tc>
-                <a:extLst>
-                  <a:ext uri="{0D108BD9-81ED-4DB2-BD59-A6C34878D82A}">
-                    <a16:rowId xmlns:a16="http://schemas.microsoft.com/office/drawing/2014/main" val="3538895530"/>
-                  </a:ext>
-                </a:extLst>
-              </a:tr>
-              <a:tr h="1557124">
-                <a:tc vMerge="1">
-                  <a:txBody>
-                    <a:bodyPr/>
-                    <a:lstStyle/>
-                    <a:p>
-                      <a:pPr latinLnBrk="1"/>
-                      <a:endParaRPr lang="ko-KR" altLang="en-US"/>
-                    </a:p>
-                  </a:txBody>
-                  <a:tcPr/>
-                </a:tc>
-                <a:tc>
-                  <a:txBody>
-                    <a:bodyPr/>
-                    <a:lstStyle/>
-                    <a:p>
-                      <a:pPr algn="ctr"/>
-                      <a:r>
-                        <a:rPr sz="2000"/>
-                        <a:t>电线架空管理，防触电及火灾</a:t>
-                      </a:r>
-                    </a:p>
-                  </a:txBody>
-                  <a:tcPr marL="92882" marR="92882" marT="46441" marB="46441" anchor="ctr">
-                    <a:lnL w="12700" cap="flat" cmpd="sng" algn="ctr">
-                      <a:solidFill>
-                        <a:schemeClr val="tx1"/>
-                      </a:solidFill>
-                      <a:prstDash val="solid"/>
-                      <a:round/>
-                      <a:headEnd type="none" w="med" len="med"/>
-                      <a:tailEnd type="none" w="med" len="med"/>
-                    </a:lnL>
-                    <a:lnR w="12700" cap="flat" cmpd="sng" algn="ctr">
-                      <a:solidFill>
-                        <a:schemeClr val="tx1"/>
-                      </a:solidFill>
-                      <a:prstDash val="solid"/>
-                      <a:round/>
-                      <a:headEnd type="none" w="med" len="med"/>
-                      <a:tailEnd type="none" w="med" len="med"/>
-                    </a:lnR>
-                    <a:lnT w="12700" cap="flat" cmpd="sng" algn="ctr">
-                      <a:solidFill>
-                        <a:schemeClr val="tx1"/>
-                      </a:solidFill>
-                      <a:prstDash val="solid"/>
-                      <a:round/>
-                      <a:headEnd type="none" w="med" len="med"/>
-                      <a:tailEnd type="none" w="med" len="med"/>
-                    </a:lnT>
-                    <a:lnB w="12700" cap="flat" cmpd="sng" algn="ctr">
-                      <a:solidFill>
-                        <a:schemeClr val="tx1"/>
-                      </a:solidFill>
-                      <a:prstDash val="solid"/>
-                      <a:round/>
-                      <a:headEnd type="none" w="med" len="med"/>
-                      <a:tailEnd type="none" w="med" len="med"/>
-                    </a:lnB>
-                    <a:noFill/>
-                  </a:tcPr>
-                </a:tc>
-                <a:extLst>
-                  <a:ext uri="{0D108BD9-81ED-4DB2-BD59-A6C34878D82A}">
-                    <a16:rowId xmlns:a16="http://schemas.microsoft.com/office/drawing/2014/main" val="3739360056"/>
-                  </a:ext>
-                </a:extLst>
-              </a:tr>
-              <a:tr h="1341252">
-                <a:tc vMerge="1">
-                  <a:txBody>
-                    <a:bodyPr/>
-                    <a:lstStyle/>
-                    <a:p>
-                      <a:pPr latinLnBrk="1"/>
-                      <a:endParaRPr lang="ko-KR" altLang="en-US"/>
-                    </a:p>
-                  </a:txBody>
-                  <a:tcPr/>
-                </a:tc>
-                <a:tc>
-                  <a:txBody>
-                    <a:bodyPr/>
-                    <a:lstStyle/>
-                    <a:p>
-                      <a:pPr algn="ctr"/>
-                      <a:r>
-                        <a:rPr sz="1200"/>
-                        <a:t>Treo dây điện, nguy cơ điện giật và hỏa hoạn</a:t>
-                      </a:r>
-                    </a:p>
-                  </a:txBody>
-                  <a:tcPr marL="92882" marR="92882" marT="46441" marB="46441" anchor="ctr">
-                    <a:lnL w="12700" cap="flat" cmpd="sng" algn="ctr">
-                      <a:solidFill>
-                        <a:schemeClr val="tx1"/>
-                      </a:solidFill>
-                      <a:prstDash val="solid"/>
-                      <a:round/>
-                      <a:headEnd type="none" w="med" len="med"/>
-                      <a:tailEnd type="none" w="med" len="med"/>
-                    </a:lnL>
-                    <a:lnR w="12700" cap="flat" cmpd="sng" algn="ctr">
-                      <a:solidFill>
-                        <a:schemeClr val="tx1"/>
-                      </a:solidFill>
-                      <a:prstDash val="solid"/>
-                      <a:round/>
-                      <a:headEnd type="none" w="med" len="med"/>
-                      <a:tailEnd type="none" w="med" len="med"/>
-                    </a:lnR>
-                    <a:lnT w="12700" cap="flat" cmpd="sng" algn="ctr">
-                      <a:solidFill>
-                        <a:schemeClr val="tx1"/>
-                      </a:solidFill>
-                      <a:prstDash val="solid"/>
-                      <a:round/>
-                      <a:headEnd type="none" w="med" len="med"/>
-                      <a:tailEnd type="none" w="med" len="med"/>
-                    </a:lnT>
-                    <a:lnB w="12700" cap="flat" cmpd="sng" algn="ctr">
-                      <a:solidFill>
-                        <a:schemeClr val="tx1"/>
-                      </a:solidFill>
-                      <a:prstDash val="solid"/>
-                      <a:round/>
-                      <a:headEnd type="none" w="med" len="med"/>
-                      <a:tailEnd type="none" w="med" len="med"/>
-                    </a:lnB>
-                    <a:noFill/>
-                  </a:tcPr>
-                </a:tc>
-                <a:extLst>
-                  <a:ext uri="{0D108BD9-81ED-4DB2-BD59-A6C34878D82A}">
-                    <a16:rowId xmlns:a16="http://schemas.microsoft.com/office/drawing/2014/main" val="2576126919"/>
-                  </a:ext>
-                </a:extLst>
-              </a:tr>
-              <a:tr h="1515597">
-                <a:tc vMerge="1">
-                  <a:txBody>
-                    <a:bodyPr/>
-                    <a:lstStyle/>
-                    <a:p>
-                      <a:pPr latinLnBrk="1"/>
-                      <a:endParaRPr lang="ko-KR" altLang="en-US"/>
-                    </a:p>
-                  </a:txBody>
-                  <a:tcPr/>
-                </a:tc>
-                <a:tc>
-                  <a:txBody>
-                    <a:bodyPr/>
-                    <a:lstStyle/>
-                    <a:p>
-                      <a:pPr algn="ctr"/>
-                      <a:r>
-                        <a:rPr sz="1000"/>
-                        <a:t>ဝါယာကြိုးများချိတ်ဆွဲရန်၊ ဓာတ်လိုက်မှုနှင့် မီးဘေးအန္တရာယ်</a:t>
-                      </a:r>
-                    </a:p>
-                  </a:txBody>
-                  <a:tcPr marL="88479" marR="88479" marT="44240" marB="44240" anchor="ctr">
-                    <a:lnL w="12700" cap="flat" cmpd="sng" algn="ctr">
-                      <a:solidFill>
-                        <a:schemeClr val="tx1"/>
-                      </a:solidFill>
-                      <a:prstDash val="solid"/>
-                      <a:round/>
-                      <a:headEnd type="none" w="med" len="med"/>
-                      <a:tailEnd type="none" w="med" len="med"/>
-                    </a:lnL>
-                    <a:lnR w="12700" cap="flat" cmpd="sng" algn="ctr">
-                      <a:solidFill>
-                        <a:schemeClr val="tx1"/>
-                      </a:solidFill>
-                      <a:prstDash val="solid"/>
-                      <a:round/>
-                      <a:headEnd type="none" w="med" len="med"/>
-                      <a:tailEnd type="none" w="med" len="med"/>
-                    </a:lnR>
-                    <a:lnT w="12700" cap="flat" cmpd="sng" algn="ctr">
-                      <a:solidFill>
-                        <a:schemeClr val="tx1"/>
-                      </a:solidFill>
-                      <a:prstDash val="solid"/>
-                      <a:round/>
-                      <a:headEnd type="none" w="med" len="med"/>
-                      <a:tailEnd type="none" w="med" len="med"/>
-                    </a:lnT>
-                    <a:lnB w="12700" cap="flat" cmpd="sng" algn="ctr">
-                      <a:solidFill>
-                        <a:schemeClr val="tx1"/>
-                      </a:solidFill>
-                      <a:prstDash val="solid"/>
-                      <a:round/>
-                      <a:headEnd type="none" w="med" len="med"/>
-                      <a:tailEnd type="none" w="med" len="med"/>
-                    </a:lnB>
-                    <a:noFill/>
-                  </a:tcPr>
-                </a:tc>
-                <a:extLst>
-                  <a:ext uri="{0D108BD9-81ED-4DB2-BD59-A6C34878D82A}">
-                    <a16:rowId xmlns:a16="http://schemas.microsoft.com/office/drawing/2014/main" val="2531484610"/>
-                  </a:ext>
-                </a:extLst>
-              </a:tr>
-            </a:tbl>
-          </a:graphicData>
-        </a:graphic>
-      </p:graphicFrame>
-      <p:pic>
-        <p:nvPicPr>
-          <p:cNvPr id="36" name="그림 35">
-            <a:extLst>
-              <a:ext uri="{FF2B5EF4-FFF2-40B4-BE49-F238E27FC236}">
-                <a16:creationId xmlns:a16="http://schemas.microsoft.com/office/drawing/2014/main" id="{B0254899-5AEE-D866-580F-47725F8952FF}"/>
-              </a:ext>
-            </a:extLst>
-          </p:cNvPr>
-          <p:cNvPicPr>
-            <a:picLocks noChangeAspect="1"/>
-          </p:cNvPicPr>
-          <p:nvPr/>
-        </p:nvPicPr>
-        <p:blipFill>
-          <a:blip r:embed="rId3" cstate="screen">
-            <a:extLst>
-              <a:ext uri="{28A0092B-C50C-407E-A947-70E740481C1C}">
-                <a14:useLocalDpi xmlns:a14="http://schemas.microsoft.com/office/drawing/2010/main"/>
-              </a:ext>
-            </a:extLst>
-          </a:blip>
-          <a:stretch>
-            <a:fillRect/>
-          </a:stretch>
-        </p:blipFill>
-        <p:spPr>
-          <a:xfrm>
-            <a:off x="11198128" y="1446210"/>
-            <a:ext cx="993874" cy="663993"/>
-          </a:xfrm>
-          <a:prstGeom prst="rect">
-            <a:avLst/>
-          </a:prstGeom>
-        </p:spPr>
-      </p:pic>
-      <p:pic>
-        <p:nvPicPr>
-          <p:cNvPr id="40" name="그림 39">
-            <a:extLst>
-              <a:ext uri="{FF2B5EF4-FFF2-40B4-BE49-F238E27FC236}">
-                <a16:creationId xmlns:a16="http://schemas.microsoft.com/office/drawing/2014/main" id="{89C781A2-A016-DBAF-A4FC-517FC2211989}"/>
-              </a:ext>
-            </a:extLst>
-          </p:cNvPr>
-          <p:cNvPicPr>
-            <a:picLocks noChangeAspect="1"/>
-          </p:cNvPicPr>
-          <p:nvPr/>
-        </p:nvPicPr>
-        <p:blipFill>
-          <a:blip r:embed="rId4" cstate="screen">
-            <a:extLst>
-              <a:ext uri="{28A0092B-C50C-407E-A947-70E740481C1C}">
-                <a14:useLocalDpi xmlns:a14="http://schemas.microsoft.com/office/drawing/2010/main"/>
-              </a:ext>
-            </a:extLst>
-          </a:blip>
-          <a:stretch>
-            <a:fillRect/>
-          </a:stretch>
-        </p:blipFill>
-        <p:spPr>
-          <a:xfrm>
-            <a:off x="11198128" y="2793791"/>
-            <a:ext cx="993874" cy="663435"/>
-          </a:xfrm>
-          <a:prstGeom prst="rect">
-            <a:avLst/>
-          </a:prstGeom>
-        </p:spPr>
-      </p:pic>
-      <p:pic>
-        <p:nvPicPr>
-          <p:cNvPr id="12" name="그림 11">
-            <a:extLst>
-              <a:ext uri="{FF2B5EF4-FFF2-40B4-BE49-F238E27FC236}">
-                <a16:creationId xmlns:a16="http://schemas.microsoft.com/office/drawing/2014/main" id="{D840A370-8BB2-B1C9-E544-EB7BBAA68CFC}"/>
-              </a:ext>
-            </a:extLst>
-          </p:cNvPr>
-          <p:cNvPicPr>
-            <a:picLocks noChangeAspect="1"/>
-          </p:cNvPicPr>
-          <p:nvPr/>
-        </p:nvPicPr>
-        <p:blipFill>
-          <a:blip r:embed="rId5"/>
-          <a:stretch>
-            <a:fillRect/>
-          </a:stretch>
-        </p:blipFill>
-        <p:spPr>
-          <a:xfrm>
-            <a:off x="11198128" y="5869574"/>
-            <a:ext cx="993874" cy="663435"/>
-          </a:xfrm>
-          <a:prstGeom prst="rect">
-            <a:avLst/>
-          </a:prstGeom>
-        </p:spPr>
-      </p:pic>
-      <p:pic>
-        <p:nvPicPr>
-          <p:cNvPr id="14" name="그림 13">
-            <a:extLst>
-              <a:ext uri="{FF2B5EF4-FFF2-40B4-BE49-F238E27FC236}">
-                <a16:creationId xmlns:a16="http://schemas.microsoft.com/office/drawing/2014/main" id="{76FBE4ED-E7B6-6773-392D-4510B0529F36}"/>
-              </a:ext>
-            </a:extLst>
-          </p:cNvPr>
-          <p:cNvPicPr>
-            <a:picLocks noChangeAspect="1"/>
-          </p:cNvPicPr>
-          <p:nvPr/>
-        </p:nvPicPr>
-        <p:blipFill>
-          <a:blip r:embed="rId6"/>
-          <a:stretch>
-            <a:fillRect/>
-          </a:stretch>
-        </p:blipFill>
-        <p:spPr>
-          <a:xfrm>
-            <a:off x="11198128" y="4522551"/>
-            <a:ext cx="993874" cy="663435"/>
-          </a:xfrm>
-          <a:prstGeom prst="rect">
-            <a:avLst/>
-          </a:prstGeom>
-        </p:spPr>
-      </p:pic>
-      <p:sp>
-        <p:nvSpPr>
-          <p:cNvPr id="2" name="PHOTO_BOX">
-            <a:extLst>
-              <a:ext uri="{FF2B5EF4-FFF2-40B4-BE49-F238E27FC236}">
-                <a16:creationId xmlns:a16="http://schemas.microsoft.com/office/drawing/2014/main" id="{24170630-8C66-E4D2-B096-E456808716DE}"/>
-              </a:ext>
-            </a:extLst>
-          </p:cNvPr>
-          <p:cNvSpPr/>
-          <p:nvPr/>
-        </p:nvSpPr>
-        <p:spPr>
-          <a:xfrm>
-            <a:off x="0" y="603504"/>
-            <a:ext cx="6510528" cy="6254496"/>
-          </a:xfrm>
-          <a:prstGeom prst="rect">
-            <a:avLst/>
-          </a:prstGeom>
-          <a:solidFill>
-            <a:srgbClr val="FF0000"/>
-          </a:solidFill>
-        </p:spPr>
-        <p:style>
-          <a:lnRef idx="2">
-            <a:schemeClr val="accent1">
-              <a:shade val="15000"/>
-            </a:schemeClr>
-          </a:lnRef>
-          <a:fillRef idx="1">
-            <a:schemeClr val="accent1"/>
-          </a:fillRef>
-          <a:effectRef idx="0">
-            <a:schemeClr val="accent1"/>
-          </a:effectRef>
-          <a:fontRef idx="minor">
-            <a:schemeClr val="lt1"/>
-          </a:fontRef>
-        </p:style>
-        <p:txBody>
-          <a:bodyPr rtlCol="0" anchor="ctr"/>
-          <a:lstStyle/>
-          <a:p>
-            <a:pPr algn="ctr"/>
-            <a:r>
-              <a:rPr lang="en-US" altLang="ko-KR" sz="4800" dirty="0"/>
-              <a:t>PHOTO_BOX</a:t>
-            </a:r>
-            <a:endParaRPr lang="ko-KR" altLang="en-US" sz="4800" dirty="0"/>
-          </a:p>
-        </p:txBody>
-      </p:sp>
-    </p:spTree>
-    <p:extLst>
-      <p:ext uri="{BB962C8B-B14F-4D97-AF65-F5344CB8AC3E}">
-        <p14:creationId xmlns:p14="http://schemas.microsoft.com/office/powerpoint/2010/main" val="2487187384"/>
-      </p:ext>
-    </p:extLst>
-  </p:cSld>
-  <p:clrMapOvr>
-    <a:masterClrMapping/>
-  </p:clrMapOvr>
-</p:sld>
-</file>
-
-<file path=ppt/slides/slide9.xml><?xml version="1.0" encoding="utf-8"?>
-<p:sld xmlns:a="http://schemas.openxmlformats.org/drawingml/2006/main" xmlns:r="http://schemas.openxmlformats.org/officeDocument/2006/relationships" xmlns:p="http://schemas.openxmlformats.org/presentationml/2006/main">
-  <p:cSld>
-    <p:spTree>
-      <p:nvGrpSpPr>
-        <p:cNvPr id="1" name="">
-          <a:extLst>
-            <a:ext uri="{FF2B5EF4-FFF2-40B4-BE49-F238E27FC236}">
-              <a16:creationId xmlns:a16="http://schemas.microsoft.com/office/drawing/2014/main" id="{86C1B53A-6F91-6E86-AF06-EE07D1A75E05}"/>
-            </a:ext>
-          </a:extLst>
-        </p:cNvPr>
-        <p:cNvGrpSpPr/>
-        <p:nvPr/>
-      </p:nvGrpSpPr>
-      <p:grpSpPr>
-        <a:xfrm>
-          <a:off x="0" y="0"/>
-          <a:ext cx="0" cy="0"/>
-          <a:chOff x="0" y="0"/>
-          <a:chExt cx="0" cy="0"/>
-        </a:xfrm>
-      </p:grpSpPr>
-      <p:graphicFrame>
-        <p:nvGraphicFramePr>
-          <p:cNvPr id="3" name="표 2">
-            <a:extLst>
-              <a:ext uri="{FF2B5EF4-FFF2-40B4-BE49-F238E27FC236}">
-                <a16:creationId xmlns:a16="http://schemas.microsoft.com/office/drawing/2014/main" id="{A792FEA4-1818-07A0-278F-F5B908C55499}"/>
-              </a:ext>
-            </a:extLst>
-          </p:cNvPr>
-          <p:cNvGraphicFramePr>
-            <a:graphicFrameLocks noGrp="1"/>
-          </p:cNvGraphicFramePr>
-          <p:nvPr/>
-        </p:nvGraphicFramePr>
-        <p:xfrm>
-          <a:off x="0" y="-63316"/>
-          <a:ext cx="11114069" cy="6812712"/>
-        </p:xfrm>
-        <a:graphic>
-          <a:graphicData uri="http://schemas.openxmlformats.org/drawingml/2006/table">
-            <a:tbl>
-              <a:tblPr firstRow="1" bandRow="1">
-                <a:tableStyleId>{5C22544A-7EE6-4342-B048-85BDC9FD1C3A}</a:tableStyleId>
-              </a:tblPr>
-              <a:tblGrid>
-                <a:gridCol w="6538945">
-                  <a:extLst>
-                    <a:ext uri="{9D8B030D-6E8A-4147-A177-3AD203B41FA5}">
-                      <a16:colId xmlns:a16="http://schemas.microsoft.com/office/drawing/2014/main" val="1432983574"/>
-                    </a:ext>
-                  </a:extLst>
-                </a:gridCol>
-                <a:gridCol w="4575124">
-                  <a:extLst>
-                    <a:ext uri="{9D8B030D-6E8A-4147-A177-3AD203B41FA5}">
-                      <a16:colId xmlns:a16="http://schemas.microsoft.com/office/drawing/2014/main" val="3008074637"/>
-                    </a:ext>
-                  </a:extLst>
-                </a:gridCol>
-              </a:tblGrid>
-              <a:tr h="641556">
-                <a:tc gridSpan="2">
-                  <a:txBody>
-                    <a:bodyPr/>
-                    <a:lstStyle/>
-                    <a:p>
-                      <a:pPr marL="0" marR="0" lvl="0" indent="0" algn="ctr" defTabSz="914400" rtl="0" eaLnBrk="1" fontAlgn="auto" latinLnBrk="1" hangingPunct="1">
-                        <a:lnSpc>
-                          <a:spcPct val="100000"/>
-                        </a:lnSpc>
-                        <a:spcBef>
-                          <a:spcPts val="0"/>
-                        </a:spcBef>
-                        <a:spcAft>
-                          <a:spcPts val="0"/>
-                        </a:spcAft>
-                        <a:buClrTx/>
-                        <a:buSzTx/>
-                        <a:buFontTx/>
-                        <a:buNone/>
-                        <a:tabLst/>
-                        <a:defRPr/>
-                      </a:pPr>
-                      <a:r>
-                        <a:rPr lang="ko-KR" altLang="en-US" sz="3700" b="1" kern="1200">
-                          <a:solidFill>
-                            <a:schemeClr val="bg1"/>
-                          </a:solidFill>
-                          <a:latin typeface="현대하모니 L"/>
-                          <a:ea typeface="현대하모니 L" panose="02020603020101020101" pitchFamily="18" charset="-127"/>
-                          <a:cs typeface="+mn-cs"/>
-                        </a:rPr>
-                        <a:t>사진대지</a:t>
-                      </a:r>
-                    </a:p>
-                  </a:txBody>
-                  <a:tcPr marL="92882" marR="92882" marT="46441" marB="46441" anchor="ctr">
-                    <a:lnL w="12700" cap="flat" cmpd="sng" algn="ctr">
-                      <a:solidFill>
-                        <a:schemeClr val="tx1"/>
-                      </a:solidFill>
-                      <a:prstDash val="solid"/>
-                      <a:round/>
-                      <a:headEnd type="none" w="med" len="med"/>
-                      <a:tailEnd type="none" w="med" len="med"/>
-                    </a:lnL>
-                    <a:lnR w="12700" cap="flat" cmpd="sng" algn="ctr">
-                      <a:solidFill>
-                        <a:schemeClr val="tx1"/>
-                      </a:solidFill>
-                      <a:prstDash val="solid"/>
-                      <a:round/>
-                      <a:headEnd type="none" w="med" len="med"/>
-                      <a:tailEnd type="none" w="med" len="med"/>
-                    </a:lnR>
-                    <a:lnT w="12700" cap="flat" cmpd="sng" algn="ctr">
-                      <a:solidFill>
-                        <a:schemeClr val="tx1"/>
-                      </a:solidFill>
-                      <a:prstDash val="solid"/>
-                      <a:round/>
-                      <a:headEnd type="none" w="med" len="med"/>
-                      <a:tailEnd type="none" w="med" len="med"/>
-                    </a:lnT>
-                    <a:lnB w="12700" cap="flat" cmpd="sng" algn="ctr">
-                      <a:solidFill>
-                        <a:schemeClr val="tx1"/>
-                      </a:solidFill>
-                      <a:prstDash val="solid"/>
-                      <a:round/>
-                      <a:headEnd type="none" w="med" len="med"/>
-                      <a:tailEnd type="none" w="med" len="med"/>
-                    </a:lnB>
-                    <a:solidFill>
-                      <a:srgbClr val="002060"/>
-                    </a:solidFill>
-                  </a:tcPr>
-                </a:tc>
-                <a:tc hMerge="1">
-                  <a:txBody>
-                    <a:bodyPr/>
-                    <a:lstStyle/>
-                    <a:p>
-                      <a:pPr latinLnBrk="1"/>
-                      <a:endParaRPr lang="ko-KR" altLang="en-US"/>
-                    </a:p>
-                  </a:txBody>
-                  <a:tcPr>
-                    <a:lnL w="12700" cap="flat" cmpd="sng" algn="ctr">
-                      <a:solidFill>
-                        <a:schemeClr val="tx1"/>
-                      </a:solidFill>
-                      <a:prstDash val="solid"/>
-                      <a:round/>
-                      <a:headEnd type="none" w="med" len="med"/>
-                      <a:tailEnd type="none" w="med" len="med"/>
-                    </a:lnL>
-                    <a:lnR w="12700" cap="flat" cmpd="sng" algn="ctr">
-                      <a:solidFill>
-                        <a:schemeClr val="tx1"/>
-                      </a:solidFill>
-                      <a:prstDash val="solid"/>
-                      <a:round/>
-                      <a:headEnd type="none" w="med" len="med"/>
-                      <a:tailEnd type="none" w="med" len="med"/>
-                    </a:lnR>
-                    <a:lnT w="12700" cap="flat" cmpd="sng" algn="ctr">
-                      <a:solidFill>
-                        <a:schemeClr val="tx1"/>
-                      </a:solidFill>
-                      <a:prstDash val="solid"/>
-                      <a:round/>
-                      <a:headEnd type="none" w="med" len="med"/>
-                      <a:tailEnd type="none" w="med" len="med"/>
-                    </a:lnT>
-                    <a:lnB w="12700" cap="flat" cmpd="sng" algn="ctr">
-                      <a:solidFill>
-                        <a:schemeClr val="tx1"/>
-                      </a:solidFill>
-                      <a:prstDash val="solid"/>
-                      <a:round/>
-                      <a:headEnd type="none" w="med" len="med"/>
-                      <a:tailEnd type="none" w="med" len="med"/>
-                    </a:lnB>
-                  </a:tcPr>
-                </a:tc>
-                <a:extLst>
-                  <a:ext uri="{0D108BD9-81ED-4DB2-BD59-A6C34878D82A}">
-                    <a16:rowId xmlns:a16="http://schemas.microsoft.com/office/drawing/2014/main" val="3795485425"/>
-                  </a:ext>
-                </a:extLst>
-              </a:tr>
-              <a:tr h="582007">
-                <a:tc rowSpan="5">
-                  <a:txBody>
-                    <a:bodyPr/>
-                    <a:lstStyle/>
-                    <a:p>
-                      <a:pPr latinLnBrk="1"/>
-                      <a:endParaRPr lang="ko-KR" altLang="en-US" sz="2400" dirty="0"/>
-                    </a:p>
-                  </a:txBody>
-                  <a:tcPr marL="92882" marR="92882" marT="46441" marB="46441">
-                    <a:lnL w="12700" cap="flat" cmpd="sng" algn="ctr">
-                      <a:solidFill>
-                        <a:schemeClr val="tx1"/>
-                      </a:solidFill>
-                      <a:prstDash val="solid"/>
-                      <a:round/>
-                      <a:headEnd type="none" w="med" len="med"/>
-                      <a:tailEnd type="none" w="med" len="med"/>
-                    </a:lnL>
-                    <a:lnR w="12700" cap="flat" cmpd="sng" algn="ctr">
-                      <a:solidFill>
-                        <a:schemeClr val="tx1"/>
-                      </a:solidFill>
-                      <a:prstDash val="solid"/>
-                      <a:round/>
-                      <a:headEnd type="none" w="med" len="med"/>
-                      <a:tailEnd type="none" w="med" len="med"/>
-                    </a:lnR>
-                    <a:lnT w="12700" cap="flat" cmpd="sng" algn="ctr">
-                      <a:solidFill>
-                        <a:schemeClr val="tx1"/>
-                      </a:solidFill>
-                      <a:prstDash val="solid"/>
-                      <a:round/>
-                      <a:headEnd type="none" w="med" len="med"/>
-                      <a:tailEnd type="none" w="med" len="med"/>
-                    </a:lnT>
-                    <a:lnB w="12700" cap="flat" cmpd="sng" algn="ctr">
-                      <a:solidFill>
-                        <a:schemeClr val="tx1"/>
-                      </a:solidFill>
-                      <a:prstDash val="solid"/>
-                      <a:round/>
-                      <a:headEnd type="none" w="med" len="med"/>
-                      <a:tailEnd type="none" w="med" len="med"/>
-                    </a:lnB>
-                    <a:noFill/>
-                  </a:tcPr>
-                </a:tc>
-                <a:tc>
-                  <a:txBody>
-                    <a:bodyPr/>
-                    <a:lstStyle/>
-                    <a:p>
-                      <a:pPr marL="0" marR="0" lvl="0" indent="0" algn="ctr" defTabSz="914400" rtl="0" eaLnBrk="1" fontAlgn="auto" latinLnBrk="1" hangingPunct="1">
-                        <a:lnSpc>
-                          <a:spcPct val="100000"/>
-                        </a:lnSpc>
-                        <a:spcBef>
-                          <a:spcPts val="0"/>
-                        </a:spcBef>
-                        <a:spcAft>
-                          <a:spcPts val="0"/>
-                        </a:spcAft>
-                        <a:buClrTx/>
-                        <a:buSzTx/>
-                        <a:buFontTx/>
-                        <a:buNone/>
-                        <a:tabLst/>
-                        <a:defRPr/>
-                      </a:pPr>
-                      <a:r>
-                        <a:rPr lang="ko-KR" altLang="en-US" sz="3300" b="1" kern="1200" dirty="0">
-                          <a:ln>
-                            <a:solidFill>
-                              <a:prstClr val="white">
-                                <a:alpha val="0"/>
-                              </a:prstClr>
-                            </a:solidFill>
-                          </a:ln>
-                          <a:solidFill>
-                            <a:prstClr val="black"/>
-                          </a:solidFill>
-                          <a:latin typeface="현대하모니 L"/>
-                          <a:ea typeface="현대하모니 L" panose="02020603020101020101" pitchFamily="18" charset="-127"/>
-                          <a:cs typeface="+mn-cs"/>
-                        </a:rPr>
-                        <a:t>설명</a:t>
-                      </a:r>
-                      <a:r>
-                        <a:rPr lang="en-US" altLang="ko-KR" sz="3300" b="1" kern="1200" dirty="0">
-                          <a:ln>
-                            <a:solidFill>
-                              <a:prstClr val="white">
-                                <a:alpha val="0"/>
-                              </a:prstClr>
-                            </a:solidFill>
-                          </a:ln>
-                          <a:solidFill>
-                            <a:prstClr val="black"/>
-                          </a:solidFill>
-                          <a:latin typeface="현대하모니 L"/>
-                          <a:ea typeface="현대하모니 L" panose="02020603020101020101" pitchFamily="18" charset="-127"/>
-                          <a:cs typeface="+mn-cs"/>
-                        </a:rPr>
-                        <a:t>/</a:t>
-                      </a:r>
-                      <a:r>
-                        <a:rPr lang="ko-KR" altLang="en-US" sz="3300" b="0" i="0" kern="1200" dirty="0">
-                          <a:solidFill>
-                            <a:schemeClr val="dk1"/>
-                          </a:solidFill>
-                          <a:effectLst/>
-                          <a:latin typeface="+mn-lt"/>
-                          <a:ea typeface="+mn-ea"/>
-                          <a:cs typeface="+mn-cs"/>
-                        </a:rPr>
-                        <a:t>说明</a:t>
-                      </a:r>
-                      <a:endParaRPr lang="en-US" altLang="ko-KR" sz="3300" b="1" kern="1200" dirty="0">
-                        <a:ln>
-                          <a:solidFill>
-                            <a:prstClr val="white">
-                              <a:alpha val="0"/>
-                            </a:prstClr>
-                          </a:solidFill>
-                        </a:ln>
-                        <a:solidFill>
-                          <a:prstClr val="black"/>
-                        </a:solidFill>
-                        <a:latin typeface="현대하모니 L" panose="02020603020101020101" pitchFamily="18" charset="-127"/>
-                        <a:ea typeface="현대하모니 L" panose="02020603020101020101" pitchFamily="18" charset="-127"/>
-                        <a:cs typeface="+mn-cs"/>
-                      </a:endParaRPr>
-                    </a:p>
-                  </a:txBody>
-                  <a:tcPr marL="92882" marR="92882" marT="46441" marB="46441" anchor="ctr">
-                    <a:lnL w="12700" cap="flat" cmpd="sng" algn="ctr">
-                      <a:solidFill>
-                        <a:schemeClr val="tx1"/>
-                      </a:solidFill>
-                      <a:prstDash val="solid"/>
-                      <a:round/>
-                      <a:headEnd type="none" w="med" len="med"/>
-                      <a:tailEnd type="none" w="med" len="med"/>
-                    </a:lnL>
-                    <a:lnR w="12700" cap="flat" cmpd="sng" algn="ctr">
-                      <a:solidFill>
-                        <a:schemeClr val="tx1"/>
-                      </a:solidFill>
-                      <a:prstDash val="solid"/>
-                      <a:round/>
-                      <a:headEnd type="none" w="med" len="med"/>
-                      <a:tailEnd type="none" w="med" len="med"/>
-                    </a:lnR>
-                    <a:lnT w="12700" cap="flat" cmpd="sng" algn="ctr">
-                      <a:solidFill>
-                        <a:schemeClr val="tx1"/>
-                      </a:solidFill>
-                      <a:prstDash val="solid"/>
-                      <a:round/>
-                      <a:headEnd type="none" w="med" len="med"/>
-                      <a:tailEnd type="none" w="med" len="med"/>
-                    </a:lnT>
-                    <a:lnB w="12700" cap="flat" cmpd="sng" algn="ctr">
-                      <a:solidFill>
-                        <a:schemeClr val="tx1"/>
-                      </a:solidFill>
-                      <a:prstDash val="solid"/>
-                      <a:round/>
-                      <a:headEnd type="none" w="med" len="med"/>
-                      <a:tailEnd type="none" w="med" len="med"/>
-                    </a:lnB>
-                    <a:solidFill>
-                      <a:schemeClr val="accent1">
-                        <a:lumMod val="20000"/>
-                        <a:lumOff val="80000"/>
-                      </a:schemeClr>
-                    </a:solidFill>
-                  </a:tcPr>
-                </a:tc>
-                <a:extLst>
-                  <a:ext uri="{0D108BD9-81ED-4DB2-BD59-A6C34878D82A}">
-                    <a16:rowId xmlns:a16="http://schemas.microsoft.com/office/drawing/2014/main" val="1910052640"/>
-                  </a:ext>
-                </a:extLst>
-              </a:tr>
-              <a:tr h="1146175">
-                <a:tc vMerge="1">
-                  <a:txBody>
-                    <a:bodyPr/>
-                    <a:lstStyle/>
-                    <a:p>
-                      <a:pPr latinLnBrk="1"/>
-                      <a:endParaRPr lang="ko-KR" altLang="en-US"/>
-                    </a:p>
-                  </a:txBody>
-                  <a:tcPr/>
-                </a:tc>
-                <a:tc>
-                  <a:txBody>
-                    <a:bodyPr/>
-                    <a:lstStyle/>
-                    <a:p>
-                      <a:pPr algn="ctr"/>
-                      <a:r>
-                        <a:rPr sz="1800"/>
-                        <a:t>전선거치 조치, 감전 및 화재위험</a:t>
-                      </a:r>
-                    </a:p>
-                  </a:txBody>
-                  <a:tcPr marL="92882" marR="92882" marT="46441" marB="46441" anchor="ctr">
-                    <a:lnL w="12700" cap="flat" cmpd="sng" algn="ctr">
-                      <a:solidFill>
-                        <a:schemeClr val="tx1"/>
-                      </a:solidFill>
-                      <a:prstDash val="solid"/>
-                      <a:round/>
-                      <a:headEnd type="none" w="med" len="med"/>
-                      <a:tailEnd type="none" w="med" len="med"/>
-                    </a:lnL>
-                    <a:lnR w="12700" cap="flat" cmpd="sng" algn="ctr">
-                      <a:solidFill>
-                        <a:schemeClr val="tx1"/>
-                      </a:solidFill>
-                      <a:prstDash val="solid"/>
-                      <a:round/>
-                      <a:headEnd type="none" w="med" len="med"/>
-                      <a:tailEnd type="none" w="med" len="med"/>
-                    </a:lnR>
-                    <a:lnT w="12700" cap="flat" cmpd="sng" algn="ctr">
-                      <a:solidFill>
-                        <a:schemeClr val="tx1"/>
-                      </a:solidFill>
-                      <a:prstDash val="solid"/>
-                      <a:round/>
-                      <a:headEnd type="none" w="med" len="med"/>
-                      <a:tailEnd type="none" w="med" len="med"/>
-                    </a:lnT>
-                    <a:lnB w="12700" cap="flat" cmpd="sng" algn="ctr">
-                      <a:solidFill>
-                        <a:schemeClr val="tx1"/>
-                      </a:solidFill>
-                      <a:prstDash val="solid"/>
-                      <a:round/>
-                      <a:headEnd type="none" w="med" len="med"/>
-                      <a:tailEnd type="none" w="med" len="med"/>
-                    </a:lnB>
-                    <a:noFill/>
-                  </a:tcPr>
-                </a:tc>
-                <a:extLst>
-                  <a:ext uri="{0D108BD9-81ED-4DB2-BD59-A6C34878D82A}">
-                    <a16:rowId xmlns:a16="http://schemas.microsoft.com/office/drawing/2014/main" val="3538895530"/>
-                  </a:ext>
-                </a:extLst>
-              </a:tr>
-              <a:tr h="1557124">
-                <a:tc vMerge="1">
-                  <a:txBody>
-                    <a:bodyPr/>
-                    <a:lstStyle/>
-                    <a:p>
-                      <a:pPr latinLnBrk="1"/>
-                      <a:endParaRPr lang="ko-KR" altLang="en-US"/>
-                    </a:p>
-                  </a:txBody>
-                  <a:tcPr/>
-                </a:tc>
-                <a:tc>
-                  <a:txBody>
-                    <a:bodyPr/>
-                    <a:lstStyle/>
-                    <a:p>
-                      <a:pPr algn="ctr"/>
-                      <a:r>
-                        <a:rPr sz="2000"/>
-                        <a:t>电线架空管理，防触电及火灾</a:t>
-                      </a:r>
-                    </a:p>
-                  </a:txBody>
-                  <a:tcPr marL="92882" marR="92882" marT="46441" marB="46441" anchor="ctr">
-                    <a:lnL w="12700" cap="flat" cmpd="sng" algn="ctr">
-                      <a:solidFill>
-                        <a:schemeClr val="tx1"/>
-                      </a:solidFill>
-                      <a:prstDash val="solid"/>
-                      <a:round/>
-                      <a:headEnd type="none" w="med" len="med"/>
-                      <a:tailEnd type="none" w="med" len="med"/>
-                    </a:lnL>
-                    <a:lnR w="12700" cap="flat" cmpd="sng" algn="ctr">
-                      <a:solidFill>
-                        <a:schemeClr val="tx1"/>
-                      </a:solidFill>
-                      <a:prstDash val="solid"/>
-                      <a:round/>
-                      <a:headEnd type="none" w="med" len="med"/>
-                      <a:tailEnd type="none" w="med" len="med"/>
-                    </a:lnR>
-                    <a:lnT w="12700" cap="flat" cmpd="sng" algn="ctr">
-                      <a:solidFill>
-                        <a:schemeClr val="tx1"/>
-                      </a:solidFill>
-                      <a:prstDash val="solid"/>
-                      <a:round/>
-                      <a:headEnd type="none" w="med" len="med"/>
-                      <a:tailEnd type="none" w="med" len="med"/>
-                    </a:lnT>
-                    <a:lnB w="12700" cap="flat" cmpd="sng" algn="ctr">
-                      <a:solidFill>
-                        <a:schemeClr val="tx1"/>
-                      </a:solidFill>
-                      <a:prstDash val="solid"/>
-                      <a:round/>
-                      <a:headEnd type="none" w="med" len="med"/>
-                      <a:tailEnd type="none" w="med" len="med"/>
-                    </a:lnB>
-                    <a:noFill/>
-                  </a:tcPr>
-                </a:tc>
-                <a:extLst>
-                  <a:ext uri="{0D108BD9-81ED-4DB2-BD59-A6C34878D82A}">
-                    <a16:rowId xmlns:a16="http://schemas.microsoft.com/office/drawing/2014/main" val="3739360056"/>
-                  </a:ext>
-                </a:extLst>
-              </a:tr>
-              <a:tr h="1341252">
-                <a:tc vMerge="1">
-                  <a:txBody>
-                    <a:bodyPr/>
-                    <a:lstStyle/>
-                    <a:p>
-                      <a:pPr latinLnBrk="1"/>
-                      <a:endParaRPr lang="ko-KR" altLang="en-US"/>
-                    </a:p>
-                  </a:txBody>
-                  <a:tcPr/>
-                </a:tc>
-                <a:tc>
-                  <a:txBody>
-                    <a:bodyPr/>
-                    <a:lstStyle/>
-                    <a:p>
-                      <a:pPr algn="ctr"/>
-                      <a:r>
-                        <a:rPr sz="1200"/>
-                        <a:t>Treo dây điện, nguy cơ điện giật và hỏa hoạn</a:t>
-                      </a:r>
-                    </a:p>
-                  </a:txBody>
-                  <a:tcPr marL="92882" marR="92882" marT="46441" marB="46441" anchor="ctr">
-                    <a:lnL w="12700" cap="flat" cmpd="sng" algn="ctr">
-                      <a:solidFill>
-                        <a:schemeClr val="tx1"/>
-                      </a:solidFill>
-                      <a:prstDash val="solid"/>
-                      <a:round/>
-                      <a:headEnd type="none" w="med" len="med"/>
-                      <a:tailEnd type="none" w="med" len="med"/>
-                    </a:lnL>
-                    <a:lnR w="12700" cap="flat" cmpd="sng" algn="ctr">
-                      <a:solidFill>
-                        <a:schemeClr val="tx1"/>
-                      </a:solidFill>
-                      <a:prstDash val="solid"/>
-                      <a:round/>
-                      <a:headEnd type="none" w="med" len="med"/>
-                      <a:tailEnd type="none" w="med" len="med"/>
-                    </a:lnR>
-                    <a:lnT w="12700" cap="flat" cmpd="sng" algn="ctr">
-                      <a:solidFill>
-                        <a:schemeClr val="tx1"/>
-                      </a:solidFill>
-                      <a:prstDash val="solid"/>
-                      <a:round/>
-                      <a:headEnd type="none" w="med" len="med"/>
-                      <a:tailEnd type="none" w="med" len="med"/>
-                    </a:lnT>
-                    <a:lnB w="12700" cap="flat" cmpd="sng" algn="ctr">
-                      <a:solidFill>
-                        <a:schemeClr val="tx1"/>
-                      </a:solidFill>
-                      <a:prstDash val="solid"/>
-                      <a:round/>
-                      <a:headEnd type="none" w="med" len="med"/>
-                      <a:tailEnd type="none" w="med" len="med"/>
-                    </a:lnB>
-                    <a:noFill/>
-                  </a:tcPr>
-                </a:tc>
-                <a:extLst>
-                  <a:ext uri="{0D108BD9-81ED-4DB2-BD59-A6C34878D82A}">
-                    <a16:rowId xmlns:a16="http://schemas.microsoft.com/office/drawing/2014/main" val="2576126919"/>
-                  </a:ext>
-                </a:extLst>
-              </a:tr>
-              <a:tr h="1515597">
-                <a:tc vMerge="1">
-                  <a:txBody>
-                    <a:bodyPr/>
-                    <a:lstStyle/>
-                    <a:p>
-                      <a:pPr latinLnBrk="1"/>
-                      <a:endParaRPr lang="ko-KR" altLang="en-US"/>
-                    </a:p>
-                  </a:txBody>
-                  <a:tcPr/>
-                </a:tc>
-                <a:tc>
-                  <a:txBody>
-                    <a:bodyPr/>
-                    <a:lstStyle/>
-                    <a:p>
-                      <a:pPr algn="ctr"/>
-                      <a:r>
-                        <a:rPr sz="1000"/>
-                        <a:t>ဝါယာကြိုးများချိတ်ဆွဲရန်၊ ဓာတ်လိုက်မှုနှင့် မီးဘေးအန္တရာယ်</a:t>
-                      </a:r>
-                    </a:p>
-                  </a:txBody>
-                  <a:tcPr marL="88479" marR="88479" marT="44240" marB="44240" anchor="ctr">
-                    <a:lnL w="12700" cap="flat" cmpd="sng" algn="ctr">
-                      <a:solidFill>
-                        <a:schemeClr val="tx1"/>
-                      </a:solidFill>
-                      <a:prstDash val="solid"/>
-                      <a:round/>
-                      <a:headEnd type="none" w="med" len="med"/>
-                      <a:tailEnd type="none" w="med" len="med"/>
-                    </a:lnL>
-                    <a:lnR w="12700" cap="flat" cmpd="sng" algn="ctr">
-                      <a:solidFill>
-                        <a:schemeClr val="tx1"/>
-                      </a:solidFill>
-                      <a:prstDash val="solid"/>
-                      <a:round/>
-                      <a:headEnd type="none" w="med" len="med"/>
-                      <a:tailEnd type="none" w="med" len="med"/>
-                    </a:lnR>
-                    <a:lnT w="12700" cap="flat" cmpd="sng" algn="ctr">
-                      <a:solidFill>
-                        <a:schemeClr val="tx1"/>
-                      </a:solidFill>
-                      <a:prstDash val="solid"/>
-                      <a:round/>
-                      <a:headEnd type="none" w="med" len="med"/>
-                      <a:tailEnd type="none" w="med" len="med"/>
-                    </a:lnT>
-                    <a:lnB w="12700" cap="flat" cmpd="sng" algn="ctr">
-                      <a:solidFill>
-                        <a:schemeClr val="tx1"/>
-                      </a:solidFill>
-                      <a:prstDash val="solid"/>
-                      <a:round/>
-                      <a:headEnd type="none" w="med" len="med"/>
-                      <a:tailEnd type="none" w="med" len="med"/>
-                    </a:lnB>
-                    <a:noFill/>
-                  </a:tcPr>
-                </a:tc>
-                <a:extLst>
-                  <a:ext uri="{0D108BD9-81ED-4DB2-BD59-A6C34878D82A}">
-                    <a16:rowId xmlns:a16="http://schemas.microsoft.com/office/drawing/2014/main" val="2531484610"/>
-                  </a:ext>
-                </a:extLst>
-              </a:tr>
-            </a:tbl>
-          </a:graphicData>
-        </a:graphic>
-      </p:graphicFrame>
-      <p:pic>
-        <p:nvPicPr>
-          <p:cNvPr id="36" name="그림 35">
-            <a:extLst>
-              <a:ext uri="{FF2B5EF4-FFF2-40B4-BE49-F238E27FC236}">
-                <a16:creationId xmlns:a16="http://schemas.microsoft.com/office/drawing/2014/main" id="{96B6E149-B4E5-174D-0DD2-D8F0F3D30191}"/>
-              </a:ext>
-            </a:extLst>
-          </p:cNvPr>
-          <p:cNvPicPr>
-            <a:picLocks noChangeAspect="1"/>
-          </p:cNvPicPr>
-          <p:nvPr/>
-        </p:nvPicPr>
-        <p:blipFill>
-          <a:blip r:embed="rId3" cstate="screen">
-            <a:extLst>
-              <a:ext uri="{28A0092B-C50C-407E-A947-70E740481C1C}">
-                <a14:useLocalDpi xmlns:a14="http://schemas.microsoft.com/office/drawing/2010/main"/>
-              </a:ext>
-            </a:extLst>
-          </a:blip>
-          <a:stretch>
-            <a:fillRect/>
-          </a:stretch>
-        </p:blipFill>
-        <p:spPr>
-          <a:xfrm>
-            <a:off x="11198128" y="1446210"/>
-            <a:ext cx="993874" cy="663993"/>
-          </a:xfrm>
-          <a:prstGeom prst="rect">
-            <a:avLst/>
-          </a:prstGeom>
-        </p:spPr>
-      </p:pic>
-      <p:pic>
-        <p:nvPicPr>
-          <p:cNvPr id="40" name="그림 39">
-            <a:extLst>
-              <a:ext uri="{FF2B5EF4-FFF2-40B4-BE49-F238E27FC236}">
-                <a16:creationId xmlns:a16="http://schemas.microsoft.com/office/drawing/2014/main" id="{288CB438-6242-D70A-FD80-BA20855D70B3}"/>
-              </a:ext>
-            </a:extLst>
-          </p:cNvPr>
-          <p:cNvPicPr>
-            <a:picLocks noChangeAspect="1"/>
-          </p:cNvPicPr>
-          <p:nvPr/>
-        </p:nvPicPr>
-        <p:blipFill>
-          <a:blip r:embed="rId4" cstate="screen">
-            <a:extLst>
-              <a:ext uri="{28A0092B-C50C-407E-A947-70E740481C1C}">
-                <a14:useLocalDpi xmlns:a14="http://schemas.microsoft.com/office/drawing/2010/main"/>
-              </a:ext>
-            </a:extLst>
-          </a:blip>
-          <a:stretch>
-            <a:fillRect/>
-          </a:stretch>
-        </p:blipFill>
-        <p:spPr>
-          <a:xfrm>
-            <a:off x="11198128" y="2793791"/>
-            <a:ext cx="993874" cy="663435"/>
-          </a:xfrm>
-          <a:prstGeom prst="rect">
-            <a:avLst/>
-          </a:prstGeom>
-        </p:spPr>
-      </p:pic>
-      <p:pic>
-        <p:nvPicPr>
-          <p:cNvPr id="12" name="그림 11">
-            <a:extLst>
-              <a:ext uri="{FF2B5EF4-FFF2-40B4-BE49-F238E27FC236}">
-                <a16:creationId xmlns:a16="http://schemas.microsoft.com/office/drawing/2014/main" id="{6AE1E6BC-BBA4-34A9-3DBA-0F9193A7B4D1}"/>
-              </a:ext>
-            </a:extLst>
-          </p:cNvPr>
-          <p:cNvPicPr>
-            <a:picLocks noChangeAspect="1"/>
-          </p:cNvPicPr>
-          <p:nvPr/>
-        </p:nvPicPr>
-        <p:blipFill>
-          <a:blip r:embed="rId5"/>
-          <a:stretch>
-            <a:fillRect/>
-          </a:stretch>
-        </p:blipFill>
-        <p:spPr>
-          <a:xfrm>
-            <a:off x="11198128" y="5869574"/>
-            <a:ext cx="993874" cy="663435"/>
-          </a:xfrm>
-          <a:prstGeom prst="rect">
-            <a:avLst/>
-          </a:prstGeom>
-        </p:spPr>
-      </p:pic>
-      <p:pic>
-        <p:nvPicPr>
-          <p:cNvPr id="14" name="그림 13">
-            <a:extLst>
-              <a:ext uri="{FF2B5EF4-FFF2-40B4-BE49-F238E27FC236}">
-                <a16:creationId xmlns:a16="http://schemas.microsoft.com/office/drawing/2014/main" id="{4B518F7F-BBB1-72D0-7B95-3D732CE08D75}"/>
-              </a:ext>
-            </a:extLst>
-          </p:cNvPr>
-          <p:cNvPicPr>
-            <a:picLocks noChangeAspect="1"/>
-          </p:cNvPicPr>
-          <p:nvPr/>
-        </p:nvPicPr>
-        <p:blipFill>
-          <a:blip r:embed="rId6"/>
-          <a:stretch>
-            <a:fillRect/>
-          </a:stretch>
-        </p:blipFill>
-        <p:spPr>
-          <a:xfrm>
-            <a:off x="11198128" y="4522551"/>
-            <a:ext cx="993874" cy="663435"/>
-          </a:xfrm>
-          <a:prstGeom prst="rect">
-            <a:avLst/>
-          </a:prstGeom>
-        </p:spPr>
-      </p:pic>
-      <p:sp>
-        <p:nvSpPr>
-          <p:cNvPr id="2" name="PHOTO_BOX">
-            <a:extLst>
-              <a:ext uri="{FF2B5EF4-FFF2-40B4-BE49-F238E27FC236}">
-                <a16:creationId xmlns:a16="http://schemas.microsoft.com/office/drawing/2014/main" id="{C9F7C991-8014-7D70-7E35-504D2E8C239D}"/>
-              </a:ext>
-            </a:extLst>
-          </p:cNvPr>
-          <p:cNvSpPr/>
-          <p:nvPr/>
-        </p:nvSpPr>
-        <p:spPr>
-          <a:xfrm>
-            <a:off x="0" y="603504"/>
-            <a:ext cx="6510528" cy="6254496"/>
-          </a:xfrm>
-          <a:prstGeom prst="rect">
-            <a:avLst/>
-          </a:prstGeom>
-          <a:solidFill>
-            <a:srgbClr val="FF0000"/>
-          </a:solidFill>
-        </p:spPr>
-        <p:style>
-          <a:lnRef idx="2">
-            <a:schemeClr val="accent1">
-              <a:shade val="15000"/>
-            </a:schemeClr>
-          </a:lnRef>
-          <a:fillRef idx="1">
-            <a:schemeClr val="accent1"/>
-          </a:fillRef>
-          <a:effectRef idx="0">
-            <a:schemeClr val="accent1"/>
-          </a:effectRef>
-          <a:fontRef idx="minor">
-            <a:schemeClr val="lt1"/>
-          </a:fontRef>
-        </p:style>
-        <p:txBody>
-          <a:bodyPr rtlCol="0" anchor="ctr"/>
-          <a:lstStyle/>
-          <a:p>
-            <a:pPr algn="ctr"/>
-            <a:r>
-              <a:rPr lang="en-US" altLang="ko-KR" sz="4800" dirty="0"/>
-              <a:t>PHOTO_BOX</a:t>
-            </a:r>
-            <a:endParaRPr lang="ko-KR" altLang="en-US" sz="4800" dirty="0"/>
-          </a:p>
-        </p:txBody>
-      </p:sp>
-    </p:spTree>
-    <p:extLst>
-      <p:ext uri="{BB962C8B-B14F-4D97-AF65-F5344CB8AC3E}">
-        <p14:creationId xmlns:p14="http://schemas.microsoft.com/office/powerpoint/2010/main" val="2363331060"/>
+        <p14:creationId xmlns:p14="http://schemas.microsoft.com/office/powerpoint/2010/main" val="3162855923"/>
       </p:ext>
     </p:extLst>
   </p:cSld>
@@ -23490,6 +18655,15 @@
 </file>
 
 <file path=customXml/item1.xml><?xml version="1.0" encoding="utf-8"?>
+<?mso-contentType ?>
+<FormTemplates xmlns="http://schemas.microsoft.com/sharepoint/v3/contenttype/forms">
+  <Display>DocumentLibraryForm</Display>
+  <Edit>DocumentLibraryForm</Edit>
+  <New>DocumentLibraryForm</New>
+</FormTemplates>
+</file>
+
+<file path=customXml/item2.xml><?xml version="1.0" encoding="utf-8"?>
 <p:properties xmlns:p="http://schemas.microsoft.com/office/2006/metadata/properties" xmlns:xsi="http://www.w3.org/2001/XMLSchema-instance" xmlns:pc="http://schemas.microsoft.com/office/infopath/2007/PartnerControls">
   <documentManagement>
     <lcf76f155ced4ddcb4097134ff3c332f xmlns="552e0757-ace6-46d3-a9a0-fef629e06688">
@@ -23498,15 +18672,6 @@
     <TaxCatchAll xmlns="14e95305-4dae-4d1b-ba82-6fbec92cd780" xsi:nil="true"/>
   </documentManagement>
 </p:properties>
-</file>
-
-<file path=customXml/item2.xml><?xml version="1.0" encoding="utf-8"?>
-<?mso-contentType ?>
-<FormTemplates xmlns="http://schemas.microsoft.com/sharepoint/v3/contenttype/forms">
-  <Display>DocumentLibraryForm</Display>
-  <Edit>DocumentLibraryForm</Edit>
-  <New>DocumentLibraryForm</New>
-</FormTemplates>
 </file>
 
 <file path=customXml/item3.xml><?xml version="1.0" encoding="utf-8"?>
@@ -23723,6 +18888,14 @@
 </file>
 
 <file path=customXml/itemProps1.xml><?xml version="1.0" encoding="utf-8"?>
+<ds:datastoreItem xmlns:ds="http://schemas.openxmlformats.org/officeDocument/2006/customXml" ds:itemID="{ACBA21F2-B51B-40F5-A150-A9F201C2F2DB}">
+  <ds:schemaRefs>
+    <ds:schemaRef ds:uri="http://schemas.microsoft.com/sharepoint/v3/contenttype/forms"/>
+  </ds:schemaRefs>
+</ds:datastoreItem>
+</file>
+
+<file path=customXml/itemProps2.xml><?xml version="1.0" encoding="utf-8"?>
 <ds:datastoreItem xmlns:ds="http://schemas.openxmlformats.org/officeDocument/2006/customXml" ds:itemID="{4177CBB7-B714-4F85-AD50-F0BBEF76B952}">
   <ds:schemaRefs>
     <ds:schemaRef ds:uri="http://schemas.microsoft.com/office/2006/documentManagement/types"/>
@@ -23735,14 +18908,6 @@
     <ds:schemaRef ds:uri="552e0757-ace6-46d3-a9a0-fef629e06688"/>
     <ds:schemaRef ds:uri="http://purl.org/dc/dcmitype/"/>
     <ds:schemaRef ds:uri="http://purl.org/dc/terms/"/>
-  </ds:schemaRefs>
-</ds:datastoreItem>
-</file>
-
-<file path=customXml/itemProps2.xml><?xml version="1.0" encoding="utf-8"?>
-<ds:datastoreItem xmlns:ds="http://schemas.openxmlformats.org/officeDocument/2006/customXml" ds:itemID="{ACBA21F2-B51B-40F5-A150-A9F201C2F2DB}">
-  <ds:schemaRefs>
-    <ds:schemaRef ds:uri="http://schemas.microsoft.com/sharepoint/v3/contenttype/forms"/>
   </ds:schemaRefs>
 </ds:datastoreItem>
 </file>
